--- a/apresentacao/Apresentacao_Case_iFood.pptx
+++ b/apresentacao/Apresentacao_Case_iFood.pptx
@@ -2661,6 +2661,13 @@
           </a:solidFill>
           <a:ln/>
         </p:spPr>
+        <p:txBody>
+          <a:bodyPr/>
+          <a:lstStyle/>
+          <a:p>
+            <a:endParaRPr lang="en-US"/>
+          </a:p>
+        </p:txBody>
       </p:sp>
       <p:sp>
         <p:nvSpPr>
@@ -2812,6 +2819,13 @@
             <a:prstDash val="solid"/>
           </a:ln>
         </p:spPr>
+        <p:txBody>
+          <a:bodyPr/>
+          <a:lstStyle/>
+          <a:p>
+            <a:endParaRPr lang="en-US"/>
+          </a:p>
+        </p:txBody>
       </p:sp>
       <p:sp>
         <p:nvSpPr>
@@ -3287,6 +3301,13 @@
           </a:solidFill>
           <a:ln/>
         </p:spPr>
+        <p:txBody>
+          <a:bodyPr/>
+          <a:lstStyle/>
+          <a:p>
+            <a:endParaRPr lang="en-US"/>
+          </a:p>
+        </p:txBody>
       </p:sp>
       <p:sp>
         <p:nvSpPr>
@@ -3457,6 +3478,13 @@
           </a:solidFill>
           <a:ln/>
         </p:spPr>
+        <p:txBody>
+          <a:bodyPr/>
+          <a:lstStyle/>
+          <a:p>
+            <a:endParaRPr lang="en-US"/>
+          </a:p>
+        </p:txBody>
       </p:sp>
       <p:sp>
         <p:nvSpPr>
@@ -3609,6 +3637,13 @@
           </a:solidFill>
           <a:ln/>
         </p:spPr>
+        <p:txBody>
+          <a:bodyPr/>
+          <a:lstStyle/>
+          <a:p>
+            <a:endParaRPr lang="en-US"/>
+          </a:p>
+        </p:txBody>
       </p:sp>
       <p:sp>
         <p:nvSpPr>
@@ -3898,6 +3933,13 @@
           </a:solidFill>
           <a:ln/>
         </p:spPr>
+        <p:txBody>
+          <a:bodyPr/>
+          <a:lstStyle/>
+          <a:p>
+            <a:endParaRPr lang="en-US"/>
+          </a:p>
+        </p:txBody>
       </p:sp>
       <p:sp>
         <p:nvSpPr>
@@ -4029,6 +4071,13 @@
           </a:solidFill>
           <a:ln/>
         </p:spPr>
+        <p:txBody>
+          <a:bodyPr/>
+          <a:lstStyle/>
+          <a:p>
+            <a:endParaRPr lang="en-US"/>
+          </a:p>
+        </p:txBody>
       </p:sp>
       <p:sp>
         <p:nvSpPr>
@@ -4160,6 +4209,13 @@
           </a:solidFill>
           <a:ln/>
         </p:spPr>
+        <p:txBody>
+          <a:bodyPr/>
+          <a:lstStyle/>
+          <a:p>
+            <a:endParaRPr lang="en-US"/>
+          </a:p>
+        </p:txBody>
       </p:sp>
       <p:sp>
         <p:nvSpPr>
@@ -4291,6 +4347,13 @@
           </a:solidFill>
           <a:ln/>
         </p:spPr>
+        <p:txBody>
+          <a:bodyPr/>
+          <a:lstStyle/>
+          <a:p>
+            <a:endParaRPr lang="en-US"/>
+          </a:p>
+        </p:txBody>
       </p:sp>
       <p:sp>
         <p:nvSpPr>
@@ -4527,6 +4590,13 @@
           </a:solidFill>
           <a:ln/>
         </p:spPr>
+        <p:txBody>
+          <a:bodyPr/>
+          <a:lstStyle/>
+          <a:p>
+            <a:endParaRPr lang="en-US"/>
+          </a:p>
+        </p:txBody>
       </p:sp>
       <p:sp>
         <p:nvSpPr>
@@ -4716,6 +4786,13 @@
             <a:prstDash val="solid"/>
           </a:ln>
         </p:spPr>
+        <p:txBody>
+          <a:bodyPr/>
+          <a:lstStyle/>
+          <a:p>
+            <a:endParaRPr lang="en-US"/>
+          </a:p>
+        </p:txBody>
       </p:sp>
       <p:sp>
         <p:nvSpPr>
@@ -4913,6 +4990,13 @@
           </a:solidFill>
           <a:ln/>
         </p:spPr>
+        <p:txBody>
+          <a:bodyPr/>
+          <a:lstStyle/>
+          <a:p>
+            <a:endParaRPr lang="en-US"/>
+          </a:p>
+        </p:txBody>
       </p:sp>
       <p:sp>
         <p:nvSpPr>
@@ -5041,6 +5125,13 @@
           </a:solidFill>
           <a:ln/>
         </p:spPr>
+        <p:txBody>
+          <a:bodyPr/>
+          <a:lstStyle/>
+          <a:p>
+            <a:endParaRPr lang="en-US"/>
+          </a:p>
+        </p:txBody>
       </p:sp>
       <p:sp>
         <p:nvSpPr>
@@ -5169,6 +5260,13 @@
           </a:solidFill>
           <a:ln/>
         </p:spPr>
+        <p:txBody>
+          <a:bodyPr/>
+          <a:lstStyle/>
+          <a:p>
+            <a:endParaRPr lang="en-US"/>
+          </a:p>
+        </p:txBody>
       </p:sp>
       <p:sp>
         <p:nvSpPr>
@@ -5297,6 +5395,13 @@
           </a:solidFill>
           <a:ln/>
         </p:spPr>
+        <p:txBody>
+          <a:bodyPr/>
+          <a:lstStyle/>
+          <a:p>
+            <a:endParaRPr lang="en-US"/>
+          </a:p>
+        </p:txBody>
       </p:sp>
       <p:sp>
         <p:nvSpPr>
@@ -5425,6 +5530,13 @@
           </a:solidFill>
           <a:ln/>
         </p:spPr>
+        <p:txBody>
+          <a:bodyPr/>
+          <a:lstStyle/>
+          <a:p>
+            <a:endParaRPr lang="en-US"/>
+          </a:p>
+        </p:txBody>
       </p:sp>
       <p:sp>
         <p:nvSpPr>
@@ -5553,6 +5665,13 @@
           </a:solidFill>
           <a:ln/>
         </p:spPr>
+        <p:txBody>
+          <a:bodyPr/>
+          <a:lstStyle/>
+          <a:p>
+            <a:endParaRPr lang="en-US"/>
+          </a:p>
+        </p:txBody>
       </p:sp>
       <p:sp>
         <p:nvSpPr>
@@ -5860,6 +5979,13 @@
           </a:solidFill>
           <a:ln/>
         </p:spPr>
+        <p:txBody>
+          <a:bodyPr/>
+          <a:lstStyle/>
+          <a:p>
+            <a:endParaRPr lang="en-US"/>
+          </a:p>
+        </p:txBody>
       </p:sp>
       <p:sp>
         <p:nvSpPr>
@@ -5954,6 +6080,13 @@
           </a:solidFill>
           <a:ln/>
         </p:spPr>
+        <p:txBody>
+          <a:bodyPr/>
+          <a:lstStyle/>
+          <a:p>
+            <a:endParaRPr lang="en-US"/>
+          </a:p>
+        </p:txBody>
       </p:sp>
       <p:sp>
         <p:nvSpPr>
@@ -6048,6 +6181,13 @@
           </a:solidFill>
           <a:ln/>
         </p:spPr>
+        <p:txBody>
+          <a:bodyPr/>
+          <a:lstStyle/>
+          <a:p>
+            <a:endParaRPr lang="en-US"/>
+          </a:p>
+        </p:txBody>
       </p:sp>
       <p:sp>
         <p:nvSpPr>
@@ -6142,6 +6282,13 @@
           </a:solidFill>
           <a:ln/>
         </p:spPr>
+        <p:txBody>
+          <a:bodyPr/>
+          <a:lstStyle/>
+          <a:p>
+            <a:endParaRPr lang="en-US"/>
+          </a:p>
+        </p:txBody>
       </p:sp>
       <p:sp>
         <p:nvSpPr>
@@ -6236,6 +6383,13 @@
           </a:solidFill>
           <a:ln/>
         </p:spPr>
+        <p:txBody>
+          <a:bodyPr/>
+          <a:lstStyle/>
+          <a:p>
+            <a:endParaRPr lang="en-US"/>
+          </a:p>
+        </p:txBody>
       </p:sp>
       <p:sp>
         <p:nvSpPr>
@@ -6588,6 +6742,13 @@
             <a:prstDash val="solid"/>
           </a:ln>
         </p:spPr>
+        <p:txBody>
+          <a:bodyPr/>
+          <a:lstStyle/>
+          <a:p>
+            <a:endParaRPr lang="en-US"/>
+          </a:p>
+        </p:txBody>
       </p:sp>
       <p:sp>
         <p:nvSpPr>
@@ -6743,6 +6904,13 @@
             <a:prstDash val="solid"/>
           </a:ln>
         </p:spPr>
+        <p:txBody>
+          <a:bodyPr/>
+          <a:lstStyle/>
+          <a:p>
+            <a:endParaRPr lang="en-US"/>
+          </a:p>
+        </p:txBody>
       </p:sp>
       <p:sp>
         <p:nvSpPr>
@@ -6898,6 +7066,13 @@
             <a:prstDash val="solid"/>
           </a:ln>
         </p:spPr>
+        <p:txBody>
+          <a:bodyPr/>
+          <a:lstStyle/>
+          <a:p>
+            <a:endParaRPr lang="en-US"/>
+          </a:p>
+        </p:txBody>
       </p:sp>
       <p:sp>
         <p:nvSpPr>
@@ -7053,6 +7228,13 @@
             <a:prstDash val="solid"/>
           </a:ln>
         </p:spPr>
+        <p:txBody>
+          <a:bodyPr/>
+          <a:lstStyle/>
+          <a:p>
+            <a:endParaRPr lang="en-US"/>
+          </a:p>
+        </p:txBody>
       </p:sp>
       <p:sp>
         <p:nvSpPr>
@@ -7582,6 +7764,13 @@
           </a:solidFill>
           <a:ln/>
         </p:spPr>
+        <p:txBody>
+          <a:bodyPr/>
+          <a:lstStyle/>
+          <a:p>
+            <a:endParaRPr lang="en-US"/>
+          </a:p>
+        </p:txBody>
       </p:sp>
       <p:sp>
         <p:nvSpPr>
@@ -7712,6 +7901,13 @@
           </a:solidFill>
           <a:ln/>
         </p:spPr>
+        <p:txBody>
+          <a:bodyPr/>
+          <a:lstStyle/>
+          <a:p>
+            <a:endParaRPr lang="en-US"/>
+          </a:p>
+        </p:txBody>
       </p:sp>
       <p:sp>
         <p:nvSpPr>
@@ -7770,6 +7966,13 @@
           </a:solidFill>
           <a:ln/>
         </p:spPr>
+        <p:txBody>
+          <a:bodyPr/>
+          <a:lstStyle/>
+          <a:p>
+            <a:endParaRPr lang="en-US"/>
+          </a:p>
+        </p:txBody>
       </p:sp>
       <p:sp>
         <p:nvSpPr>
@@ -7900,6 +8103,13 @@
           </a:solidFill>
           <a:ln/>
         </p:spPr>
+        <p:txBody>
+          <a:bodyPr/>
+          <a:lstStyle/>
+          <a:p>
+            <a:endParaRPr lang="en-US"/>
+          </a:p>
+        </p:txBody>
       </p:sp>
       <p:sp>
         <p:nvSpPr>
@@ -7958,6 +8168,13 @@
           </a:solidFill>
           <a:ln/>
         </p:spPr>
+        <p:txBody>
+          <a:bodyPr/>
+          <a:lstStyle/>
+          <a:p>
+            <a:endParaRPr lang="en-US"/>
+          </a:p>
+        </p:txBody>
       </p:sp>
       <p:sp>
         <p:nvSpPr>
@@ -8088,6 +8305,13 @@
           </a:solidFill>
           <a:ln/>
         </p:spPr>
+        <p:txBody>
+          <a:bodyPr/>
+          <a:lstStyle/>
+          <a:p>
+            <a:endParaRPr lang="en-US"/>
+          </a:p>
+        </p:txBody>
       </p:sp>
       <p:sp>
         <p:nvSpPr>
@@ -8146,6 +8370,13 @@
           </a:solidFill>
           <a:ln/>
         </p:spPr>
+        <p:txBody>
+          <a:bodyPr/>
+          <a:lstStyle/>
+          <a:p>
+            <a:endParaRPr lang="en-US"/>
+          </a:p>
+        </p:txBody>
       </p:sp>
       <p:sp>
         <p:nvSpPr>
@@ -8276,6 +8507,13 @@
           </a:solidFill>
           <a:ln/>
         </p:spPr>
+        <p:txBody>
+          <a:bodyPr/>
+          <a:lstStyle/>
+          <a:p>
+            <a:endParaRPr lang="en-US"/>
+          </a:p>
+        </p:txBody>
       </p:sp>
       <p:sp>
         <p:nvSpPr>
@@ -8511,6 +8749,13 @@
           </a:solidFill>
           <a:ln/>
         </p:spPr>
+        <p:txBody>
+          <a:bodyPr/>
+          <a:lstStyle/>
+          <a:p>
+            <a:endParaRPr lang="en-US"/>
+          </a:p>
+        </p:txBody>
       </p:sp>
       <p:sp>
         <p:nvSpPr>
@@ -8681,6 +8926,13 @@
           </a:solidFill>
           <a:ln/>
         </p:spPr>
+        <p:txBody>
+          <a:bodyPr/>
+          <a:lstStyle/>
+          <a:p>
+            <a:endParaRPr lang="en-US"/>
+          </a:p>
+        </p:txBody>
       </p:sp>
       <p:sp>
         <p:nvSpPr>
@@ -9135,6 +9387,13 @@
           </a:solidFill>
           <a:ln/>
         </p:spPr>
+        <p:txBody>
+          <a:bodyPr/>
+          <a:lstStyle/>
+          <a:p>
+            <a:endParaRPr lang="en-US"/>
+          </a:p>
+        </p:txBody>
       </p:sp>
       <p:sp>
         <p:nvSpPr>
@@ -9232,6 +9491,13 @@
           </a:solidFill>
           <a:ln/>
         </p:spPr>
+        <p:txBody>
+          <a:bodyPr/>
+          <a:lstStyle/>
+          <a:p>
+            <a:endParaRPr lang="en-US"/>
+          </a:p>
+        </p:txBody>
       </p:sp>
       <p:sp>
         <p:nvSpPr>
@@ -9329,6 +9595,13 @@
           </a:solidFill>
           <a:ln/>
         </p:spPr>
+        <p:txBody>
+          <a:bodyPr/>
+          <a:lstStyle/>
+          <a:p>
+            <a:endParaRPr lang="en-US"/>
+          </a:p>
+        </p:txBody>
       </p:sp>
       <p:sp>
         <p:nvSpPr>
@@ -9426,6 +9699,13 @@
           </a:solidFill>
           <a:ln/>
         </p:spPr>
+        <p:txBody>
+          <a:bodyPr/>
+          <a:lstStyle/>
+          <a:p>
+            <a:endParaRPr lang="en-US"/>
+          </a:p>
+        </p:txBody>
       </p:sp>
       <p:sp>
         <p:nvSpPr>
@@ -9523,6 +9803,13 @@
           </a:solidFill>
           <a:ln/>
         </p:spPr>
+        <p:txBody>
+          <a:bodyPr/>
+          <a:lstStyle/>
+          <a:p>
+            <a:endParaRPr lang="en-US"/>
+          </a:p>
+        </p:txBody>
       </p:sp>
       <p:sp>
         <p:nvSpPr>
@@ -9620,6 +9907,13 @@
           </a:solidFill>
           <a:ln/>
         </p:spPr>
+        <p:txBody>
+          <a:bodyPr/>
+          <a:lstStyle/>
+          <a:p>
+            <a:endParaRPr lang="en-US"/>
+          </a:p>
+        </p:txBody>
       </p:sp>
       <p:sp>
         <p:nvSpPr>
@@ -9946,6 +10240,13 @@
           </a:solidFill>
           <a:ln/>
         </p:spPr>
+        <p:txBody>
+          <a:bodyPr/>
+          <a:lstStyle/>
+          <a:p>
+            <a:endParaRPr lang="en-US"/>
+          </a:p>
+        </p:txBody>
       </p:sp>
       <p:sp>
         <p:nvSpPr>
@@ -10040,6 +10341,13 @@
           </a:solidFill>
           <a:ln/>
         </p:spPr>
+        <p:txBody>
+          <a:bodyPr/>
+          <a:lstStyle/>
+          <a:p>
+            <a:endParaRPr lang="en-US"/>
+          </a:p>
+        </p:txBody>
       </p:sp>
       <p:sp>
         <p:nvSpPr>

--- a/apresentacao/Apresentacao_Case_iFood.pptx
+++ b/apresentacao/Apresentacao_Case_iFood.pptx
@@ -5,7 +5,7 @@
     <p:sldMasterId id="2147483648" r:id="rId1"/>
   </p:sldMasterIdLst>
   <p:notesMasterIdLst>
-    <p:notesMasterId r:id="rId15"/>
+    <p:notesMasterId r:id="rId16"/>
   </p:notesMasterIdLst>
   <p:sldIdLst>
     <p:sldId id="256" r:id="rId2"/>
@@ -21,6 +21,7 @@
     <p:sldId id="266" r:id="rId12"/>
     <p:sldId id="267" r:id="rId13"/>
     <p:sldId id="268" r:id="rId14"/>
+    <p:sldId id="269" r:id="rId15"/>
   </p:sldIdLst>
   <p:sldSz cx="12192000" cy="6858000"/>
   <p:notesSz cx="6858000" cy="12192000"/>
@@ -266,7 +267,7 @@
           <c:smooth val="1"/>
           <c:extLst>
             <c:ext xmlns:c16="http://schemas.microsoft.com/office/drawing/2014/chart" uri="{C3380CC4-5D6E-409C-BE32-E72D297353CC}">
-              <c16:uniqueId val="{00000000-D7EC-477A-9D5E-9FD16FC2A241}"/>
+              <c16:uniqueId val="{00000000-4073-4E69-92AD-7A41AF85A0F1}"/>
             </c:ext>
           </c:extLst>
         </c:ser>
@@ -621,7 +622,7 @@
           <c:smooth val="1"/>
           <c:extLst>
             <c:ext xmlns:c16="http://schemas.microsoft.com/office/drawing/2014/chart" uri="{C3380CC4-5D6E-409C-BE32-E72D297353CC}">
-              <c16:uniqueId val="{00000000-B7DD-44FE-BCC8-51DBC9A7EE1A}"/>
+              <c16:uniqueId val="{00000000-1CA0-4CCE-BF79-15DC383BF919}"/>
             </c:ext>
           </c:extLst>
         </c:ser>
@@ -955,7 +956,7 @@
           </c:val>
           <c:extLst>
             <c:ext xmlns:c16="http://schemas.microsoft.com/office/drawing/2014/chart" uri="{C3380CC4-5D6E-409C-BE32-E72D297353CC}">
-              <c16:uniqueId val="{00000000-211D-402D-BE1C-E74C8F815C1E}"/>
+              <c16:uniqueId val="{00000000-FDA9-4651-8D3F-77C3595EA595}"/>
             </c:ext>
           </c:extLst>
         </c:ser>
@@ -1113,7 +1114,7 @@
     </p:spTree>
     <p:extLst>
       <p:ext uri="{BB962C8B-B14F-4D97-AF65-F5344CB8AC3E}">
-        <p14:creationId xmlns:p14="http://schemas.microsoft.com/office/powerpoint/2010/main" val="1595383654"/>
+        <p14:creationId xmlns:p14="http://schemas.microsoft.com/office/powerpoint/2010/main" val="1884698645"/>
       </p:ext>
     </p:extLst>
   </p:cSld>
@@ -1650,6 +1651,97 @@
             <a:fld id="{F7021451-1387-4CA6-816F-3879F97B5CBC}" type="slidenum">
               <a:rPr lang="en-US"/>
               <a:t>13</a:t>
+            </a:fld>
+            <a:endParaRPr lang="en-US" dirty="0"/>
+          </a:p>
+        </p:txBody>
+      </p:sp>
+    </p:spTree>
+    <p:extLst>
+      <p:ext uri="{BB962C8B-B14F-4D97-AF65-F5344CB8AC3E}">
+        <p14:creationId xmlns:p14="http://schemas.microsoft.com/office/powerpoint/2010/main" val="1024086991"/>
+      </p:ext>
+    </p:extLst>
+  </p:cSld>
+  <p:clrMapOvr>
+    <a:masterClrMapping/>
+  </p:clrMapOvr>
+</p:notes>
+</file>
+
+<file path=ppt/notesSlides/notesSlide14.xml><?xml version="1.0" encoding="utf-8"?>
+<p:notes xmlns:a="http://schemas.openxmlformats.org/drawingml/2006/main" xmlns:r="http://schemas.openxmlformats.org/officeDocument/2006/relationships" xmlns:p="http://schemas.openxmlformats.org/presentationml/2006/main">
+  <p:cSld>
+    <p:spTree>
+      <p:nvGrpSpPr>
+        <p:cNvPr id="1" name=""/>
+        <p:cNvGrpSpPr/>
+        <p:nvPr/>
+      </p:nvGrpSpPr>
+      <p:grpSpPr>
+        <a:xfrm>
+          <a:off x="0" y="0"/>
+          <a:ext cx="0" cy="0"/>
+          <a:chOff x="0" y="0"/>
+          <a:chExt cx="0" cy="0"/>
+        </a:xfrm>
+      </p:grpSpPr>
+      <p:sp>
+        <p:nvSpPr>
+          <p:cNvPr id="2" name="Slide Image Placeholder 1"/>
+          <p:cNvSpPr>
+            <a:spLocks noGrp="1" noRot="1" noChangeAspect="1"/>
+          </p:cNvSpPr>
+          <p:nvPr>
+            <p:ph type="sldImg"/>
+          </p:nvPr>
+        </p:nvSpPr>
+        <p:spPr/>
+        <p:txBody>
+          <a:bodyPr/>
+          <a:lstStyle/>
+          <a:p>
+            <a:endParaRPr lang="en-US" dirty="0"/>
+          </a:p>
+        </p:txBody>
+      </p:sp>
+      <p:sp>
+        <p:nvSpPr>
+          <p:cNvPr id="3" name="Notes Placeholder 2"/>
+          <p:cNvSpPr>
+            <a:spLocks noGrp="1"/>
+          </p:cNvSpPr>
+          <p:nvPr>
+            <p:ph type="body" idx="1"/>
+          </p:nvPr>
+        </p:nvSpPr>
+        <p:spPr/>
+        <p:txBody>
+          <a:bodyPr/>
+          <a:lstStyle/>
+          <a:p>
+            <a:endParaRPr lang="en-US" dirty="0"/>
+          </a:p>
+        </p:txBody>
+      </p:sp>
+      <p:sp>
+        <p:nvSpPr>
+          <p:cNvPr id="4" name="Slide Number Placeholder 3"/>
+          <p:cNvSpPr>
+            <a:spLocks noGrp="1"/>
+          </p:cNvSpPr>
+          <p:nvPr>
+            <p:ph type="sldNum" sz="quarter" idx="10"/>
+          </p:nvPr>
+        </p:nvSpPr>
+        <p:spPr/>
+        <p:txBody>
+          <a:bodyPr/>
+          <a:lstStyle/>
+          <a:p>
+            <a:fld id="{F7021451-1387-4CA6-816F-3879F97B5CBC}" type="slidenum">
+              <a:rPr lang="en-US"/>
+              <a:t>14</a:t>
             </a:fld>
             <a:endParaRPr lang="en-US" dirty="0"/>
           </a:p>
@@ -2790,7 +2882,7 @@
                   <a:srgbClr val="EA1D2C"/>
                 </a:solidFill>
               </a:rPr>
-              <a:t>CASE TECNICO</a:t>
+              <a:t>CASE TÉCNICO</a:t>
             </a:r>
             <a:endParaRPr lang="pt-BR" sz="1600" noProof="0" dirty="0"/>
           </a:p>
@@ -2882,23 +2974,7 @@
                   <a:srgbClr val="CFCFCF"/>
                 </a:solidFill>
               </a:rPr>
-              <a:t>Arquitetura Medallion - Delta Lake - PySpark + SQL </a:t>
-            </a:r>
-            <a:r>
-              <a:rPr lang="pt-BR" sz="1500" noProof="0">
-                <a:solidFill>
-                  <a:srgbClr val="CFCFCF"/>
-                </a:solidFill>
-              </a:rPr>
-              <a:t>+ Python - </a:t>
-            </a:r>
-            <a:r>
-              <a:rPr lang="pt-BR" sz="1500" noProof="0" dirty="0">
-                <a:solidFill>
-                  <a:srgbClr val="CFCFCF"/>
-                </a:solidFill>
-              </a:rPr>
-              <a:t>Databricks</a:t>
+              <a:t>Arquitetura Medallion - Delta Lake - PySpark + Python +SQL - Databricks</a:t>
             </a:r>
             <a:endParaRPr lang="pt-BR" sz="1500" noProof="0" dirty="0"/>
           </a:p>
@@ -3000,7 +3076,7 @@
                   <a:srgbClr val="9A9A9A"/>
                 </a:solidFill>
               </a:rPr>
-              <a:t>Engenharia de Dados - Governance - 20+ anos em TI</a:t>
+              <a:t>Engenharia de Dados – Governança - 20+ anos em TI</a:t>
             </a:r>
             <a:endParaRPr lang="pt-BR" sz="1200" noProof="0" dirty="0"/>
           </a:p>
@@ -3069,7 +3145,7 @@
                   <a:srgbClr val="EA1D2C"/>
                 </a:solidFill>
               </a:rPr>
-              <a:t>ETAPA ANALYSIS - PERGUNTA 2</a:t>
+              <a:t>ETAPA ANALYSIS - PERGUNTA 1</a:t>
             </a:r>
             <a:endParaRPr lang="pt-BR" sz="1100" noProof="0" dirty="0"/>
           </a:p>
@@ -3105,7 +3181,7 @@
                   <a:srgbClr val="1A1A1A"/>
                 </a:solidFill>
               </a:rPr>
-              <a:t>Passageiros por hora (maio)</a:t>
+              <a:t>Faturamento por mês</a:t>
             </a:r>
             <a:endParaRPr lang="pt-BR" sz="2500" noProof="0" dirty="0"/>
           </a:p>
@@ -3214,7 +3290,7 @@
                   <a:srgbClr val="5A5A5A"/>
                 </a:solidFill>
               </a:rPr>
-              <a:t>O pico de volume não coincide com o pico de ocupação - insight central de demanda</a:t>
+              <a:t>Média do valor por corrida (total_amount), por mês - todos os yellow taxis</a:t>
             </a:r>
             <a:endParaRPr lang="pt-BR" sz="1200" noProof="0" dirty="0"/>
           </a:p>
@@ -3227,8 +3303,8 @@
           <p:nvPr/>
         </p:nvGraphicFramePr>
         <p:xfrm>
-          <a:off x="548640" y="1920240"/>
-          <a:ext cx="11064240" cy="3017520"/>
+          <a:off x="548640" y="1965960"/>
+          <a:ext cx="6858000" cy="3566160"/>
         </p:xfrm>
         <a:graphic>
           <a:graphicData uri="http://schemas.openxmlformats.org/drawingml/2006/chart">
@@ -3238,119 +3314,229 @@
       </p:graphicFrame>
       <p:sp>
         <p:nvSpPr>
-          <p:cNvPr id="8" name="Text 5"/>
-          <p:cNvSpPr/>
-          <p:nvPr/>
-        </p:nvSpPr>
-        <p:spPr>
-          <a:xfrm>
-            <a:off x="548640" y="5074920"/>
-            <a:ext cx="11064240" cy="457200"/>
-          </a:xfrm>
-          <a:prstGeom prst="rect">
-            <a:avLst/>
-          </a:prstGeom>
-          <a:noFill/>
-          <a:ln/>
-        </p:spPr>
-        <p:txBody>
-          <a:bodyPr wrap="square" lIns="0" tIns="0" rIns="0" bIns="0" rtlCol="0" anchor="ctr"/>
-          <a:lstStyle/>
-          <a:p>
-            <a:pPr marL="0" indent="0">
-              <a:buNone/>
-            </a:pPr>
-            <a:r>
-              <a:rPr lang="pt-BR" sz="1100" b="1" noProof="0" dirty="0">
+          <p:cNvPr id="8" name="Shape 5"/>
+          <p:cNvSpPr/>
+          <p:nvPr/>
+        </p:nvSpPr>
+        <p:spPr>
+          <a:xfrm>
+            <a:off x="7772400" y="1965960"/>
+            <a:ext cx="3840480" cy="1691640"/>
+          </a:xfrm>
+          <a:prstGeom prst="roundRect">
+            <a:avLst>
+              <a:gd name="adj" fmla="val 4324"/>
+            </a:avLst>
+          </a:prstGeom>
+          <a:solidFill>
+            <a:srgbClr val="FDECEA"/>
+          </a:solidFill>
+          <a:ln/>
+        </p:spPr>
+        <p:txBody>
+          <a:bodyPr/>
+          <a:lstStyle/>
+          <a:p>
+            <a:endParaRPr lang="pt-BR" noProof="0" dirty="0"/>
+          </a:p>
+        </p:txBody>
+      </p:sp>
+      <p:sp>
+        <p:nvSpPr>
+          <p:cNvPr id="9" name="Text 6"/>
+          <p:cNvSpPr/>
+          <p:nvPr/>
+        </p:nvSpPr>
+        <p:spPr>
+          <a:xfrm>
+            <a:off x="7772400" y="2148840"/>
+            <a:ext cx="3840480" cy="731520"/>
+          </a:xfrm>
+          <a:prstGeom prst="rect">
+            <a:avLst/>
+          </a:prstGeom>
+          <a:noFill/>
+          <a:ln/>
+        </p:spPr>
+        <p:txBody>
+          <a:bodyPr wrap="square" lIns="0" tIns="0" rIns="0" bIns="0" rtlCol="0" anchor="ctr"/>
+          <a:lstStyle/>
+          <a:p>
+            <a:pPr marL="0" indent="0" algn="ctr">
+              <a:buNone/>
+            </a:pPr>
+            <a:r>
+              <a:rPr lang="pt-BR" sz="4000" b="1" noProof="0" dirty="0">
                 <a:solidFill>
                   <a:srgbClr val="EA1D2C"/>
                 </a:solidFill>
               </a:rPr>
-              <a:t>Maior ocupação 02h (1,46): </a:t>
-            </a:r>
-            <a:r>
-              <a:rPr lang="pt-BR" sz="1100" noProof="0" dirty="0">
+              <a:t>+7,2%</a:t>
+            </a:r>
+            <a:endParaRPr lang="pt-BR" sz="4000" noProof="0" dirty="0"/>
+          </a:p>
+        </p:txBody>
+      </p:sp>
+      <p:sp>
+        <p:nvSpPr>
+          <p:cNvPr id="10" name="Text 7"/>
+          <p:cNvSpPr/>
+          <p:nvPr/>
+        </p:nvSpPr>
+        <p:spPr>
+          <a:xfrm>
+            <a:off x="7772400" y="2926080"/>
+            <a:ext cx="3840480" cy="548640"/>
+          </a:xfrm>
+          <a:prstGeom prst="rect">
+            <a:avLst/>
+          </a:prstGeom>
+          <a:noFill/>
+          <a:ln/>
+        </p:spPr>
+        <p:txBody>
+          <a:bodyPr wrap="square" lIns="0" tIns="0" rIns="0" bIns="0" rtlCol="0" anchor="ctr"/>
+          <a:lstStyle/>
+          <a:p>
+            <a:pPr marL="0" indent="0" algn="ctr">
+              <a:buNone/>
+            </a:pPr>
+            <a:r>
+              <a:rPr lang="pt-BR" sz="1200" noProof="0" dirty="0">
                 <a:solidFill>
                   <a:srgbClr val="1A1A1A"/>
                 </a:solidFill>
               </a:rPr>
-              <a:t>grupos da vida noturna.    </a:t>
-            </a:r>
-            <a:r>
-              <a:rPr lang="pt-BR" sz="1100" b="1" noProof="0" dirty="0">
-                <a:solidFill>
-                  <a:srgbClr val="EA1D2C"/>
-                </a:solidFill>
-              </a:rPr>
-              <a:t>Menor 06h (1,26): </a:t>
-            </a:r>
-            <a:r>
-              <a:rPr lang="pt-BR" sz="1100" noProof="0" dirty="0">
-                <a:solidFill>
-                  <a:srgbClr val="1A1A1A"/>
-                </a:solidFill>
-              </a:rPr>
-              <a:t>commuters individuais.    </a:t>
-            </a:r>
-            <a:r>
-              <a:rPr lang="pt-BR" sz="1100" b="1" noProof="0" dirty="0">
-                <a:solidFill>
-                  <a:srgbClr val="EA1D2C"/>
-                </a:solidFill>
-              </a:rPr>
-              <a:t>Pico volume 18h (237.971): </a:t>
-            </a:r>
-            <a:r>
-              <a:rPr lang="pt-BR" sz="1100" noProof="0" dirty="0">
-                <a:solidFill>
-                  <a:srgbClr val="1A1A1A"/>
-                </a:solidFill>
-              </a:rPr>
-              <a:t>saída do trabalho, ocupação baixa (1,38).</a:t>
-            </a:r>
-            <a:endParaRPr lang="pt-BR" sz="1100" noProof="0" dirty="0"/>
-          </a:p>
-        </p:txBody>
-      </p:sp>
-      <p:sp>
-        <p:nvSpPr>
-          <p:cNvPr id="9" name="Text 6"/>
-          <p:cNvSpPr/>
-          <p:nvPr/>
-        </p:nvSpPr>
-        <p:spPr>
-          <a:xfrm>
-            <a:off x="548640" y="5532120"/>
-            <a:ext cx="11064240" cy="365760"/>
-          </a:xfrm>
-          <a:prstGeom prst="rect">
-            <a:avLst/>
-          </a:prstGeom>
-          <a:noFill/>
-          <a:ln/>
-        </p:spPr>
-        <p:txBody>
-          <a:bodyPr wrap="square" lIns="0" tIns="0" rIns="0" bIns="0" rtlCol="0" anchor="ctr"/>
-          <a:lstStyle/>
-          <a:p>
-            <a:pPr marL="0" indent="0">
-              <a:buNone/>
-            </a:pPr>
-            <a:r>
-              <a:rPr lang="pt-BR" sz="1100" i="1" noProof="0" dirty="0">
-                <a:solidFill>
-                  <a:srgbClr val="5A5A5A"/>
-                </a:solidFill>
-              </a:rPr>
-              <a:t>Banda estreita (1,26 a 1,46) o dia todo: yellow taxi de NY e majoritariamente modal individual.</a:t>
-            </a:r>
-            <a:endParaRPr lang="pt-BR" sz="1100" noProof="0" dirty="0"/>
-          </a:p>
-        </p:txBody>
-      </p:sp>
-      <p:sp>
-        <p:nvSpPr>
-          <p:cNvPr id="10" name="Text 7"/>
+              <a:t>alta do ticket médio de jan a mai</a:t>
+            </a:r>
+            <a:endParaRPr lang="pt-BR" sz="1200" noProof="0" dirty="0"/>
+          </a:p>
+        </p:txBody>
+      </p:sp>
+      <p:sp>
+        <p:nvSpPr>
+          <p:cNvPr id="11" name="Shape 8"/>
+          <p:cNvSpPr/>
+          <p:nvPr/>
+        </p:nvSpPr>
+        <p:spPr>
+          <a:xfrm>
+            <a:off x="7772400" y="3840480"/>
+            <a:ext cx="3840480" cy="1691640"/>
+          </a:xfrm>
+          <a:prstGeom prst="roundRect">
+            <a:avLst>
+              <a:gd name="adj" fmla="val 4324"/>
+            </a:avLst>
+          </a:prstGeom>
+          <a:solidFill>
+            <a:srgbClr val="1A1A1A"/>
+          </a:solidFill>
+          <a:ln/>
+        </p:spPr>
+        <p:txBody>
+          <a:bodyPr/>
+          <a:lstStyle/>
+          <a:p>
+            <a:endParaRPr lang="pt-BR" noProof="0" dirty="0"/>
+          </a:p>
+        </p:txBody>
+      </p:sp>
+      <p:sp>
+        <p:nvSpPr>
+          <p:cNvPr id="12" name="Text 9"/>
+          <p:cNvSpPr/>
+          <p:nvPr/>
+        </p:nvSpPr>
+        <p:spPr>
+          <a:xfrm>
+            <a:off x="7772400" y="4069080"/>
+            <a:ext cx="3840480" cy="640080"/>
+          </a:xfrm>
+          <a:prstGeom prst="rect">
+            <a:avLst/>
+          </a:prstGeom>
+          <a:noFill/>
+          <a:ln/>
+        </p:spPr>
+        <p:txBody>
+          <a:bodyPr wrap="square" lIns="0" tIns="0" rIns="0" bIns="0" rtlCol="0" anchor="ctr"/>
+          <a:lstStyle/>
+          <a:p>
+            <a:pPr marL="0" indent="0" algn="ctr">
+              <a:buNone/>
+            </a:pPr>
+            <a:r>
+              <a:rPr lang="pt-BR" sz="3000" b="1" noProof="0" dirty="0">
+                <a:solidFill>
+                  <a:srgbClr val="FFFFFF"/>
+                </a:solidFill>
+              </a:rPr>
+              <a:t>US$ 86,8 mi</a:t>
+            </a:r>
+            <a:endParaRPr lang="pt-BR" sz="3000" noProof="0" dirty="0"/>
+          </a:p>
+        </p:txBody>
+      </p:sp>
+      <p:sp>
+        <p:nvSpPr>
+          <p:cNvPr id="13" name="Text 10"/>
+          <p:cNvSpPr/>
+          <p:nvPr/>
+        </p:nvSpPr>
+        <p:spPr>
+          <a:xfrm>
+            <a:off x="7772400" y="4709160"/>
+            <a:ext cx="3840480" cy="640080"/>
+          </a:xfrm>
+          <a:prstGeom prst="rect">
+            <a:avLst/>
+          </a:prstGeom>
+          <a:noFill/>
+          <a:ln/>
+        </p:spPr>
+        <p:txBody>
+          <a:bodyPr wrap="square" lIns="0" tIns="0" rIns="0" bIns="0" rtlCol="0" anchor="ctr"/>
+          <a:lstStyle/>
+          <a:p>
+            <a:pPr marL="0" indent="0" algn="ctr">
+              <a:lnSpc>
+                <a:spcPct val="110000"/>
+              </a:lnSpc>
+              <a:buNone/>
+            </a:pPr>
+            <a:r>
+              <a:rPr lang="pt-BR" sz="1200" noProof="0" dirty="0">
+                <a:solidFill>
+                  <a:srgbClr val="CFCFCF"/>
+                </a:solidFill>
+              </a:rPr>
+              <a:t>receita média mensal da frota</a:t>
+            </a:r>
+            <a:endParaRPr lang="pt-BR" sz="1200" noProof="0" dirty="0"/>
+          </a:p>
+          <a:p>
+            <a:pPr marL="0" indent="0" algn="ctr">
+              <a:lnSpc>
+                <a:spcPct val="110000"/>
+              </a:lnSpc>
+              <a:buNone/>
+            </a:pPr>
+            <a:r>
+              <a:rPr lang="pt-BR" sz="1200" noProof="0" dirty="0">
+                <a:solidFill>
+                  <a:srgbClr val="CFCFCF"/>
+                </a:solidFill>
+              </a:rPr>
+              <a:t>(interpretação alternativa)</a:t>
+            </a:r>
+            <a:endParaRPr lang="pt-BR" sz="1200" noProof="0" dirty="0"/>
+          </a:p>
+        </p:txBody>
+      </p:sp>
+      <p:sp>
+        <p:nvSpPr>
+          <p:cNvPr id="14" name="Text 11"/>
           <p:cNvSpPr/>
           <p:nvPr/>
         </p:nvSpPr>
@@ -3386,7 +3572,7 @@
       </p:sp>
       <p:sp>
         <p:nvSpPr>
-          <p:cNvPr id="11" name="Text 8"/>
+          <p:cNvPr id="15" name="Text 12"/>
           <p:cNvSpPr/>
           <p:nvPr/>
         </p:nvSpPr>
@@ -3483,7 +3669,7 @@
                   <a:srgbClr val="EA1D2C"/>
                 </a:solidFill>
               </a:rPr>
-              <a:t>ETAPA VISUAL - INSIGHT EXTRA</a:t>
+              <a:t>ETAPA ANALYSIS - PERGUNTA 2</a:t>
             </a:r>
             <a:endParaRPr lang="pt-BR" sz="1100" noProof="0" dirty="0"/>
           </a:p>
@@ -3519,7 +3705,7 @@
                   <a:srgbClr val="1A1A1A"/>
                 </a:solidFill>
               </a:rPr>
-              <a:t>Volume de corridas por hora</a:t>
+              <a:t>Passageiros por hora (maio)</a:t>
             </a:r>
             <a:endParaRPr lang="pt-BR" sz="2500" noProof="0" dirty="0"/>
           </a:p>
@@ -3584,7 +3770,7 @@
                   <a:srgbClr val="EA1D2C"/>
                 </a:solidFill>
               </a:rPr>
-              <a:t>ARQUIVO visual   </a:t>
+              <a:t>ARQUIVO analysis   </a:t>
             </a:r>
             <a:r>
               <a:rPr lang="pt-BR" sz="1000" noProof="0" dirty="0">
@@ -3592,7 +3778,7 @@
                   <a:srgbClr val="FFFFFF"/>
                 </a:solidFill>
               </a:rPr>
-              <a:t>visual_analysis</a:t>
+              <a:t>analysis</a:t>
             </a:r>
             <a:endParaRPr lang="pt-BR" sz="1000" noProof="0" dirty="0"/>
           </a:p>
@@ -3628,7 +3814,7 @@
                   <a:srgbClr val="5A5A5A"/>
                 </a:solidFill>
               </a:rPr>
-              <a:t>Fui além do que o case pediu: a dinâmica de demanda ao longo do dia</a:t>
+              <a:t>O pico de volume não coincide com o pico de ocupação - insight central de demanda</a:t>
             </a:r>
             <a:endParaRPr lang="pt-BR" sz="1200" noProof="0" dirty="0"/>
           </a:p>
@@ -3642,7 +3828,7 @@
         </p:nvGraphicFramePr>
         <p:xfrm>
           <a:off x="548640" y="1920240"/>
-          <a:ext cx="11064240" cy="3291840"/>
+          <a:ext cx="11064240" cy="3017520"/>
         </p:xfrm>
         <a:graphic>
           <a:graphicData uri="http://schemas.openxmlformats.org/drawingml/2006/chart">
@@ -3658,8 +3844,8 @@
         </p:nvSpPr>
         <p:spPr>
           <a:xfrm>
-            <a:off x="548640" y="5394960"/>
-            <a:ext cx="11064240" cy="548640"/>
+            <a:off x="548640" y="5074920"/>
+            <a:ext cx="11064240" cy="457200"/>
           </a:xfrm>
           <a:prstGeom prst="rect">
             <a:avLst/>
@@ -3672,34 +3858,99 @@
           <a:lstStyle/>
           <a:p>
             <a:pPr marL="0" indent="0">
-              <a:lnSpc>
-                <a:spcPct val="110000"/>
-              </a:lnSpc>
-              <a:buNone/>
-            </a:pPr>
-            <a:r>
-              <a:rPr lang="pt-BR" sz="1200" b="1" noProof="0" dirty="0">
+              <a:buNone/>
+            </a:pPr>
+            <a:r>
+              <a:rPr lang="pt-BR" sz="1100" b="1" noProof="0" dirty="0">
                 <a:solidFill>
                   <a:srgbClr val="EA1D2C"/>
                 </a:solidFill>
               </a:rPr>
-              <a:t>Pico as 18h: </a:t>
-            </a:r>
-            <a:r>
-              <a:rPr lang="pt-BR" sz="1200" noProof="0" dirty="0">
+              <a:t>Maior ocupação 02h (1,46): </a:t>
+            </a:r>
+            <a:r>
+              <a:rPr lang="pt-BR" sz="1100" noProof="0" dirty="0">
                 <a:solidFill>
                   <a:srgbClr val="1A1A1A"/>
                 </a:solidFill>
               </a:rPr>
-              <a:t>237.971 corridas (saída do trabalho). Mas a ocupação (1,38) e menor que a da madrugada (1,46): viagens individuais.</a:t>
-            </a:r>
-            <a:endParaRPr lang="pt-BR" sz="1200" noProof="0" dirty="0"/>
+              <a:t>grupos da vida noturna.    </a:t>
+            </a:r>
+            <a:r>
+              <a:rPr lang="pt-BR" sz="1100" b="1" noProof="0" dirty="0">
+                <a:solidFill>
+                  <a:srgbClr val="EA1D2C"/>
+                </a:solidFill>
+              </a:rPr>
+              <a:t>Menor 06h (1,26): </a:t>
+            </a:r>
+            <a:r>
+              <a:rPr lang="pt-BR" sz="1100" noProof="0" dirty="0">
+                <a:solidFill>
+                  <a:srgbClr val="1A1A1A"/>
+                </a:solidFill>
+              </a:rPr>
+              <a:t>commuters individuais.    </a:t>
+            </a:r>
+            <a:r>
+              <a:rPr lang="pt-BR" sz="1100" b="1" noProof="0" dirty="0">
+                <a:solidFill>
+                  <a:srgbClr val="EA1D2C"/>
+                </a:solidFill>
+              </a:rPr>
+              <a:t>Pico volume 18h (237.971): </a:t>
+            </a:r>
+            <a:r>
+              <a:rPr lang="pt-BR" sz="1100" noProof="0" dirty="0">
+                <a:solidFill>
+                  <a:srgbClr val="1A1A1A"/>
+                </a:solidFill>
+              </a:rPr>
+              <a:t>saída do trabalho, ocupação baixa (1,38).</a:t>
+            </a:r>
+            <a:endParaRPr lang="pt-BR" sz="1100" noProof="0" dirty="0"/>
           </a:p>
         </p:txBody>
       </p:sp>
       <p:sp>
         <p:nvSpPr>
           <p:cNvPr id="9" name="Text 6"/>
+          <p:cNvSpPr/>
+          <p:nvPr/>
+        </p:nvSpPr>
+        <p:spPr>
+          <a:xfrm>
+            <a:off x="548640" y="5532120"/>
+            <a:ext cx="11064240" cy="365760"/>
+          </a:xfrm>
+          <a:prstGeom prst="rect">
+            <a:avLst/>
+          </a:prstGeom>
+          <a:noFill/>
+          <a:ln/>
+        </p:spPr>
+        <p:txBody>
+          <a:bodyPr wrap="square" lIns="0" tIns="0" rIns="0" bIns="0" rtlCol="0" anchor="ctr"/>
+          <a:lstStyle/>
+          <a:p>
+            <a:pPr marL="0" indent="0">
+              <a:buNone/>
+            </a:pPr>
+            <a:r>
+              <a:rPr lang="pt-BR" sz="1100" i="1" noProof="0" dirty="0">
+                <a:solidFill>
+                  <a:srgbClr val="5A5A5A"/>
+                </a:solidFill>
+              </a:rPr>
+              <a:t>Banda estreita (1,26 a 1,46) o dia todo: yellow taxi de NY é majoritariamente modal individual.</a:t>
+            </a:r>
+            <a:endParaRPr lang="pt-BR" sz="1100" noProof="0" dirty="0"/>
+          </a:p>
+        </p:txBody>
+      </p:sp>
+      <p:sp>
+        <p:nvSpPr>
+          <p:cNvPr id="10" name="Text 7"/>
           <p:cNvSpPr/>
           <p:nvPr/>
         </p:nvSpPr>
@@ -3735,7 +3986,7 @@
       </p:sp>
       <p:sp>
         <p:nvSpPr>
-          <p:cNvPr id="10" name="Text 7"/>
+          <p:cNvPr id="11" name="Text 8"/>
           <p:cNvSpPr/>
           <p:nvPr/>
         </p:nvSpPr>
@@ -3832,7 +4083,7 @@
                   <a:srgbClr val="EA1D2C"/>
                 </a:solidFill>
               </a:rPr>
-              <a:t>SINTESE</a:t>
+              <a:t>ETAPA VISUAL - INSIGHT EXTRA</a:t>
             </a:r>
             <a:endParaRPr lang="pt-BR" sz="1100" noProof="0" dirty="0"/>
           </a:p>
@@ -3868,7 +4119,7 @@
                   <a:srgbClr val="1A1A1A"/>
                 </a:solidFill>
               </a:rPr>
-              <a:t>Decisões técnicas e justificativas</a:t>
+              <a:t>Volume de corridas por hora</a:t>
             </a:r>
             <a:endParaRPr lang="pt-BR" sz="2500" noProof="0" dirty="0"/>
           </a:p>
@@ -3882,16 +4133,16 @@
         </p:nvSpPr>
         <p:spPr>
           <a:xfrm>
-            <a:off x="548640" y="1691640"/>
-            <a:ext cx="5394960" cy="1143000"/>
+            <a:off x="8869680" y="384048"/>
+            <a:ext cx="2834640" cy="457200"/>
           </a:xfrm>
           <a:prstGeom prst="roundRect">
             <a:avLst>
-              <a:gd name="adj" fmla="val 4800"/>
+              <a:gd name="adj" fmla="val 10000"/>
             </a:avLst>
           </a:prstGeom>
           <a:solidFill>
-            <a:srgbClr val="F4F4F4"/>
+            <a:srgbClr val="1A1A1A"/>
           </a:solidFill>
           <a:ln/>
         </p:spPr>
@@ -3911,8 +4162,52 @@
         </p:nvSpPr>
         <p:spPr>
           <a:xfrm>
-            <a:off x="777240" y="1828800"/>
-            <a:ext cx="4937760" cy="365760"/>
+            <a:off x="8915400" y="384048"/>
+            <a:ext cx="2743200" cy="457200"/>
+          </a:xfrm>
+          <a:prstGeom prst="rect">
+            <a:avLst/>
+          </a:prstGeom>
+          <a:noFill/>
+          <a:ln/>
+        </p:spPr>
+        <p:txBody>
+          <a:bodyPr wrap="square" lIns="0" tIns="0" rIns="0" bIns="0" rtlCol="0" anchor="ctr"/>
+          <a:lstStyle/>
+          <a:p>
+            <a:pPr marL="0" indent="0" algn="ctr">
+              <a:buNone/>
+            </a:pPr>
+            <a:r>
+              <a:rPr lang="pt-BR" sz="1000" b="1" noProof="0" dirty="0">
+                <a:solidFill>
+                  <a:srgbClr val="EA1D2C"/>
+                </a:solidFill>
+              </a:rPr>
+              <a:t>ARQUIVO visual   </a:t>
+            </a:r>
+            <a:r>
+              <a:rPr lang="pt-BR" sz="1000" noProof="0" dirty="0">
+                <a:solidFill>
+                  <a:srgbClr val="FFFFFF"/>
+                </a:solidFill>
+              </a:rPr>
+              <a:t>visual_analysis</a:t>
+            </a:r>
+            <a:endParaRPr lang="pt-BR" sz="1000" noProof="0" dirty="0"/>
+          </a:p>
+        </p:txBody>
+      </p:sp>
+      <p:sp>
+        <p:nvSpPr>
+          <p:cNvPr id="6" name="Text 4"/>
+          <p:cNvSpPr/>
+          <p:nvPr/>
+        </p:nvSpPr>
+        <p:spPr>
+          <a:xfrm>
+            <a:off x="457200" y="1463040"/>
+            <a:ext cx="10972800" cy="365760"/>
           </a:xfrm>
           <a:prstGeom prst="rect">
             <a:avLst/>
@@ -3928,27 +4223,43 @@
               <a:buNone/>
             </a:pPr>
             <a:r>
-              <a:rPr lang="pt-BR" sz="1400" b="1" noProof="0" dirty="0">
-                <a:solidFill>
-                  <a:srgbClr val="EA1D2C"/>
-                </a:solidFill>
-              </a:rPr>
-              <a:t>Cast explicito por arquivo</a:t>
-            </a:r>
-            <a:endParaRPr lang="pt-BR" sz="1400" noProof="0" dirty="0"/>
-          </a:p>
-        </p:txBody>
-      </p:sp>
-      <p:sp>
-        <p:nvSpPr>
-          <p:cNvPr id="6" name="Text 4"/>
-          <p:cNvSpPr/>
-          <p:nvPr/>
-        </p:nvSpPr>
-        <p:spPr>
-          <a:xfrm>
-            <a:off x="777240" y="2194560"/>
-            <a:ext cx="4983480" cy="548640"/>
+              <a:rPr lang="pt-BR" sz="1200" noProof="0" dirty="0">
+                <a:solidFill>
+                  <a:srgbClr val="5A5A5A"/>
+                </a:solidFill>
+              </a:rPr>
+              <a:t>Fui além do que o case pediu: a dinâmica de demanda ao longo do dia</a:t>
+            </a:r>
+            <a:endParaRPr lang="pt-BR" sz="1200" noProof="0" dirty="0"/>
+          </a:p>
+        </p:txBody>
+      </p:sp>
+      <p:graphicFrame>
+        <p:nvGraphicFramePr>
+          <p:cNvPr id="7" name="Chart 0"/>
+          <p:cNvGraphicFramePr/>
+          <p:nvPr/>
+        </p:nvGraphicFramePr>
+        <p:xfrm>
+          <a:off x="548640" y="1920240"/>
+          <a:ext cx="11064240" cy="3291840"/>
+        </p:xfrm>
+        <a:graphic>
+          <a:graphicData uri="http://schemas.openxmlformats.org/drawingml/2006/chart">
+            <c:chart xmlns:c="http://schemas.openxmlformats.org/drawingml/2006/chart" xmlns:r="http://schemas.openxmlformats.org/officeDocument/2006/relationships" r:id="rId3"/>
+          </a:graphicData>
+        </a:graphic>
+      </p:graphicFrame>
+      <p:sp>
+        <p:nvSpPr>
+          <p:cNvPr id="8" name="Text 5"/>
+          <p:cNvSpPr/>
+          <p:nvPr/>
+        </p:nvSpPr>
+        <p:spPr>
+          <a:xfrm>
+            <a:off x="548640" y="5394960"/>
+            <a:ext cx="11064240" cy="548640"/>
           </a:xfrm>
           <a:prstGeom prst="rect">
             <a:avLst/>
@@ -3967,12 +4278,20 @@
               <a:buNone/>
             </a:pPr>
             <a:r>
+              <a:rPr lang="pt-BR" sz="1200" b="1" noProof="0" dirty="0">
+                <a:solidFill>
+                  <a:srgbClr val="EA1D2C"/>
+                </a:solidFill>
+              </a:rPr>
+              <a:t>Pico as 18h: </a:t>
+            </a:r>
+            <a:r>
               <a:rPr lang="pt-BR" sz="1200" noProof="0" dirty="0">
                 <a:solidFill>
                   <a:srgbClr val="1A1A1A"/>
                 </a:solidFill>
               </a:rPr>
-              <a:t>Resolve conflito INT/DOUBLE sem config de cluster</a:t>
+              <a:t>237.971 corridas (saída do trabalho). Mas a ocupação (1,38) é menor que a da madrugada (1,46): viagens individuais.</a:t>
             </a:r>
             <a:endParaRPr lang="pt-BR" sz="1200" noProof="0" dirty="0"/>
           </a:p>
@@ -3980,527 +4299,7 @@
       </p:sp>
       <p:sp>
         <p:nvSpPr>
-          <p:cNvPr id="7" name="Shape 5"/>
-          <p:cNvSpPr/>
-          <p:nvPr/>
-        </p:nvSpPr>
-        <p:spPr>
-          <a:xfrm>
-            <a:off x="6172200" y="1691640"/>
-            <a:ext cx="5394960" cy="1143000"/>
-          </a:xfrm>
-          <a:prstGeom prst="roundRect">
-            <a:avLst>
-              <a:gd name="adj" fmla="val 4800"/>
-            </a:avLst>
-          </a:prstGeom>
-          <a:solidFill>
-            <a:srgbClr val="F4F4F4"/>
-          </a:solidFill>
-          <a:ln/>
-        </p:spPr>
-        <p:txBody>
-          <a:bodyPr/>
-          <a:lstStyle/>
-          <a:p>
-            <a:endParaRPr lang="pt-BR" noProof="0" dirty="0"/>
-          </a:p>
-        </p:txBody>
-      </p:sp>
-      <p:sp>
-        <p:nvSpPr>
-          <p:cNvPr id="8" name="Text 6"/>
-          <p:cNvSpPr/>
-          <p:nvPr/>
-        </p:nvSpPr>
-        <p:spPr>
-          <a:xfrm>
-            <a:off x="6400800" y="1828800"/>
-            <a:ext cx="4937760" cy="365760"/>
-          </a:xfrm>
-          <a:prstGeom prst="rect">
-            <a:avLst/>
-          </a:prstGeom>
-          <a:noFill/>
-          <a:ln/>
-        </p:spPr>
-        <p:txBody>
-          <a:bodyPr wrap="square" lIns="0" tIns="0" rIns="0" bIns="0" rtlCol="0" anchor="ctr"/>
-          <a:lstStyle/>
-          <a:p>
-            <a:pPr marL="0" indent="0">
-              <a:buNone/>
-            </a:pPr>
-            <a:r>
-              <a:rPr lang="pt-BR" sz="1400" b="1" noProof="0" dirty="0">
-                <a:solidFill>
-                  <a:srgbClr val="EA1D2C"/>
-                </a:solidFill>
-              </a:rPr>
-              <a:t>Delta Lake</a:t>
-            </a:r>
-            <a:endParaRPr lang="pt-BR" sz="1400" noProof="0" dirty="0"/>
-          </a:p>
-        </p:txBody>
-      </p:sp>
-      <p:sp>
-        <p:nvSpPr>
-          <p:cNvPr id="9" name="Text 7"/>
-          <p:cNvSpPr/>
-          <p:nvPr/>
-        </p:nvSpPr>
-        <p:spPr>
-          <a:xfrm>
-            <a:off x="6400800" y="2194560"/>
-            <a:ext cx="4983480" cy="548640"/>
-          </a:xfrm>
-          <a:prstGeom prst="rect">
-            <a:avLst/>
-          </a:prstGeom>
-          <a:noFill/>
-          <a:ln/>
-        </p:spPr>
-        <p:txBody>
-          <a:bodyPr wrap="square" lIns="0" tIns="0" rIns="0" bIns="0" rtlCol="0" anchor="ctr"/>
-          <a:lstStyle/>
-          <a:p>
-            <a:pPr marL="0" indent="0">
-              <a:lnSpc>
-                <a:spcPct val="110000"/>
-              </a:lnSpc>
-              <a:buNone/>
-            </a:pPr>
-            <a:r>
-              <a:rPr lang="pt-BR" sz="1200" noProof="0" dirty="0">
-                <a:solidFill>
-                  <a:srgbClr val="1A1A1A"/>
-                </a:solidFill>
-              </a:rPr>
-              <a:t>ACID, time travel e schema enforcement nativos</a:t>
-            </a:r>
-            <a:endParaRPr lang="pt-BR" sz="1200" noProof="0" dirty="0"/>
-          </a:p>
-        </p:txBody>
-      </p:sp>
-      <p:sp>
-        <p:nvSpPr>
-          <p:cNvPr id="10" name="Shape 8"/>
-          <p:cNvSpPr/>
-          <p:nvPr/>
-        </p:nvSpPr>
-        <p:spPr>
-          <a:xfrm>
-            <a:off x="548640" y="3017520"/>
-            <a:ext cx="5394960" cy="1143000"/>
-          </a:xfrm>
-          <a:prstGeom prst="roundRect">
-            <a:avLst>
-              <a:gd name="adj" fmla="val 4800"/>
-            </a:avLst>
-          </a:prstGeom>
-          <a:solidFill>
-            <a:srgbClr val="F4F4F4"/>
-          </a:solidFill>
-          <a:ln/>
-        </p:spPr>
-        <p:txBody>
-          <a:bodyPr/>
-          <a:lstStyle/>
-          <a:p>
-            <a:endParaRPr lang="pt-BR" noProof="0" dirty="0"/>
-          </a:p>
-        </p:txBody>
-      </p:sp>
-      <p:sp>
-        <p:nvSpPr>
-          <p:cNvPr id="11" name="Text 9"/>
-          <p:cNvSpPr/>
-          <p:nvPr/>
-        </p:nvSpPr>
-        <p:spPr>
-          <a:xfrm>
-            <a:off x="777240" y="3154680"/>
-            <a:ext cx="4937760" cy="365760"/>
-          </a:xfrm>
-          <a:prstGeom prst="rect">
-            <a:avLst/>
-          </a:prstGeom>
-          <a:noFill/>
-          <a:ln/>
-        </p:spPr>
-        <p:txBody>
-          <a:bodyPr wrap="square" lIns="0" tIns="0" rIns="0" bIns="0" rtlCol="0" anchor="ctr"/>
-          <a:lstStyle/>
-          <a:p>
-            <a:pPr marL="0" indent="0">
-              <a:buNone/>
-            </a:pPr>
-            <a:r>
-              <a:rPr lang="pt-BR" sz="1400" b="1" noProof="0" dirty="0">
-                <a:solidFill>
-                  <a:srgbClr val="EA1D2C"/>
-                </a:solidFill>
-              </a:rPr>
-              <a:t>Particionar por ano_mês</a:t>
-            </a:r>
-            <a:endParaRPr lang="pt-BR" sz="1400" noProof="0" dirty="0"/>
-          </a:p>
-        </p:txBody>
-      </p:sp>
-      <p:sp>
-        <p:nvSpPr>
-          <p:cNvPr id="12" name="Text 10"/>
-          <p:cNvSpPr/>
-          <p:nvPr/>
-        </p:nvSpPr>
-        <p:spPr>
-          <a:xfrm>
-            <a:off x="777240" y="3520440"/>
-            <a:ext cx="4983480" cy="548640"/>
-          </a:xfrm>
-          <a:prstGeom prst="rect">
-            <a:avLst/>
-          </a:prstGeom>
-          <a:noFill/>
-          <a:ln/>
-        </p:spPr>
-        <p:txBody>
-          <a:bodyPr wrap="square" lIns="0" tIns="0" rIns="0" bIns="0" rtlCol="0" anchor="ctr"/>
-          <a:lstStyle/>
-          <a:p>
-            <a:pPr marL="0" indent="0">
-              <a:lnSpc>
-                <a:spcPct val="110000"/>
-              </a:lnSpc>
-              <a:buNone/>
-            </a:pPr>
-            <a:r>
-              <a:rPr lang="pt-BR" sz="1200" noProof="0" dirty="0">
-                <a:solidFill>
-                  <a:srgbClr val="1A1A1A"/>
-                </a:solidFill>
-              </a:rPr>
-              <a:t>Acelera queries e prepara ingestão incremental</a:t>
-            </a:r>
-            <a:endParaRPr lang="pt-BR" sz="1200" noProof="0" dirty="0"/>
-          </a:p>
-        </p:txBody>
-      </p:sp>
-      <p:sp>
-        <p:nvSpPr>
-          <p:cNvPr id="13" name="Shape 11"/>
-          <p:cNvSpPr/>
-          <p:nvPr/>
-        </p:nvSpPr>
-        <p:spPr>
-          <a:xfrm>
-            <a:off x="6172200" y="3017520"/>
-            <a:ext cx="5394960" cy="1143000"/>
-          </a:xfrm>
-          <a:prstGeom prst="roundRect">
-            <a:avLst>
-              <a:gd name="adj" fmla="val 4800"/>
-            </a:avLst>
-          </a:prstGeom>
-          <a:solidFill>
-            <a:srgbClr val="F4F4F4"/>
-          </a:solidFill>
-          <a:ln/>
-        </p:spPr>
-        <p:txBody>
-          <a:bodyPr/>
-          <a:lstStyle/>
-          <a:p>
-            <a:endParaRPr lang="pt-BR" noProof="0" dirty="0"/>
-          </a:p>
-        </p:txBody>
-      </p:sp>
-      <p:sp>
-        <p:nvSpPr>
-          <p:cNvPr id="14" name="Text 12"/>
-          <p:cNvSpPr/>
-          <p:nvPr/>
-        </p:nvSpPr>
-        <p:spPr>
-          <a:xfrm>
-            <a:off x="6400800" y="3154680"/>
-            <a:ext cx="4937760" cy="365760"/>
-          </a:xfrm>
-          <a:prstGeom prst="rect">
-            <a:avLst/>
-          </a:prstGeom>
-          <a:noFill/>
-          <a:ln/>
-        </p:spPr>
-        <p:txBody>
-          <a:bodyPr wrap="square" lIns="0" tIns="0" rIns="0" bIns="0" rtlCol="0" anchor="ctr"/>
-          <a:lstStyle/>
-          <a:p>
-            <a:pPr marL="0" indent="0">
-              <a:buNone/>
-            </a:pPr>
-            <a:r>
-              <a:rPr lang="pt-BR" sz="1400" b="1" noProof="0" dirty="0">
-                <a:solidFill>
-                  <a:srgbClr val="EA1D2C"/>
-                </a:solidFill>
-              </a:rPr>
-              <a:t>Profiling antes da limpeza</a:t>
-            </a:r>
-            <a:endParaRPr lang="pt-BR" sz="1400" noProof="0" dirty="0"/>
-          </a:p>
-        </p:txBody>
-      </p:sp>
-      <p:sp>
-        <p:nvSpPr>
-          <p:cNvPr id="15" name="Text 13"/>
-          <p:cNvSpPr/>
-          <p:nvPr/>
-        </p:nvSpPr>
-        <p:spPr>
-          <a:xfrm>
-            <a:off x="6400800" y="3520440"/>
-            <a:ext cx="4983480" cy="548640"/>
-          </a:xfrm>
-          <a:prstGeom prst="rect">
-            <a:avLst/>
-          </a:prstGeom>
-          <a:noFill/>
-          <a:ln/>
-        </p:spPr>
-        <p:txBody>
-          <a:bodyPr wrap="square" lIns="0" tIns="0" rIns="0" bIns="0" rtlCol="0" anchor="ctr"/>
-          <a:lstStyle/>
-          <a:p>
-            <a:pPr marL="0" indent="0">
-              <a:lnSpc>
-                <a:spcPct val="110000"/>
-              </a:lnSpc>
-              <a:buNone/>
-            </a:pPr>
-            <a:r>
-              <a:rPr lang="pt-BR" sz="1200" noProof="0" dirty="0">
-                <a:solidFill>
-                  <a:srgbClr val="1A1A1A"/>
-                </a:solidFill>
-              </a:rPr>
-              <a:t>Cada regra tem evidencia quantitativa, nada arbitrário</a:t>
-            </a:r>
-            <a:endParaRPr lang="pt-BR" sz="1200" noProof="0" dirty="0"/>
-          </a:p>
-        </p:txBody>
-      </p:sp>
-      <p:sp>
-        <p:nvSpPr>
-          <p:cNvPr id="16" name="Shape 14"/>
-          <p:cNvSpPr/>
-          <p:nvPr/>
-        </p:nvSpPr>
-        <p:spPr>
-          <a:xfrm>
-            <a:off x="548640" y="4343400"/>
-            <a:ext cx="5394960" cy="1143000"/>
-          </a:xfrm>
-          <a:prstGeom prst="roundRect">
-            <a:avLst>
-              <a:gd name="adj" fmla="val 4800"/>
-            </a:avLst>
-          </a:prstGeom>
-          <a:solidFill>
-            <a:srgbClr val="F4F4F4"/>
-          </a:solidFill>
-          <a:ln/>
-        </p:spPr>
-        <p:txBody>
-          <a:bodyPr/>
-          <a:lstStyle/>
-          <a:p>
-            <a:endParaRPr lang="pt-BR" noProof="0" dirty="0"/>
-          </a:p>
-        </p:txBody>
-      </p:sp>
-      <p:sp>
-        <p:nvSpPr>
-          <p:cNvPr id="17" name="Text 15"/>
-          <p:cNvSpPr/>
-          <p:nvPr/>
-        </p:nvSpPr>
-        <p:spPr>
-          <a:xfrm>
-            <a:off x="777240" y="4480560"/>
-            <a:ext cx="4937760" cy="365760"/>
-          </a:xfrm>
-          <a:prstGeom prst="rect">
-            <a:avLst/>
-          </a:prstGeom>
-          <a:noFill/>
-          <a:ln/>
-        </p:spPr>
-        <p:txBody>
-          <a:bodyPr wrap="square" lIns="0" tIns="0" rIns="0" bIns="0" rtlCol="0" anchor="ctr"/>
-          <a:lstStyle/>
-          <a:p>
-            <a:pPr marL="0" indent="0">
-              <a:buNone/>
-            </a:pPr>
-            <a:r>
-              <a:rPr lang="pt-BR" sz="1400" b="1" noProof="0" dirty="0">
-                <a:solidFill>
-                  <a:srgbClr val="EA1D2C"/>
-                </a:solidFill>
-              </a:rPr>
-              <a:t>quality_log persistido</a:t>
-            </a:r>
-            <a:endParaRPr lang="pt-BR" sz="1400" noProof="0" dirty="0"/>
-          </a:p>
-        </p:txBody>
-      </p:sp>
-      <p:sp>
-        <p:nvSpPr>
-          <p:cNvPr id="18" name="Text 16"/>
-          <p:cNvSpPr/>
-          <p:nvPr/>
-        </p:nvSpPr>
-        <p:spPr>
-          <a:xfrm>
-            <a:off x="777240" y="4846320"/>
-            <a:ext cx="4983480" cy="548640"/>
-          </a:xfrm>
-          <a:prstGeom prst="rect">
-            <a:avLst/>
-          </a:prstGeom>
-          <a:noFill/>
-          <a:ln/>
-        </p:spPr>
-        <p:txBody>
-          <a:bodyPr wrap="square" lIns="0" tIns="0" rIns="0" bIns="0" rtlCol="0" anchor="ctr"/>
-          <a:lstStyle/>
-          <a:p>
-            <a:pPr marL="0" indent="0">
-              <a:lnSpc>
-                <a:spcPct val="110000"/>
-              </a:lnSpc>
-              <a:buNone/>
-            </a:pPr>
-            <a:r>
-              <a:rPr lang="pt-BR" sz="1200" noProof="0" dirty="0">
-                <a:solidFill>
-                  <a:srgbClr val="1A1A1A"/>
-                </a:solidFill>
-              </a:rPr>
-              <a:t>Governance continua e auditável, não pontual</a:t>
-            </a:r>
-            <a:endParaRPr lang="pt-BR" sz="1200" noProof="0" dirty="0"/>
-          </a:p>
-        </p:txBody>
-      </p:sp>
-      <p:sp>
-        <p:nvSpPr>
-          <p:cNvPr id="19" name="Shape 17"/>
-          <p:cNvSpPr/>
-          <p:nvPr/>
-        </p:nvSpPr>
-        <p:spPr>
-          <a:xfrm>
-            <a:off x="6172200" y="4343400"/>
-            <a:ext cx="5394960" cy="1143000"/>
-          </a:xfrm>
-          <a:prstGeom prst="roundRect">
-            <a:avLst>
-              <a:gd name="adj" fmla="val 4800"/>
-            </a:avLst>
-          </a:prstGeom>
-          <a:solidFill>
-            <a:srgbClr val="F4F4F4"/>
-          </a:solidFill>
-          <a:ln/>
-        </p:spPr>
-        <p:txBody>
-          <a:bodyPr/>
-          <a:lstStyle/>
-          <a:p>
-            <a:endParaRPr lang="pt-BR" noProof="0" dirty="0"/>
-          </a:p>
-        </p:txBody>
-      </p:sp>
-      <p:sp>
-        <p:nvSpPr>
-          <p:cNvPr id="20" name="Text 18"/>
-          <p:cNvSpPr/>
-          <p:nvPr/>
-        </p:nvSpPr>
-        <p:spPr>
-          <a:xfrm>
-            <a:off x="6400800" y="4480560"/>
-            <a:ext cx="4937760" cy="365760"/>
-          </a:xfrm>
-          <a:prstGeom prst="rect">
-            <a:avLst/>
-          </a:prstGeom>
-          <a:noFill/>
-          <a:ln/>
-        </p:spPr>
-        <p:txBody>
-          <a:bodyPr wrap="square" lIns="0" tIns="0" rIns="0" bIns="0" rtlCol="0" anchor="ctr"/>
-          <a:lstStyle/>
-          <a:p>
-            <a:pPr marL="0" indent="0">
-              <a:buNone/>
-            </a:pPr>
-            <a:r>
-              <a:rPr lang="pt-BR" sz="1400" b="1" noProof="0" dirty="0">
-                <a:solidFill>
-                  <a:srgbClr val="EA1D2C"/>
-                </a:solidFill>
-              </a:rPr>
-              <a:t>Classificação LGPD</a:t>
-            </a:r>
-            <a:endParaRPr lang="pt-BR" sz="1400" noProof="0" dirty="0"/>
-          </a:p>
-        </p:txBody>
-      </p:sp>
-      <p:sp>
-        <p:nvSpPr>
-          <p:cNvPr id="21" name="Text 19"/>
-          <p:cNvSpPr/>
-          <p:nvPr/>
-        </p:nvSpPr>
-        <p:spPr>
-          <a:xfrm>
-            <a:off x="6400800" y="4846320"/>
-            <a:ext cx="4983480" cy="548640"/>
-          </a:xfrm>
-          <a:prstGeom prst="rect">
-            <a:avLst/>
-          </a:prstGeom>
-          <a:noFill/>
-          <a:ln/>
-        </p:spPr>
-        <p:txBody>
-          <a:bodyPr wrap="square" lIns="0" tIns="0" rIns="0" bIns="0" rtlCol="0" anchor="ctr"/>
-          <a:lstStyle/>
-          <a:p>
-            <a:pPr marL="0" indent="0">
-              <a:lnSpc>
-                <a:spcPct val="110000"/>
-              </a:lnSpc>
-              <a:buNone/>
-            </a:pPr>
-            <a:r>
-              <a:rPr lang="pt-BR" sz="1200" noProof="0" dirty="0">
-                <a:solidFill>
-                  <a:srgbClr val="1A1A1A"/>
-                </a:solidFill>
-              </a:rPr>
-              <a:t>Politicas de acesso por nível de sensibilidade</a:t>
-            </a:r>
-            <a:endParaRPr lang="pt-BR" sz="1200" noProof="0" dirty="0"/>
-          </a:p>
-        </p:txBody>
-      </p:sp>
-      <p:sp>
-        <p:nvSpPr>
-          <p:cNvPr id="22" name="Text 20"/>
+          <p:cNvPr id="9" name="Text 6"/>
           <p:cNvSpPr/>
           <p:nvPr/>
         </p:nvSpPr>
@@ -4536,7 +4335,7 @@
       </p:sp>
       <p:sp>
         <p:nvSpPr>
-          <p:cNvPr id="23" name="Text 21"/>
+          <p:cNvPr id="10" name="Text 7"/>
           <p:cNvSpPr/>
           <p:nvPr/>
         </p:nvSpPr>
@@ -4581,6 +4380,807 @@
 <file path=ppt/slides/slide13.xml><?xml version="1.0" encoding="utf-8"?>
 <p:sld xmlns:a="http://schemas.openxmlformats.org/drawingml/2006/main" xmlns:r="http://schemas.openxmlformats.org/officeDocument/2006/relationships" xmlns:p="http://schemas.openxmlformats.org/presentationml/2006/main">
   <p:cSld name="Slide 13">
+    <p:bg>
+      <p:bgPr>
+        <a:solidFill>
+          <a:srgbClr val="FFFFFF"/>
+        </a:solidFill>
+        <a:effectLst/>
+      </p:bgPr>
+    </p:bg>
+    <p:spTree>
+      <p:nvGrpSpPr>
+        <p:cNvPr id="1" name=""/>
+        <p:cNvGrpSpPr/>
+        <p:nvPr/>
+      </p:nvGrpSpPr>
+      <p:grpSpPr>
+        <a:xfrm>
+          <a:off x="0" y="0"/>
+          <a:ext cx="0" cy="0"/>
+          <a:chOff x="0" y="0"/>
+          <a:chExt cx="0" cy="0"/>
+        </a:xfrm>
+      </p:grpSpPr>
+      <p:sp>
+        <p:nvSpPr>
+          <p:cNvPr id="2" name="Text 0"/>
+          <p:cNvSpPr/>
+          <p:nvPr/>
+        </p:nvSpPr>
+        <p:spPr>
+          <a:xfrm>
+            <a:off x="457200" y="384048"/>
+            <a:ext cx="8229600" cy="274320"/>
+          </a:xfrm>
+          <a:prstGeom prst="rect">
+            <a:avLst/>
+          </a:prstGeom>
+          <a:noFill/>
+          <a:ln/>
+        </p:spPr>
+        <p:txBody>
+          <a:bodyPr wrap="square" lIns="0" tIns="0" rIns="0" bIns="0" rtlCol="0" anchor="ctr"/>
+          <a:lstStyle/>
+          <a:p>
+            <a:pPr marL="0" indent="0">
+              <a:buNone/>
+            </a:pPr>
+            <a:r>
+              <a:rPr lang="pt-BR" sz="1100" b="1" kern="0" spc="300" noProof="0" dirty="0">
+                <a:solidFill>
+                  <a:srgbClr val="EA1D2C"/>
+                </a:solidFill>
+              </a:rPr>
+              <a:t>SINTESE</a:t>
+            </a:r>
+            <a:endParaRPr lang="pt-BR" sz="1100" noProof="0" dirty="0"/>
+          </a:p>
+        </p:txBody>
+      </p:sp>
+      <p:sp>
+        <p:nvSpPr>
+          <p:cNvPr id="3" name="Text 1"/>
+          <p:cNvSpPr/>
+          <p:nvPr/>
+        </p:nvSpPr>
+        <p:spPr>
+          <a:xfrm>
+            <a:off x="457200" y="713232"/>
+            <a:ext cx="11247120" cy="640080"/>
+          </a:xfrm>
+          <a:prstGeom prst="rect">
+            <a:avLst/>
+          </a:prstGeom>
+          <a:noFill/>
+          <a:ln/>
+        </p:spPr>
+        <p:txBody>
+          <a:bodyPr wrap="square" lIns="0" tIns="0" rIns="0" bIns="0" rtlCol="0" anchor="ctr"/>
+          <a:lstStyle/>
+          <a:p>
+            <a:pPr marL="0" indent="0">
+              <a:buNone/>
+            </a:pPr>
+            <a:r>
+              <a:rPr lang="pt-BR" sz="2500" b="1" noProof="0" dirty="0">
+                <a:solidFill>
+                  <a:srgbClr val="1A1A1A"/>
+                </a:solidFill>
+              </a:rPr>
+              <a:t>Decisões técnicas e justificativas</a:t>
+            </a:r>
+            <a:endParaRPr lang="pt-BR" sz="2500" noProof="0" dirty="0"/>
+          </a:p>
+        </p:txBody>
+      </p:sp>
+      <p:sp>
+        <p:nvSpPr>
+          <p:cNvPr id="4" name="Shape 2"/>
+          <p:cNvSpPr/>
+          <p:nvPr/>
+        </p:nvSpPr>
+        <p:spPr>
+          <a:xfrm>
+            <a:off x="548640" y="1691640"/>
+            <a:ext cx="5394960" cy="1143000"/>
+          </a:xfrm>
+          <a:prstGeom prst="roundRect">
+            <a:avLst>
+              <a:gd name="adj" fmla="val 4800"/>
+            </a:avLst>
+          </a:prstGeom>
+          <a:solidFill>
+            <a:srgbClr val="F4F4F4"/>
+          </a:solidFill>
+          <a:ln/>
+        </p:spPr>
+        <p:txBody>
+          <a:bodyPr/>
+          <a:lstStyle/>
+          <a:p>
+            <a:endParaRPr lang="pt-BR" noProof="0" dirty="0"/>
+          </a:p>
+        </p:txBody>
+      </p:sp>
+      <p:sp>
+        <p:nvSpPr>
+          <p:cNvPr id="5" name="Text 3"/>
+          <p:cNvSpPr/>
+          <p:nvPr/>
+        </p:nvSpPr>
+        <p:spPr>
+          <a:xfrm>
+            <a:off x="777240" y="1828800"/>
+            <a:ext cx="4937760" cy="365760"/>
+          </a:xfrm>
+          <a:prstGeom prst="rect">
+            <a:avLst/>
+          </a:prstGeom>
+          <a:noFill/>
+          <a:ln/>
+        </p:spPr>
+        <p:txBody>
+          <a:bodyPr wrap="square" lIns="0" tIns="0" rIns="0" bIns="0" rtlCol="0" anchor="ctr"/>
+          <a:lstStyle/>
+          <a:p>
+            <a:pPr marL="0" indent="0">
+              <a:buNone/>
+            </a:pPr>
+            <a:r>
+              <a:rPr lang="pt-BR" sz="1400" b="1" noProof="0" dirty="0">
+                <a:solidFill>
+                  <a:srgbClr val="EA1D2C"/>
+                </a:solidFill>
+              </a:rPr>
+              <a:t>Cast explícito por arquivo</a:t>
+            </a:r>
+            <a:endParaRPr lang="pt-BR" sz="1400" noProof="0" dirty="0"/>
+          </a:p>
+        </p:txBody>
+      </p:sp>
+      <p:sp>
+        <p:nvSpPr>
+          <p:cNvPr id="6" name="Text 4"/>
+          <p:cNvSpPr/>
+          <p:nvPr/>
+        </p:nvSpPr>
+        <p:spPr>
+          <a:xfrm>
+            <a:off x="777240" y="2194560"/>
+            <a:ext cx="4983480" cy="548640"/>
+          </a:xfrm>
+          <a:prstGeom prst="rect">
+            <a:avLst/>
+          </a:prstGeom>
+          <a:noFill/>
+          <a:ln/>
+        </p:spPr>
+        <p:txBody>
+          <a:bodyPr wrap="square" lIns="0" tIns="0" rIns="0" bIns="0" rtlCol="0" anchor="ctr"/>
+          <a:lstStyle/>
+          <a:p>
+            <a:pPr marL="0" indent="0">
+              <a:lnSpc>
+                <a:spcPct val="110000"/>
+              </a:lnSpc>
+              <a:buNone/>
+            </a:pPr>
+            <a:r>
+              <a:rPr lang="pt-BR" sz="1200" noProof="0" dirty="0">
+                <a:solidFill>
+                  <a:srgbClr val="1A1A1A"/>
+                </a:solidFill>
+              </a:rPr>
+              <a:t>Resolve conflito INT/DOUBLE sem config de cluster</a:t>
+            </a:r>
+            <a:endParaRPr lang="pt-BR" sz="1200" noProof="0" dirty="0"/>
+          </a:p>
+        </p:txBody>
+      </p:sp>
+      <p:sp>
+        <p:nvSpPr>
+          <p:cNvPr id="7" name="Shape 5"/>
+          <p:cNvSpPr/>
+          <p:nvPr/>
+        </p:nvSpPr>
+        <p:spPr>
+          <a:xfrm>
+            <a:off x="6172200" y="1691640"/>
+            <a:ext cx="5394960" cy="1143000"/>
+          </a:xfrm>
+          <a:prstGeom prst="roundRect">
+            <a:avLst>
+              <a:gd name="adj" fmla="val 4800"/>
+            </a:avLst>
+          </a:prstGeom>
+          <a:solidFill>
+            <a:srgbClr val="F4F4F4"/>
+          </a:solidFill>
+          <a:ln/>
+        </p:spPr>
+        <p:txBody>
+          <a:bodyPr/>
+          <a:lstStyle/>
+          <a:p>
+            <a:endParaRPr lang="pt-BR" noProof="0" dirty="0"/>
+          </a:p>
+        </p:txBody>
+      </p:sp>
+      <p:sp>
+        <p:nvSpPr>
+          <p:cNvPr id="8" name="Text 6"/>
+          <p:cNvSpPr/>
+          <p:nvPr/>
+        </p:nvSpPr>
+        <p:spPr>
+          <a:xfrm>
+            <a:off x="6400800" y="1828800"/>
+            <a:ext cx="4937760" cy="365760"/>
+          </a:xfrm>
+          <a:prstGeom prst="rect">
+            <a:avLst/>
+          </a:prstGeom>
+          <a:noFill/>
+          <a:ln/>
+        </p:spPr>
+        <p:txBody>
+          <a:bodyPr wrap="square" lIns="0" tIns="0" rIns="0" bIns="0" rtlCol="0" anchor="ctr"/>
+          <a:lstStyle/>
+          <a:p>
+            <a:pPr marL="0" indent="0">
+              <a:buNone/>
+            </a:pPr>
+            <a:r>
+              <a:rPr lang="pt-BR" sz="1400" b="1" noProof="0" dirty="0">
+                <a:solidFill>
+                  <a:srgbClr val="EA1D2C"/>
+                </a:solidFill>
+              </a:rPr>
+              <a:t>Delta Lake</a:t>
+            </a:r>
+            <a:endParaRPr lang="pt-BR" sz="1400" noProof="0" dirty="0"/>
+          </a:p>
+        </p:txBody>
+      </p:sp>
+      <p:sp>
+        <p:nvSpPr>
+          <p:cNvPr id="9" name="Text 7"/>
+          <p:cNvSpPr/>
+          <p:nvPr/>
+        </p:nvSpPr>
+        <p:spPr>
+          <a:xfrm>
+            <a:off x="6400800" y="2194560"/>
+            <a:ext cx="4983480" cy="548640"/>
+          </a:xfrm>
+          <a:prstGeom prst="rect">
+            <a:avLst/>
+          </a:prstGeom>
+          <a:noFill/>
+          <a:ln/>
+        </p:spPr>
+        <p:txBody>
+          <a:bodyPr wrap="square" lIns="0" tIns="0" rIns="0" bIns="0" rtlCol="0" anchor="ctr"/>
+          <a:lstStyle/>
+          <a:p>
+            <a:pPr marL="0" indent="0">
+              <a:lnSpc>
+                <a:spcPct val="110000"/>
+              </a:lnSpc>
+              <a:buNone/>
+            </a:pPr>
+            <a:r>
+              <a:rPr lang="pt-BR" sz="1200" noProof="0" dirty="0">
+                <a:solidFill>
+                  <a:srgbClr val="1A1A1A"/>
+                </a:solidFill>
+              </a:rPr>
+              <a:t>ACID, time travel e schema enforcement nativos</a:t>
+            </a:r>
+            <a:endParaRPr lang="pt-BR" sz="1200" noProof="0" dirty="0"/>
+          </a:p>
+        </p:txBody>
+      </p:sp>
+      <p:sp>
+        <p:nvSpPr>
+          <p:cNvPr id="10" name="Shape 8"/>
+          <p:cNvSpPr/>
+          <p:nvPr/>
+        </p:nvSpPr>
+        <p:spPr>
+          <a:xfrm>
+            <a:off x="548640" y="3017520"/>
+            <a:ext cx="5394960" cy="1143000"/>
+          </a:xfrm>
+          <a:prstGeom prst="roundRect">
+            <a:avLst>
+              <a:gd name="adj" fmla="val 4800"/>
+            </a:avLst>
+          </a:prstGeom>
+          <a:solidFill>
+            <a:srgbClr val="F4F4F4"/>
+          </a:solidFill>
+          <a:ln/>
+        </p:spPr>
+        <p:txBody>
+          <a:bodyPr/>
+          <a:lstStyle/>
+          <a:p>
+            <a:endParaRPr lang="pt-BR" noProof="0" dirty="0"/>
+          </a:p>
+        </p:txBody>
+      </p:sp>
+      <p:sp>
+        <p:nvSpPr>
+          <p:cNvPr id="11" name="Text 9"/>
+          <p:cNvSpPr/>
+          <p:nvPr/>
+        </p:nvSpPr>
+        <p:spPr>
+          <a:xfrm>
+            <a:off x="777240" y="3154680"/>
+            <a:ext cx="4937760" cy="365760"/>
+          </a:xfrm>
+          <a:prstGeom prst="rect">
+            <a:avLst/>
+          </a:prstGeom>
+          <a:noFill/>
+          <a:ln/>
+        </p:spPr>
+        <p:txBody>
+          <a:bodyPr wrap="square" lIns="0" tIns="0" rIns="0" bIns="0" rtlCol="0" anchor="ctr"/>
+          <a:lstStyle/>
+          <a:p>
+            <a:pPr marL="0" indent="0">
+              <a:buNone/>
+            </a:pPr>
+            <a:r>
+              <a:rPr lang="pt-BR" sz="1400" b="1" noProof="0" dirty="0">
+                <a:solidFill>
+                  <a:srgbClr val="EA1D2C"/>
+                </a:solidFill>
+              </a:rPr>
+              <a:t>Particionar por ano_mês</a:t>
+            </a:r>
+            <a:endParaRPr lang="pt-BR" sz="1400" noProof="0" dirty="0"/>
+          </a:p>
+        </p:txBody>
+      </p:sp>
+      <p:sp>
+        <p:nvSpPr>
+          <p:cNvPr id="12" name="Text 10"/>
+          <p:cNvSpPr/>
+          <p:nvPr/>
+        </p:nvSpPr>
+        <p:spPr>
+          <a:xfrm>
+            <a:off x="777240" y="3520440"/>
+            <a:ext cx="4983480" cy="548640"/>
+          </a:xfrm>
+          <a:prstGeom prst="rect">
+            <a:avLst/>
+          </a:prstGeom>
+          <a:noFill/>
+          <a:ln/>
+        </p:spPr>
+        <p:txBody>
+          <a:bodyPr wrap="square" lIns="0" tIns="0" rIns="0" bIns="0" rtlCol="0" anchor="ctr"/>
+          <a:lstStyle/>
+          <a:p>
+            <a:pPr marL="0" indent="0">
+              <a:lnSpc>
+                <a:spcPct val="110000"/>
+              </a:lnSpc>
+              <a:buNone/>
+            </a:pPr>
+            <a:r>
+              <a:rPr lang="pt-BR" sz="1200" noProof="0" dirty="0">
+                <a:solidFill>
+                  <a:srgbClr val="1A1A1A"/>
+                </a:solidFill>
+              </a:rPr>
+              <a:t>Acelera queries e prepara ingestão incremental</a:t>
+            </a:r>
+            <a:endParaRPr lang="pt-BR" sz="1200" noProof="0" dirty="0"/>
+          </a:p>
+        </p:txBody>
+      </p:sp>
+      <p:sp>
+        <p:nvSpPr>
+          <p:cNvPr id="13" name="Shape 11"/>
+          <p:cNvSpPr/>
+          <p:nvPr/>
+        </p:nvSpPr>
+        <p:spPr>
+          <a:xfrm>
+            <a:off x="6172200" y="3017520"/>
+            <a:ext cx="5394960" cy="1143000"/>
+          </a:xfrm>
+          <a:prstGeom prst="roundRect">
+            <a:avLst>
+              <a:gd name="adj" fmla="val 4800"/>
+            </a:avLst>
+          </a:prstGeom>
+          <a:solidFill>
+            <a:srgbClr val="F4F4F4"/>
+          </a:solidFill>
+          <a:ln/>
+        </p:spPr>
+        <p:txBody>
+          <a:bodyPr/>
+          <a:lstStyle/>
+          <a:p>
+            <a:endParaRPr lang="pt-BR" noProof="0" dirty="0"/>
+          </a:p>
+        </p:txBody>
+      </p:sp>
+      <p:sp>
+        <p:nvSpPr>
+          <p:cNvPr id="14" name="Text 12"/>
+          <p:cNvSpPr/>
+          <p:nvPr/>
+        </p:nvSpPr>
+        <p:spPr>
+          <a:xfrm>
+            <a:off x="6400800" y="3154680"/>
+            <a:ext cx="4937760" cy="365760"/>
+          </a:xfrm>
+          <a:prstGeom prst="rect">
+            <a:avLst/>
+          </a:prstGeom>
+          <a:noFill/>
+          <a:ln/>
+        </p:spPr>
+        <p:txBody>
+          <a:bodyPr wrap="square" lIns="0" tIns="0" rIns="0" bIns="0" rtlCol="0" anchor="ctr"/>
+          <a:lstStyle/>
+          <a:p>
+            <a:pPr marL="0" indent="0">
+              <a:buNone/>
+            </a:pPr>
+            <a:r>
+              <a:rPr lang="pt-BR" sz="1400" b="1" noProof="0" dirty="0">
+                <a:solidFill>
+                  <a:srgbClr val="EA1D2C"/>
+                </a:solidFill>
+              </a:rPr>
+              <a:t>Profiling antes da limpeza</a:t>
+            </a:r>
+            <a:endParaRPr lang="pt-BR" sz="1400" noProof="0" dirty="0"/>
+          </a:p>
+        </p:txBody>
+      </p:sp>
+      <p:sp>
+        <p:nvSpPr>
+          <p:cNvPr id="15" name="Text 13"/>
+          <p:cNvSpPr/>
+          <p:nvPr/>
+        </p:nvSpPr>
+        <p:spPr>
+          <a:xfrm>
+            <a:off x="6400800" y="3520440"/>
+            <a:ext cx="4983480" cy="548640"/>
+          </a:xfrm>
+          <a:prstGeom prst="rect">
+            <a:avLst/>
+          </a:prstGeom>
+          <a:noFill/>
+          <a:ln/>
+        </p:spPr>
+        <p:txBody>
+          <a:bodyPr wrap="square" lIns="0" tIns="0" rIns="0" bIns="0" rtlCol="0" anchor="ctr"/>
+          <a:lstStyle/>
+          <a:p>
+            <a:pPr marL="0" indent="0">
+              <a:lnSpc>
+                <a:spcPct val="110000"/>
+              </a:lnSpc>
+              <a:buNone/>
+            </a:pPr>
+            <a:r>
+              <a:rPr lang="pt-BR" sz="1200" noProof="0" dirty="0">
+                <a:solidFill>
+                  <a:srgbClr val="1A1A1A"/>
+                </a:solidFill>
+              </a:rPr>
+              <a:t>Cada regra tem evidência quantitativa, nada arbitrário</a:t>
+            </a:r>
+            <a:endParaRPr lang="pt-BR" sz="1200" noProof="0" dirty="0"/>
+          </a:p>
+        </p:txBody>
+      </p:sp>
+      <p:sp>
+        <p:nvSpPr>
+          <p:cNvPr id="16" name="Shape 14"/>
+          <p:cNvSpPr/>
+          <p:nvPr/>
+        </p:nvSpPr>
+        <p:spPr>
+          <a:xfrm>
+            <a:off x="548640" y="4343400"/>
+            <a:ext cx="5394960" cy="1143000"/>
+          </a:xfrm>
+          <a:prstGeom prst="roundRect">
+            <a:avLst>
+              <a:gd name="adj" fmla="val 4800"/>
+            </a:avLst>
+          </a:prstGeom>
+          <a:solidFill>
+            <a:srgbClr val="F4F4F4"/>
+          </a:solidFill>
+          <a:ln/>
+        </p:spPr>
+        <p:txBody>
+          <a:bodyPr/>
+          <a:lstStyle/>
+          <a:p>
+            <a:endParaRPr lang="pt-BR" noProof="0" dirty="0"/>
+          </a:p>
+        </p:txBody>
+      </p:sp>
+      <p:sp>
+        <p:nvSpPr>
+          <p:cNvPr id="17" name="Text 15"/>
+          <p:cNvSpPr/>
+          <p:nvPr/>
+        </p:nvSpPr>
+        <p:spPr>
+          <a:xfrm>
+            <a:off x="777240" y="4480560"/>
+            <a:ext cx="4937760" cy="365760"/>
+          </a:xfrm>
+          <a:prstGeom prst="rect">
+            <a:avLst/>
+          </a:prstGeom>
+          <a:noFill/>
+          <a:ln/>
+        </p:spPr>
+        <p:txBody>
+          <a:bodyPr wrap="square" lIns="0" tIns="0" rIns="0" bIns="0" rtlCol="0" anchor="ctr"/>
+          <a:lstStyle/>
+          <a:p>
+            <a:pPr marL="0" indent="0">
+              <a:buNone/>
+            </a:pPr>
+            <a:r>
+              <a:rPr lang="pt-BR" sz="1400" b="1" noProof="0" dirty="0">
+                <a:solidFill>
+                  <a:srgbClr val="EA1D2C"/>
+                </a:solidFill>
+              </a:rPr>
+              <a:t>quality_log persistido</a:t>
+            </a:r>
+            <a:endParaRPr lang="pt-BR" sz="1400" noProof="0" dirty="0"/>
+          </a:p>
+        </p:txBody>
+      </p:sp>
+      <p:sp>
+        <p:nvSpPr>
+          <p:cNvPr id="18" name="Text 16"/>
+          <p:cNvSpPr/>
+          <p:nvPr/>
+        </p:nvSpPr>
+        <p:spPr>
+          <a:xfrm>
+            <a:off x="777240" y="4846320"/>
+            <a:ext cx="4983480" cy="548640"/>
+          </a:xfrm>
+          <a:prstGeom prst="rect">
+            <a:avLst/>
+          </a:prstGeom>
+          <a:noFill/>
+          <a:ln/>
+        </p:spPr>
+        <p:txBody>
+          <a:bodyPr wrap="square" lIns="0" tIns="0" rIns="0" bIns="0" rtlCol="0" anchor="ctr"/>
+          <a:lstStyle/>
+          <a:p>
+            <a:pPr marL="0" indent="0">
+              <a:lnSpc>
+                <a:spcPct val="110000"/>
+              </a:lnSpc>
+              <a:buNone/>
+            </a:pPr>
+            <a:r>
+              <a:rPr lang="pt-BR" sz="1200" noProof="0" dirty="0">
+                <a:solidFill>
+                  <a:srgbClr val="1A1A1A"/>
+                </a:solidFill>
+              </a:rPr>
+              <a:t>Governança contínua e auditável, não pontual</a:t>
+            </a:r>
+            <a:endParaRPr lang="pt-BR" sz="1200" noProof="0" dirty="0"/>
+          </a:p>
+        </p:txBody>
+      </p:sp>
+      <p:sp>
+        <p:nvSpPr>
+          <p:cNvPr id="19" name="Shape 17"/>
+          <p:cNvSpPr/>
+          <p:nvPr/>
+        </p:nvSpPr>
+        <p:spPr>
+          <a:xfrm>
+            <a:off x="6172200" y="4343400"/>
+            <a:ext cx="5394960" cy="1143000"/>
+          </a:xfrm>
+          <a:prstGeom prst="roundRect">
+            <a:avLst>
+              <a:gd name="adj" fmla="val 4800"/>
+            </a:avLst>
+          </a:prstGeom>
+          <a:solidFill>
+            <a:srgbClr val="F4F4F4"/>
+          </a:solidFill>
+          <a:ln/>
+        </p:spPr>
+        <p:txBody>
+          <a:bodyPr/>
+          <a:lstStyle/>
+          <a:p>
+            <a:endParaRPr lang="pt-BR" noProof="0" dirty="0"/>
+          </a:p>
+        </p:txBody>
+      </p:sp>
+      <p:sp>
+        <p:nvSpPr>
+          <p:cNvPr id="20" name="Text 18"/>
+          <p:cNvSpPr/>
+          <p:nvPr/>
+        </p:nvSpPr>
+        <p:spPr>
+          <a:xfrm>
+            <a:off x="6400800" y="4480560"/>
+            <a:ext cx="4937760" cy="365760"/>
+          </a:xfrm>
+          <a:prstGeom prst="rect">
+            <a:avLst/>
+          </a:prstGeom>
+          <a:noFill/>
+          <a:ln/>
+        </p:spPr>
+        <p:txBody>
+          <a:bodyPr wrap="square" lIns="0" tIns="0" rIns="0" bIns="0" rtlCol="0" anchor="ctr"/>
+          <a:lstStyle/>
+          <a:p>
+            <a:pPr marL="0" indent="0">
+              <a:buNone/>
+            </a:pPr>
+            <a:r>
+              <a:rPr lang="pt-BR" sz="1400" b="1" noProof="0" dirty="0">
+                <a:solidFill>
+                  <a:srgbClr val="EA1D2C"/>
+                </a:solidFill>
+              </a:rPr>
+              <a:t>Classificação LGPD</a:t>
+            </a:r>
+            <a:endParaRPr lang="pt-BR" sz="1400" noProof="0" dirty="0"/>
+          </a:p>
+        </p:txBody>
+      </p:sp>
+      <p:sp>
+        <p:nvSpPr>
+          <p:cNvPr id="21" name="Text 19"/>
+          <p:cNvSpPr/>
+          <p:nvPr/>
+        </p:nvSpPr>
+        <p:spPr>
+          <a:xfrm>
+            <a:off x="6400800" y="4846320"/>
+            <a:ext cx="4983480" cy="548640"/>
+          </a:xfrm>
+          <a:prstGeom prst="rect">
+            <a:avLst/>
+          </a:prstGeom>
+          <a:noFill/>
+          <a:ln/>
+        </p:spPr>
+        <p:txBody>
+          <a:bodyPr wrap="square" lIns="0" tIns="0" rIns="0" bIns="0" rtlCol="0" anchor="ctr"/>
+          <a:lstStyle/>
+          <a:p>
+            <a:pPr marL="0" indent="0">
+              <a:lnSpc>
+                <a:spcPct val="110000"/>
+              </a:lnSpc>
+              <a:buNone/>
+            </a:pPr>
+            <a:r>
+              <a:rPr lang="pt-BR" sz="1200" noProof="0" dirty="0">
+                <a:solidFill>
+                  <a:srgbClr val="1A1A1A"/>
+                </a:solidFill>
+              </a:rPr>
+              <a:t>Políticas de acesso por nível de sensibilidade</a:t>
+            </a:r>
+            <a:endParaRPr lang="pt-BR" sz="1200" noProof="0" dirty="0"/>
+          </a:p>
+        </p:txBody>
+      </p:sp>
+      <p:sp>
+        <p:nvSpPr>
+          <p:cNvPr id="22" name="Text 20"/>
+          <p:cNvSpPr/>
+          <p:nvPr/>
+        </p:nvSpPr>
+        <p:spPr>
+          <a:xfrm>
+            <a:off x="457200" y="6492240"/>
+            <a:ext cx="5486400" cy="274320"/>
+          </a:xfrm>
+          <a:prstGeom prst="rect">
+            <a:avLst/>
+          </a:prstGeom>
+          <a:noFill/>
+          <a:ln/>
+        </p:spPr>
+        <p:txBody>
+          <a:bodyPr wrap="square" lIns="0" tIns="0" rIns="0" bIns="0" rtlCol="0" anchor="ctr"/>
+          <a:lstStyle/>
+          <a:p>
+            <a:pPr marL="0" indent="0" algn="l">
+              <a:buNone/>
+            </a:pPr>
+            <a:r>
+              <a:rPr lang="pt-BR" sz="900" noProof="0" dirty="0">
+                <a:solidFill>
+                  <a:srgbClr val="8A8A8A"/>
+                </a:solidFill>
+              </a:rPr>
+              <a:t>Case Data Architect  |  iFood</a:t>
+            </a:r>
+            <a:endParaRPr lang="pt-BR" sz="900" noProof="0" dirty="0"/>
+          </a:p>
+        </p:txBody>
+      </p:sp>
+      <p:sp>
+        <p:nvSpPr>
+          <p:cNvPr id="23" name="Text 21"/>
+          <p:cNvSpPr/>
+          <p:nvPr/>
+        </p:nvSpPr>
+        <p:spPr>
+          <a:xfrm>
+            <a:off x="11247120" y="6492240"/>
+            <a:ext cx="457200" cy="274320"/>
+          </a:xfrm>
+          <a:prstGeom prst="rect">
+            <a:avLst/>
+          </a:prstGeom>
+          <a:noFill/>
+          <a:ln/>
+        </p:spPr>
+        <p:txBody>
+          <a:bodyPr wrap="square" lIns="0" tIns="0" rIns="0" bIns="0" rtlCol="0" anchor="ctr"/>
+          <a:lstStyle/>
+          <a:p>
+            <a:pPr marL="0" indent="0" algn="r">
+              <a:buNone/>
+            </a:pPr>
+            <a:r>
+              <a:rPr lang="pt-BR" sz="900" noProof="0" dirty="0">
+                <a:solidFill>
+                  <a:srgbClr val="8A8A8A"/>
+                </a:solidFill>
+              </a:rPr>
+              <a:t>13</a:t>
+            </a:r>
+            <a:endParaRPr lang="pt-BR" sz="900" noProof="0" dirty="0"/>
+          </a:p>
+        </p:txBody>
+      </p:sp>
+    </p:spTree>
+  </p:cSld>
+  <p:clrMapOvr>
+    <a:masterClrMapping/>
+  </p:clrMapOvr>
+</p:sld>
+</file>
+
+<file path=ppt/slides/slide14.xml><?xml version="1.0" encoding="utf-8"?>
+<p:sld xmlns:a="http://schemas.openxmlformats.org/drawingml/2006/main" xmlns:r="http://schemas.openxmlformats.org/officeDocument/2006/relationships" xmlns:p="http://schemas.openxmlformats.org/presentationml/2006/main">
+  <p:cSld name="Slide 14">
     <p:bg>
       <p:bgPr>
         <a:solidFill>
@@ -4772,7 +5372,7 @@
                   <a:srgbClr val="E8E8E8"/>
                 </a:solidFill>
               </a:rPr>
-              <a:t>Profiling + quality gate + quality_log: governança continua e auditável</a:t>
+              <a:t>Profiling + quality gate + quality_log: governança contínua e auditável</a:t>
             </a:r>
             <a:endParaRPr lang="pt-BR" sz="1400" noProof="0" dirty="0"/>
           </a:p>
@@ -4821,12 +5421,20 @@
               <a:buChar char="•"/>
             </a:pPr>
             <a:r>
+              <a:rPr lang="pt-BR" sz="1400" noProof="0">
+                <a:solidFill>
+                  <a:srgbClr val="E8E8E8"/>
+                </a:solidFill>
+              </a:rPr>
+              <a:t>Análises </a:t>
+            </a:r>
+            <a:r>
               <a:rPr lang="pt-BR" sz="1400" noProof="0" dirty="0">
                 <a:solidFill>
                   <a:srgbClr val="E8E8E8"/>
                 </a:solidFill>
               </a:rPr>
-              <a:t>Analises com dados reais: +7,2% ticket, US$ 86,8 mi/mês, insights de demanda</a:t>
+              <a:t>com dados reais: +7,2% ticket, US$ 86,8 mi/mês, insights de demanda</a:t>
             </a:r>
             <a:endParaRPr lang="pt-BR" sz="1400" noProof="0" dirty="0"/>
           </a:p>
@@ -4997,7 +5605,7 @@
                   <a:srgbClr val="EA1D2C"/>
                 </a:solidFill>
               </a:rPr>
-              <a:t>VISÃO GERAL</a:t>
+              <a:t>VISAO GERAL</a:t>
             </a:r>
             <a:endParaRPr lang="pt-BR" sz="1100" noProof="0" dirty="0"/>
           </a:p>
@@ -5033,7 +5641,7 @@
                   <a:srgbClr val="1A1A1A"/>
                 </a:solidFill>
               </a:rPr>
-              <a:t>O percurso: 8 etapas, do bruto ao insight</a:t>
+              <a:t>O percurso: 9 etapas, do bruto ao insight</a:t>
             </a:r>
             <a:endParaRPr lang="pt-BR" sz="2500" noProof="0" dirty="0"/>
           </a:p>
@@ -5047,12 +5655,12 @@
         </p:nvSpPr>
         <p:spPr>
           <a:xfrm>
-            <a:off x="548640" y="1600200"/>
-            <a:ext cx="11064240" cy="548640"/>
+            <a:off x="548640" y="1554480"/>
+            <a:ext cx="11064240" cy="493776"/>
           </a:xfrm>
           <a:prstGeom prst="roundRect">
             <a:avLst>
-              <a:gd name="adj" fmla="val 6667"/>
+              <a:gd name="adj" fmla="val 7407"/>
             </a:avLst>
           </a:prstGeom>
           <a:solidFill>
@@ -5081,12 +5689,12 @@
         </p:nvSpPr>
         <p:spPr>
           <a:xfrm>
-            <a:off x="640080" y="1691640"/>
-            <a:ext cx="1005840" cy="365760"/>
+            <a:off x="640080" y="1627632"/>
+            <a:ext cx="1005840" cy="347472"/>
           </a:xfrm>
           <a:prstGeom prst="roundRect">
             <a:avLst>
-              <a:gd name="adj" fmla="val 10000"/>
+              <a:gd name="adj" fmla="val 10526"/>
             </a:avLst>
           </a:prstGeom>
           <a:solidFill>
@@ -5110,8 +5718,8 @@
         </p:nvSpPr>
         <p:spPr>
           <a:xfrm>
-            <a:off x="640080" y="1691640"/>
-            <a:ext cx="1005840" cy="365760"/>
+            <a:off x="640080" y="1627632"/>
+            <a:ext cx="1005840" cy="347472"/>
           </a:xfrm>
           <a:prstGeom prst="rect">
             <a:avLst/>
@@ -5127,14 +5735,14 @@
               <a:buNone/>
             </a:pPr>
             <a:r>
-              <a:rPr lang="pt-BR" sz="1200" b="1" noProof="0" dirty="0">
+              <a:rPr lang="pt-BR" sz="1100" b="1" noProof="0" dirty="0">
                 <a:solidFill>
                   <a:srgbClr val="FFFFFF"/>
                 </a:solidFill>
               </a:rPr>
               <a:t>00</a:t>
             </a:r>
-            <a:endParaRPr lang="pt-BR" sz="1200" noProof="0" dirty="0"/>
+            <a:endParaRPr lang="pt-BR" sz="1100" noProof="0" dirty="0"/>
           </a:p>
         </p:txBody>
       </p:sp>
@@ -5146,8 +5754,8 @@
         </p:nvSpPr>
         <p:spPr>
           <a:xfrm>
-            <a:off x="1828800" y="1691640"/>
-            <a:ext cx="2377440" cy="365760"/>
+            <a:off x="1828800" y="1627632"/>
+            <a:ext cx="2377440" cy="347472"/>
           </a:xfrm>
           <a:prstGeom prst="rect">
             <a:avLst/>
@@ -5163,14 +5771,14 @@
               <a:buNone/>
             </a:pPr>
             <a:r>
-              <a:rPr lang="pt-BR" sz="1400" b="1" noProof="0" dirty="0">
+              <a:rPr lang="pt-BR" sz="1300" b="1" noProof="0" dirty="0">
                 <a:solidFill>
                   <a:srgbClr val="1A1A1A"/>
                 </a:solidFill>
               </a:rPr>
               <a:t>Setup</a:t>
             </a:r>
-            <a:endParaRPr lang="pt-BR" sz="1400" noProof="0" dirty="0"/>
+            <a:endParaRPr lang="pt-BR" sz="1300" noProof="0" dirty="0"/>
           </a:p>
         </p:txBody>
       </p:sp>
@@ -5182,8 +5790,8 @@
         </p:nvSpPr>
         <p:spPr>
           <a:xfrm>
-            <a:off x="4206240" y="1691640"/>
-            <a:ext cx="5852160" cy="365760"/>
+            <a:off x="4206240" y="1627632"/>
+            <a:ext cx="5852160" cy="347472"/>
           </a:xfrm>
           <a:prstGeom prst="rect">
             <a:avLst/>
@@ -5199,14 +5807,14 @@
               <a:buNone/>
             </a:pPr>
             <a:r>
-              <a:rPr lang="pt-BR" sz="1200" noProof="0" dirty="0">
+              <a:rPr lang="pt-BR" sz="1100" noProof="0" dirty="0">
                 <a:solidFill>
                   <a:srgbClr val="5A5A5A"/>
                 </a:solidFill>
               </a:rPr>
               <a:t>Catalogo, schemas e Volume</a:t>
             </a:r>
-            <a:endParaRPr lang="pt-BR" sz="1200" noProof="0" dirty="0"/>
+            <a:endParaRPr lang="pt-BR" sz="1100" noProof="0" dirty="0"/>
           </a:p>
         </p:txBody>
       </p:sp>
@@ -5218,7 +5826,7 @@
         </p:nvSpPr>
         <p:spPr>
           <a:xfrm>
-            <a:off x="10241280" y="1719072"/>
+            <a:off x="10241280" y="1645920"/>
             <a:ext cx="1234440" cy="310896"/>
           </a:xfrm>
           <a:prstGeom prst="roundRect">
@@ -5247,7 +5855,7 @@
         </p:nvSpPr>
         <p:spPr>
           <a:xfrm>
-            <a:off x="10241280" y="1719072"/>
+            <a:off x="10241280" y="1645920"/>
             <a:ext cx="1234440" cy="310896"/>
           </a:xfrm>
           <a:prstGeom prst="rect">
@@ -5283,12 +5891,12 @@
         </p:nvSpPr>
         <p:spPr>
           <a:xfrm>
-            <a:off x="548640" y="2221992"/>
-            <a:ext cx="11064240" cy="548640"/>
+            <a:off x="548640" y="2103120"/>
+            <a:ext cx="11064240" cy="493776"/>
           </a:xfrm>
           <a:prstGeom prst="roundRect">
             <a:avLst>
-              <a:gd name="adj" fmla="val 6667"/>
+              <a:gd name="adj" fmla="val 7407"/>
             </a:avLst>
           </a:prstGeom>
           <a:solidFill>
@@ -5317,12 +5925,12 @@
         </p:nvSpPr>
         <p:spPr>
           <a:xfrm>
-            <a:off x="640080" y="2313432"/>
-            <a:ext cx="1005840" cy="365760"/>
+            <a:off x="640080" y="2176272"/>
+            <a:ext cx="1005840" cy="347472"/>
           </a:xfrm>
           <a:prstGeom prst="roundRect">
             <a:avLst>
-              <a:gd name="adj" fmla="val 10000"/>
+              <a:gd name="adj" fmla="val 10526"/>
             </a:avLst>
           </a:prstGeom>
           <a:solidFill>
@@ -5346,8 +5954,8 @@
         </p:nvSpPr>
         <p:spPr>
           <a:xfrm>
-            <a:off x="640080" y="2313432"/>
-            <a:ext cx="1005840" cy="365760"/>
+            <a:off x="640080" y="2176272"/>
+            <a:ext cx="1005840" cy="347472"/>
           </a:xfrm>
           <a:prstGeom prst="rect">
             <a:avLst/>
@@ -5363,14 +5971,14 @@
               <a:buNone/>
             </a:pPr>
             <a:r>
-              <a:rPr lang="pt-BR" sz="1200" b="1" noProof="0" dirty="0">
+              <a:rPr lang="pt-BR" sz="1100" b="1" noProof="0" dirty="0">
                 <a:solidFill>
                   <a:srgbClr val="FFFFFF"/>
                 </a:solidFill>
               </a:rPr>
               <a:t>01</a:t>
             </a:r>
-            <a:endParaRPr lang="pt-BR" sz="1200" noProof="0" dirty="0"/>
+            <a:endParaRPr lang="pt-BR" sz="1100" noProof="0" dirty="0"/>
           </a:p>
         </p:txBody>
       </p:sp>
@@ -5382,8 +5990,8 @@
         </p:nvSpPr>
         <p:spPr>
           <a:xfrm>
-            <a:off x="1828800" y="2313432"/>
-            <a:ext cx="2377440" cy="365760"/>
+            <a:off x="1828800" y="2176272"/>
+            <a:ext cx="2377440" cy="347472"/>
           </a:xfrm>
           <a:prstGeom prst="rect">
             <a:avLst/>
@@ -5399,14 +6007,14 @@
               <a:buNone/>
             </a:pPr>
             <a:r>
-              <a:rPr lang="pt-BR" sz="1400" b="1" noProof="0" dirty="0">
+              <a:rPr lang="pt-BR" sz="1300" b="1" noProof="0" dirty="0">
                 <a:solidFill>
                   <a:srgbClr val="1A1A1A"/>
                 </a:solidFill>
               </a:rPr>
               <a:t>Ingestão</a:t>
             </a:r>
-            <a:endParaRPr lang="pt-BR" sz="1400" noProof="0" dirty="0"/>
+            <a:endParaRPr lang="pt-BR" sz="1300" noProof="0" dirty="0"/>
           </a:p>
         </p:txBody>
       </p:sp>
@@ -5418,8 +6026,8 @@
         </p:nvSpPr>
         <p:spPr>
           <a:xfrm>
-            <a:off x="4206240" y="2313432"/>
-            <a:ext cx="5852160" cy="365760"/>
+            <a:off x="4206240" y="2176272"/>
+            <a:ext cx="5852160" cy="347472"/>
           </a:xfrm>
           <a:prstGeom prst="rect">
             <a:avLst/>
@@ -5435,14 +6043,14 @@
               <a:buNone/>
             </a:pPr>
             <a:r>
-              <a:rPr lang="pt-BR" sz="1200" noProof="0" dirty="0">
+              <a:rPr lang="pt-BR" sz="1100" noProof="0" dirty="0">
                 <a:solidFill>
                   <a:srgbClr val="5A5A5A"/>
                 </a:solidFill>
               </a:rPr>
               <a:t>16,2 mi linhas + armadilha do schema</a:t>
             </a:r>
-            <a:endParaRPr lang="pt-BR" sz="1200" noProof="0" dirty="0"/>
+            <a:endParaRPr lang="pt-BR" sz="1100" noProof="0" dirty="0"/>
           </a:p>
         </p:txBody>
       </p:sp>
@@ -5454,7 +6062,7 @@
         </p:nvSpPr>
         <p:spPr>
           <a:xfrm>
-            <a:off x="10241280" y="2340864"/>
+            <a:off x="10241280" y="2194560"/>
             <a:ext cx="1234440" cy="310896"/>
           </a:xfrm>
           <a:prstGeom prst="roundRect">
@@ -5483,7 +6091,7 @@
         </p:nvSpPr>
         <p:spPr>
           <a:xfrm>
-            <a:off x="10241280" y="2340864"/>
+            <a:off x="10241280" y="2194560"/>
             <a:ext cx="1234440" cy="310896"/>
           </a:xfrm>
           <a:prstGeom prst="rect">
@@ -5519,12 +6127,12 @@
         </p:nvSpPr>
         <p:spPr>
           <a:xfrm>
-            <a:off x="548640" y="2843784"/>
-            <a:ext cx="11064240" cy="548640"/>
+            <a:off x="548640" y="2651760"/>
+            <a:ext cx="11064240" cy="493776"/>
           </a:xfrm>
           <a:prstGeom prst="roundRect">
             <a:avLst>
-              <a:gd name="adj" fmla="val 6667"/>
+              <a:gd name="adj" fmla="val 7407"/>
             </a:avLst>
           </a:prstGeom>
           <a:solidFill>
@@ -5553,12 +6161,12 @@
         </p:nvSpPr>
         <p:spPr>
           <a:xfrm>
-            <a:off x="640080" y="2935224"/>
-            <a:ext cx="1005840" cy="365760"/>
+            <a:off x="640080" y="2724912"/>
+            <a:ext cx="1005840" cy="347472"/>
           </a:xfrm>
           <a:prstGeom prst="roundRect">
             <a:avLst>
-              <a:gd name="adj" fmla="val 10000"/>
+              <a:gd name="adj" fmla="val 10526"/>
             </a:avLst>
           </a:prstGeom>
           <a:solidFill>
@@ -5582,8 +6190,8 @@
         </p:nvSpPr>
         <p:spPr>
           <a:xfrm>
-            <a:off x="640080" y="2935224"/>
-            <a:ext cx="1005840" cy="365760"/>
+            <a:off x="640080" y="2724912"/>
+            <a:ext cx="1005840" cy="347472"/>
           </a:xfrm>
           <a:prstGeom prst="rect">
             <a:avLst/>
@@ -5599,14 +6207,14 @@
               <a:buNone/>
             </a:pPr>
             <a:r>
-              <a:rPr lang="pt-BR" sz="1200" b="1" noProof="0" dirty="0">
+              <a:rPr lang="pt-BR" sz="1100" b="1" noProof="0" dirty="0">
                 <a:solidFill>
                   <a:srgbClr val="FFFFFF"/>
                 </a:solidFill>
               </a:rPr>
               <a:t>00b</a:t>
             </a:r>
-            <a:endParaRPr lang="pt-BR" sz="1200" noProof="0" dirty="0"/>
+            <a:endParaRPr lang="pt-BR" sz="1100" noProof="0" dirty="0"/>
           </a:p>
         </p:txBody>
       </p:sp>
@@ -5618,8 +6226,8 @@
         </p:nvSpPr>
         <p:spPr>
           <a:xfrm>
-            <a:off x="1828800" y="2935224"/>
-            <a:ext cx="2377440" cy="365760"/>
+            <a:off x="1828800" y="2724912"/>
+            <a:ext cx="2377440" cy="347472"/>
           </a:xfrm>
           <a:prstGeom prst="rect">
             <a:avLst/>
@@ -5635,14 +6243,14 @@
               <a:buNone/>
             </a:pPr>
             <a:r>
-              <a:rPr lang="pt-BR" sz="1400" b="1" noProof="0" dirty="0">
+              <a:rPr lang="pt-BR" sz="1300" b="1" noProof="0" dirty="0">
                 <a:solidFill>
                   <a:srgbClr val="1A1A1A"/>
                 </a:solidFill>
               </a:rPr>
               <a:t>Profiling</a:t>
             </a:r>
-            <a:endParaRPr lang="pt-BR" sz="1400" noProof="0" dirty="0"/>
+            <a:endParaRPr lang="pt-BR" sz="1300" noProof="0" dirty="0"/>
           </a:p>
         </p:txBody>
       </p:sp>
@@ -5654,8 +6262,8 @@
         </p:nvSpPr>
         <p:spPr>
           <a:xfrm>
-            <a:off x="4206240" y="2935224"/>
-            <a:ext cx="5852160" cy="365760"/>
+            <a:off x="4206240" y="2724912"/>
+            <a:ext cx="5852160" cy="347472"/>
           </a:xfrm>
           <a:prstGeom prst="rect">
             <a:avLst/>
@@ -5671,14 +6279,14 @@
               <a:buNone/>
             </a:pPr>
             <a:r>
-              <a:rPr lang="pt-BR" sz="1200" noProof="0" dirty="0">
+              <a:rPr lang="pt-BR" sz="1100" noProof="0" dirty="0">
                 <a:solidFill>
                   <a:srgbClr val="5A5A5A"/>
                 </a:solidFill>
               </a:rPr>
               <a:t>Qualidade da fonte antes da limpeza</a:t>
             </a:r>
-            <a:endParaRPr lang="pt-BR" sz="1200" noProof="0" dirty="0"/>
+            <a:endParaRPr lang="pt-BR" sz="1100" noProof="0" dirty="0"/>
           </a:p>
         </p:txBody>
       </p:sp>
@@ -5690,7 +6298,7 @@
         </p:nvSpPr>
         <p:spPr>
           <a:xfrm>
-            <a:off x="10241280" y="2962656"/>
+            <a:off x="10241280" y="2743200"/>
             <a:ext cx="1234440" cy="310896"/>
           </a:xfrm>
           <a:prstGeom prst="roundRect">
@@ -5719,7 +6327,7 @@
         </p:nvSpPr>
         <p:spPr>
           <a:xfrm>
-            <a:off x="10241280" y="2962656"/>
+            <a:off x="10241280" y="2743200"/>
             <a:ext cx="1234440" cy="310896"/>
           </a:xfrm>
           <a:prstGeom prst="rect">
@@ -5755,12 +6363,12 @@
         </p:nvSpPr>
         <p:spPr>
           <a:xfrm>
-            <a:off x="548640" y="3465576"/>
-            <a:ext cx="11064240" cy="548640"/>
+            <a:off x="548640" y="3200400"/>
+            <a:ext cx="11064240" cy="493776"/>
           </a:xfrm>
           <a:prstGeom prst="roundRect">
             <a:avLst>
-              <a:gd name="adj" fmla="val 6667"/>
+              <a:gd name="adj" fmla="val 7407"/>
             </a:avLst>
           </a:prstGeom>
           <a:solidFill>
@@ -5789,12 +6397,12 @@
         </p:nvSpPr>
         <p:spPr>
           <a:xfrm>
-            <a:off x="640080" y="3557016"/>
-            <a:ext cx="1005840" cy="365760"/>
+            <a:off x="640080" y="3273552"/>
+            <a:ext cx="1005840" cy="347472"/>
           </a:xfrm>
           <a:prstGeom prst="roundRect">
             <a:avLst>
-              <a:gd name="adj" fmla="val 10000"/>
+              <a:gd name="adj" fmla="val 10526"/>
             </a:avLst>
           </a:prstGeom>
           <a:solidFill>
@@ -5818,8 +6426,8 @@
         </p:nvSpPr>
         <p:spPr>
           <a:xfrm>
-            <a:off x="640080" y="3557016"/>
-            <a:ext cx="1005840" cy="365760"/>
+            <a:off x="640080" y="3273552"/>
+            <a:ext cx="1005840" cy="347472"/>
           </a:xfrm>
           <a:prstGeom prst="rect">
             <a:avLst/>
@@ -5835,14 +6443,14 @@
               <a:buNone/>
             </a:pPr>
             <a:r>
-              <a:rPr lang="pt-BR" sz="1200" b="1" noProof="0" dirty="0">
+              <a:rPr lang="pt-BR" sz="1100" b="1" noProof="0" dirty="0">
                 <a:solidFill>
                   <a:srgbClr val="FFFFFF"/>
                 </a:solidFill>
               </a:rPr>
-              <a:t>02</a:t>
-            </a:r>
-            <a:endParaRPr lang="pt-BR" sz="1200" noProof="0" dirty="0"/>
+              <a:t>00c</a:t>
+            </a:r>
+            <a:endParaRPr lang="pt-BR" sz="1100" noProof="0" dirty="0"/>
           </a:p>
         </p:txBody>
       </p:sp>
@@ -5854,8 +6462,8 @@
         </p:nvSpPr>
         <p:spPr>
           <a:xfrm>
-            <a:off x="1828800" y="3557016"/>
-            <a:ext cx="2377440" cy="365760"/>
+            <a:off x="1828800" y="3273552"/>
+            <a:ext cx="2377440" cy="347472"/>
           </a:xfrm>
           <a:prstGeom prst="rect">
             <a:avLst/>
@@ -5871,14 +6479,14 @@
               <a:buNone/>
             </a:pPr>
             <a:r>
-              <a:rPr lang="pt-BR" sz="1400" b="1" noProof="0" dirty="0">
+              <a:rPr lang="pt-BR" sz="1300" b="1" noProof="0" dirty="0">
                 <a:solidFill>
                   <a:srgbClr val="1A1A1A"/>
                 </a:solidFill>
               </a:rPr>
-              <a:t>Silver</a:t>
-            </a:r>
-            <a:endParaRPr lang="pt-BR" sz="1400" noProof="0" dirty="0"/>
+              <a:t>Exploração</a:t>
+            </a:r>
+            <a:endParaRPr lang="pt-BR" sz="1300" noProof="0" dirty="0"/>
           </a:p>
         </p:txBody>
       </p:sp>
@@ -5890,8 +6498,8 @@
         </p:nvSpPr>
         <p:spPr>
           <a:xfrm>
-            <a:off x="4206240" y="3557016"/>
-            <a:ext cx="5852160" cy="365760"/>
+            <a:off x="4206240" y="3273552"/>
+            <a:ext cx="5852160" cy="347472"/>
           </a:xfrm>
           <a:prstGeom prst="rect">
             <a:avLst/>
@@ -5907,14 +6515,14 @@
               <a:buNone/>
             </a:pPr>
             <a:r>
-              <a:rPr lang="pt-BR" sz="1200" noProof="0" dirty="0">
+              <a:rPr lang="pt-BR" sz="1100" noProof="0" dirty="0">
                 <a:solidFill>
                   <a:srgbClr val="5A5A5A"/>
                 </a:solidFill>
               </a:rPr>
-              <a:t>Limpeza, quality gate e quality log</a:t>
-            </a:r>
-            <a:endParaRPr lang="pt-BR" sz="1200" noProof="0" dirty="0"/>
+              <a:t>Distribuições que justificam as decisões</a:t>
+            </a:r>
+            <a:endParaRPr lang="pt-BR" sz="1100" noProof="0" dirty="0"/>
           </a:p>
         </p:txBody>
       </p:sp>
@@ -5926,7 +6534,7 @@
         </p:nvSpPr>
         <p:spPr>
           <a:xfrm>
-            <a:off x="10241280" y="3584448"/>
+            <a:off x="10241280" y="3291840"/>
             <a:ext cx="1234440" cy="310896"/>
           </a:xfrm>
           <a:prstGeom prst="roundRect">
@@ -5935,7 +6543,7 @@
             </a:avLst>
           </a:prstGeom>
           <a:solidFill>
-            <a:srgbClr val="EA1D2C"/>
+            <a:srgbClr val="1A1A1A"/>
           </a:solidFill>
           <a:ln/>
         </p:spPr>
@@ -5955,7 +6563,7 @@
         </p:nvSpPr>
         <p:spPr>
           <a:xfrm>
-            <a:off x="10241280" y="3584448"/>
+            <a:off x="10241280" y="3291840"/>
             <a:ext cx="1234440" cy="310896"/>
           </a:xfrm>
           <a:prstGeom prst="rect">
@@ -5977,7 +6585,7 @@
                   <a:srgbClr val="FFFFFF"/>
                 </a:solidFill>
               </a:rPr>
-              <a:t>SQL</a:t>
+              <a:t>Python</a:t>
             </a:r>
             <a:endParaRPr lang="pt-BR" sz="1000" noProof="0" dirty="0"/>
           </a:p>
@@ -5991,12 +6599,12 @@
         </p:nvSpPr>
         <p:spPr>
           <a:xfrm>
-            <a:off x="548640" y="4087368"/>
-            <a:ext cx="11064240" cy="548640"/>
+            <a:off x="548640" y="3749040"/>
+            <a:ext cx="11064240" cy="493776"/>
           </a:xfrm>
           <a:prstGeom prst="roundRect">
             <a:avLst>
-              <a:gd name="adj" fmla="val 6667"/>
+              <a:gd name="adj" fmla="val 7407"/>
             </a:avLst>
           </a:prstGeom>
           <a:solidFill>
@@ -6025,12 +6633,12 @@
         </p:nvSpPr>
         <p:spPr>
           <a:xfrm>
-            <a:off x="640080" y="4178808"/>
-            <a:ext cx="1005840" cy="365760"/>
+            <a:off x="640080" y="3822192"/>
+            <a:ext cx="1005840" cy="347472"/>
           </a:xfrm>
           <a:prstGeom prst="roundRect">
             <a:avLst>
-              <a:gd name="adj" fmla="val 10000"/>
+              <a:gd name="adj" fmla="val 10526"/>
             </a:avLst>
           </a:prstGeom>
           <a:solidFill>
@@ -6054,8 +6662,8 @@
         </p:nvSpPr>
         <p:spPr>
           <a:xfrm>
-            <a:off x="640080" y="4178808"/>
-            <a:ext cx="1005840" cy="365760"/>
+            <a:off x="640080" y="3822192"/>
+            <a:ext cx="1005840" cy="347472"/>
           </a:xfrm>
           <a:prstGeom prst="rect">
             <a:avLst/>
@@ -6071,14 +6679,14 @@
               <a:buNone/>
             </a:pPr>
             <a:r>
-              <a:rPr lang="pt-BR" sz="1200" b="1" noProof="0" dirty="0">
+              <a:rPr lang="pt-BR" sz="1100" b="1" noProof="0" dirty="0">
                 <a:solidFill>
                   <a:srgbClr val="FFFFFF"/>
                 </a:solidFill>
               </a:rPr>
-              <a:t>03</a:t>
-            </a:r>
-            <a:endParaRPr lang="pt-BR" sz="1200" noProof="0" dirty="0"/>
+              <a:t>02</a:t>
+            </a:r>
+            <a:endParaRPr lang="pt-BR" sz="1100" noProof="0" dirty="0"/>
           </a:p>
         </p:txBody>
       </p:sp>
@@ -6090,8 +6698,8 @@
         </p:nvSpPr>
         <p:spPr>
           <a:xfrm>
-            <a:off x="1828800" y="4178808"/>
-            <a:ext cx="2377440" cy="365760"/>
+            <a:off x="1828800" y="3822192"/>
+            <a:ext cx="2377440" cy="347472"/>
           </a:xfrm>
           <a:prstGeom prst="rect">
             <a:avLst/>
@@ -6107,14 +6715,14 @@
               <a:buNone/>
             </a:pPr>
             <a:r>
-              <a:rPr lang="pt-BR" sz="1400" b="1" noProof="0" dirty="0">
+              <a:rPr lang="pt-BR" sz="1300" b="1" noProof="0" dirty="0">
                 <a:solidFill>
                   <a:srgbClr val="1A1A1A"/>
                 </a:solidFill>
               </a:rPr>
-              <a:t>Gold</a:t>
-            </a:r>
-            <a:endParaRPr lang="pt-BR" sz="1400" noProof="0" dirty="0"/>
+              <a:t>Silver</a:t>
+            </a:r>
+            <a:endParaRPr lang="pt-BR" sz="1300" noProof="0" dirty="0"/>
           </a:p>
         </p:txBody>
       </p:sp>
@@ -6126,8 +6734,8 @@
         </p:nvSpPr>
         <p:spPr>
           <a:xfrm>
-            <a:off x="4206240" y="4178808"/>
-            <a:ext cx="5852160" cy="365760"/>
+            <a:off x="4206240" y="3822192"/>
+            <a:ext cx="5852160" cy="347472"/>
           </a:xfrm>
           <a:prstGeom prst="rect">
             <a:avLst/>
@@ -6143,14 +6751,14 @@
               <a:buNone/>
             </a:pPr>
             <a:r>
-              <a:rPr lang="pt-BR" sz="1200" noProof="0" dirty="0">
+              <a:rPr lang="pt-BR" sz="1100" noProof="0" dirty="0">
                 <a:solidFill>
                   <a:srgbClr val="5A5A5A"/>
                 </a:solidFill>
               </a:rPr>
-              <a:t>Consumo e time travel</a:t>
-            </a:r>
-            <a:endParaRPr lang="pt-BR" sz="1200" noProof="0" dirty="0"/>
+              <a:t>Limpeza, quality gate e quality log</a:t>
+            </a:r>
+            <a:endParaRPr lang="pt-BR" sz="1100" noProof="0" dirty="0"/>
           </a:p>
         </p:txBody>
       </p:sp>
@@ -6162,7 +6770,7 @@
         </p:nvSpPr>
         <p:spPr>
           <a:xfrm>
-            <a:off x="10241280" y="4206240"/>
+            <a:off x="10241280" y="3840480"/>
             <a:ext cx="1234440" cy="310896"/>
           </a:xfrm>
           <a:prstGeom prst="roundRect">
@@ -6191,7 +6799,7 @@
         </p:nvSpPr>
         <p:spPr>
           <a:xfrm>
-            <a:off x="10241280" y="4206240"/>
+            <a:off x="10241280" y="3840480"/>
             <a:ext cx="1234440" cy="310896"/>
           </a:xfrm>
           <a:prstGeom prst="rect">
@@ -6227,12 +6835,12 @@
         </p:nvSpPr>
         <p:spPr>
           <a:xfrm>
-            <a:off x="548640" y="4709160"/>
-            <a:ext cx="11064240" cy="548640"/>
+            <a:off x="548640" y="4297680"/>
+            <a:ext cx="11064240" cy="493776"/>
           </a:xfrm>
           <a:prstGeom prst="roundRect">
             <a:avLst>
-              <a:gd name="adj" fmla="val 6667"/>
+              <a:gd name="adj" fmla="val 7407"/>
             </a:avLst>
           </a:prstGeom>
           <a:solidFill>
@@ -6261,12 +6869,12 @@
         </p:nvSpPr>
         <p:spPr>
           <a:xfrm>
-            <a:off x="640080" y="4800600"/>
-            <a:ext cx="1005840" cy="365760"/>
+            <a:off x="640080" y="4370832"/>
+            <a:ext cx="1005840" cy="347472"/>
           </a:xfrm>
           <a:prstGeom prst="roundRect">
             <a:avLst>
-              <a:gd name="adj" fmla="val 10000"/>
+              <a:gd name="adj" fmla="val 10526"/>
             </a:avLst>
           </a:prstGeom>
           <a:solidFill>
@@ -6290,8 +6898,8 @@
         </p:nvSpPr>
         <p:spPr>
           <a:xfrm>
-            <a:off x="640080" y="4800600"/>
-            <a:ext cx="1005840" cy="365760"/>
+            <a:off x="640080" y="4370832"/>
+            <a:ext cx="1005840" cy="347472"/>
           </a:xfrm>
           <a:prstGeom prst="rect">
             <a:avLst/>
@@ -6307,14 +6915,14 @@
               <a:buNone/>
             </a:pPr>
             <a:r>
-              <a:rPr lang="pt-BR" sz="1200" b="1" noProof="0" dirty="0">
+              <a:rPr lang="pt-BR" sz="1100" b="1" noProof="0" dirty="0">
                 <a:solidFill>
                   <a:srgbClr val="FFFFFF"/>
                 </a:solidFill>
               </a:rPr>
-              <a:t>04</a:t>
-            </a:r>
-            <a:endParaRPr lang="pt-BR" sz="1200" noProof="0" dirty="0"/>
+              <a:t>03</a:t>
+            </a:r>
+            <a:endParaRPr lang="pt-BR" sz="1100" noProof="0" dirty="0"/>
           </a:p>
         </p:txBody>
       </p:sp>
@@ -6326,8 +6934,8 @@
         </p:nvSpPr>
         <p:spPr>
           <a:xfrm>
-            <a:off x="1828800" y="4800600"/>
-            <a:ext cx="2377440" cy="365760"/>
+            <a:off x="1828800" y="4370832"/>
+            <a:ext cx="2377440" cy="347472"/>
           </a:xfrm>
           <a:prstGeom prst="rect">
             <a:avLst/>
@@ -6343,14 +6951,14 @@
               <a:buNone/>
             </a:pPr>
             <a:r>
-              <a:rPr lang="pt-BR" sz="1400" b="1" noProof="0" dirty="0">
+              <a:rPr lang="pt-BR" sz="1300" b="1" noProof="0" dirty="0">
                 <a:solidFill>
                   <a:srgbClr val="1A1A1A"/>
                 </a:solidFill>
               </a:rPr>
-              <a:t>Classificação</a:t>
-            </a:r>
-            <a:endParaRPr lang="pt-BR" sz="1400" noProof="0" dirty="0"/>
+              <a:t>Gold</a:t>
+            </a:r>
+            <a:endParaRPr lang="pt-BR" sz="1300" noProof="0" dirty="0"/>
           </a:p>
         </p:txBody>
       </p:sp>
@@ -6362,8 +6970,8 @@
         </p:nvSpPr>
         <p:spPr>
           <a:xfrm>
-            <a:off x="4206240" y="4800600"/>
-            <a:ext cx="5852160" cy="365760"/>
+            <a:off x="4206240" y="4370832"/>
+            <a:ext cx="5852160" cy="347472"/>
           </a:xfrm>
           <a:prstGeom prst="rect">
             <a:avLst/>
@@ -6379,14 +6987,14 @@
               <a:buNone/>
             </a:pPr>
             <a:r>
-              <a:rPr lang="pt-BR" sz="1200" noProof="0" dirty="0">
+              <a:rPr lang="pt-BR" sz="1100" noProof="0" dirty="0">
                 <a:solidFill>
                   <a:srgbClr val="5A5A5A"/>
                 </a:solidFill>
               </a:rPr>
-              <a:t>Governance LGPD dos campos</a:t>
-            </a:r>
-            <a:endParaRPr lang="pt-BR" sz="1200" noProof="0" dirty="0"/>
+              <a:t>Consumo e time travel</a:t>
+            </a:r>
+            <a:endParaRPr lang="pt-BR" sz="1100" noProof="0" dirty="0"/>
           </a:p>
         </p:txBody>
       </p:sp>
@@ -6398,7 +7006,7 @@
         </p:nvSpPr>
         <p:spPr>
           <a:xfrm>
-            <a:off x="10241280" y="4828032"/>
+            <a:off x="10241280" y="4389120"/>
             <a:ext cx="1234440" cy="310896"/>
           </a:xfrm>
           <a:prstGeom prst="roundRect">
@@ -6427,7 +7035,7 @@
         </p:nvSpPr>
         <p:spPr>
           <a:xfrm>
-            <a:off x="10241280" y="4828032"/>
+            <a:off x="10241280" y="4389120"/>
             <a:ext cx="1234440" cy="310896"/>
           </a:xfrm>
           <a:prstGeom prst="rect">
@@ -6463,12 +7071,12 @@
         </p:nvSpPr>
         <p:spPr>
           <a:xfrm>
-            <a:off x="548640" y="5330952"/>
-            <a:ext cx="11064240" cy="548640"/>
+            <a:off x="548640" y="4846320"/>
+            <a:ext cx="11064240" cy="493776"/>
           </a:xfrm>
           <a:prstGeom prst="roundRect">
             <a:avLst>
-              <a:gd name="adj" fmla="val 6667"/>
+              <a:gd name="adj" fmla="val 7407"/>
             </a:avLst>
           </a:prstGeom>
           <a:solidFill>
@@ -6497,12 +7105,12 @@
         </p:nvSpPr>
         <p:spPr>
           <a:xfrm>
-            <a:off x="640080" y="5422392"/>
-            <a:ext cx="1005840" cy="365760"/>
+            <a:off x="640080" y="4919472"/>
+            <a:ext cx="1005840" cy="347472"/>
           </a:xfrm>
           <a:prstGeom prst="roundRect">
             <a:avLst>
-              <a:gd name="adj" fmla="val 10000"/>
+              <a:gd name="adj" fmla="val 10526"/>
             </a:avLst>
           </a:prstGeom>
           <a:solidFill>
@@ -6526,8 +7134,8 @@
         </p:nvSpPr>
         <p:spPr>
           <a:xfrm>
-            <a:off x="640080" y="5422392"/>
-            <a:ext cx="1005840" cy="365760"/>
+            <a:off x="640080" y="4919472"/>
+            <a:ext cx="1005840" cy="347472"/>
           </a:xfrm>
           <a:prstGeom prst="rect">
             <a:avLst/>
@@ -6543,14 +7151,14 @@
               <a:buNone/>
             </a:pPr>
             <a:r>
-              <a:rPr lang="pt-BR" sz="1200" b="1" noProof="0" dirty="0">
+              <a:rPr lang="pt-BR" sz="1100" b="1" noProof="0" dirty="0">
                 <a:solidFill>
                   <a:srgbClr val="FFFFFF"/>
                 </a:solidFill>
               </a:rPr>
-              <a:t>analysis</a:t>
-            </a:r>
-            <a:endParaRPr lang="pt-BR" sz="1200" noProof="0" dirty="0"/>
+              <a:t>04</a:t>
+            </a:r>
+            <a:endParaRPr lang="pt-BR" sz="1100" noProof="0" dirty="0"/>
           </a:p>
         </p:txBody>
       </p:sp>
@@ -6562,8 +7170,8 @@
         </p:nvSpPr>
         <p:spPr>
           <a:xfrm>
-            <a:off x="1828800" y="5422392"/>
-            <a:ext cx="2377440" cy="365760"/>
+            <a:off x="1828800" y="4919472"/>
+            <a:ext cx="2377440" cy="347472"/>
           </a:xfrm>
           <a:prstGeom prst="rect">
             <a:avLst/>
@@ -6579,14 +7187,14 @@
               <a:buNone/>
             </a:pPr>
             <a:r>
-              <a:rPr lang="pt-BR" sz="1400" b="1" noProof="0" dirty="0">
+              <a:rPr lang="pt-BR" sz="1300" b="1" noProof="0" dirty="0">
                 <a:solidFill>
                   <a:srgbClr val="1A1A1A"/>
                 </a:solidFill>
               </a:rPr>
-              <a:t>Análises</a:t>
-            </a:r>
-            <a:endParaRPr lang="pt-BR" sz="1400" noProof="0" dirty="0"/>
+              <a:t>Classificação</a:t>
+            </a:r>
+            <a:endParaRPr lang="pt-BR" sz="1300" noProof="0" dirty="0"/>
           </a:p>
         </p:txBody>
       </p:sp>
@@ -6598,8 +7206,8 @@
         </p:nvSpPr>
         <p:spPr>
           <a:xfrm>
-            <a:off x="4206240" y="5422392"/>
-            <a:ext cx="5852160" cy="365760"/>
+            <a:off x="4206240" y="4919472"/>
+            <a:ext cx="5852160" cy="347472"/>
           </a:xfrm>
           <a:prstGeom prst="rect">
             <a:avLst/>
@@ -6615,14 +7223,14 @@
               <a:buNone/>
             </a:pPr>
             <a:r>
-              <a:rPr lang="pt-BR" sz="1200" noProof="0" dirty="0">
+              <a:rPr lang="pt-BR" sz="1100" noProof="0" dirty="0">
                 <a:solidFill>
                   <a:srgbClr val="5A5A5A"/>
                 </a:solidFill>
               </a:rPr>
-              <a:t>As 2 perguntas do case</a:t>
-            </a:r>
-            <a:endParaRPr lang="pt-BR" sz="1200" noProof="0" dirty="0"/>
+              <a:t>Governança LGPD dos campos</a:t>
+            </a:r>
+            <a:endParaRPr lang="pt-BR" sz="1100" noProof="0" dirty="0"/>
           </a:p>
         </p:txBody>
       </p:sp>
@@ -6634,7 +7242,7 @@
         </p:nvSpPr>
         <p:spPr>
           <a:xfrm>
-            <a:off x="10241280" y="5449824"/>
+            <a:off x="10241280" y="4937760"/>
             <a:ext cx="1234440" cy="310896"/>
           </a:xfrm>
           <a:prstGeom prst="roundRect">
@@ -6663,7 +7271,7 @@
         </p:nvSpPr>
         <p:spPr>
           <a:xfrm>
-            <a:off x="10241280" y="5449824"/>
+            <a:off x="10241280" y="4937760"/>
             <a:ext cx="1234440" cy="310896"/>
           </a:xfrm>
           <a:prstGeom prst="rect">
@@ -6699,12 +7307,12 @@
         </p:nvSpPr>
         <p:spPr>
           <a:xfrm>
-            <a:off x="548640" y="5952744"/>
-            <a:ext cx="11064240" cy="548640"/>
+            <a:off x="548640" y="5394960"/>
+            <a:ext cx="11064240" cy="493776"/>
           </a:xfrm>
           <a:prstGeom prst="roundRect">
             <a:avLst>
-              <a:gd name="adj" fmla="val 6667"/>
+              <a:gd name="adj" fmla="val 7407"/>
             </a:avLst>
           </a:prstGeom>
           <a:solidFill>
@@ -6733,12 +7341,12 @@
         </p:nvSpPr>
         <p:spPr>
           <a:xfrm>
-            <a:off x="640080" y="6044184"/>
-            <a:ext cx="1005840" cy="365760"/>
+            <a:off x="640080" y="5468112"/>
+            <a:ext cx="1005840" cy="347472"/>
           </a:xfrm>
           <a:prstGeom prst="roundRect">
             <a:avLst>
-              <a:gd name="adj" fmla="val 10000"/>
+              <a:gd name="adj" fmla="val 10526"/>
             </a:avLst>
           </a:prstGeom>
           <a:solidFill>
@@ -6762,8 +7370,8 @@
         </p:nvSpPr>
         <p:spPr>
           <a:xfrm>
-            <a:off x="640080" y="6044184"/>
-            <a:ext cx="1005840" cy="365760"/>
+            <a:off x="640080" y="5468112"/>
+            <a:ext cx="1005840" cy="347472"/>
           </a:xfrm>
           <a:prstGeom prst="rect">
             <a:avLst/>
@@ -6779,14 +7387,14 @@
               <a:buNone/>
             </a:pPr>
             <a:r>
-              <a:rPr lang="pt-BR" sz="1200" b="1" noProof="0" dirty="0">
+              <a:rPr lang="pt-BR" sz="1100" b="1" noProof="0" dirty="0">
                 <a:solidFill>
                   <a:srgbClr val="FFFFFF"/>
                 </a:solidFill>
               </a:rPr>
-              <a:t>visual</a:t>
-            </a:r>
-            <a:endParaRPr lang="pt-BR" sz="1200" noProof="0" dirty="0"/>
+              <a:t>analysis</a:t>
+            </a:r>
+            <a:endParaRPr lang="pt-BR" sz="1100" noProof="0" dirty="0"/>
           </a:p>
         </p:txBody>
       </p:sp>
@@ -6798,8 +7406,8 @@
         </p:nvSpPr>
         <p:spPr>
           <a:xfrm>
-            <a:off x="1828800" y="6044184"/>
-            <a:ext cx="2377440" cy="365760"/>
+            <a:off x="1828800" y="5468112"/>
+            <a:ext cx="2377440" cy="347472"/>
           </a:xfrm>
           <a:prstGeom prst="rect">
             <a:avLst/>
@@ -6815,14 +7423,14 @@
               <a:buNone/>
             </a:pPr>
             <a:r>
-              <a:rPr lang="pt-BR" sz="1400" b="1" noProof="0" dirty="0">
+              <a:rPr lang="pt-BR" sz="1300" b="1" noProof="0" dirty="0">
                 <a:solidFill>
                   <a:srgbClr val="1A1A1A"/>
                 </a:solidFill>
               </a:rPr>
-              <a:t>Visual</a:t>
-            </a:r>
-            <a:endParaRPr lang="pt-BR" sz="1400" noProof="0" dirty="0"/>
+              <a:t>Analises</a:t>
+            </a:r>
+            <a:endParaRPr lang="pt-BR" sz="1300" noProof="0" dirty="0"/>
           </a:p>
         </p:txBody>
       </p:sp>
@@ -6834,8 +7442,8 @@
         </p:nvSpPr>
         <p:spPr>
           <a:xfrm>
-            <a:off x="4206240" y="6044184"/>
-            <a:ext cx="5852160" cy="365760"/>
+            <a:off x="4206240" y="5468112"/>
+            <a:ext cx="5852160" cy="347472"/>
           </a:xfrm>
           <a:prstGeom prst="rect">
             <a:avLst/>
@@ -6851,14 +7459,14 @@
               <a:buNone/>
             </a:pPr>
             <a:r>
-              <a:rPr lang="pt-BR" sz="1200" noProof="0" dirty="0">
+              <a:rPr lang="pt-BR" sz="1100" noProof="0" dirty="0">
                 <a:solidFill>
                   <a:srgbClr val="5A5A5A"/>
                 </a:solidFill>
               </a:rPr>
-              <a:t>Gráficos de qualidade e analise</a:t>
-            </a:r>
-            <a:endParaRPr lang="pt-BR" sz="1200" noProof="0" dirty="0"/>
+              <a:t>As 2 perguntas do case</a:t>
+            </a:r>
+            <a:endParaRPr lang="pt-BR" sz="1100" noProof="0" dirty="0"/>
           </a:p>
         </p:txBody>
       </p:sp>
@@ -6870,7 +7478,7 @@
         </p:nvSpPr>
         <p:spPr>
           <a:xfrm>
-            <a:off x="10241280" y="6071616"/>
+            <a:off x="10241280" y="5486400"/>
             <a:ext cx="1234440" cy="310896"/>
           </a:xfrm>
           <a:prstGeom prst="roundRect">
@@ -6879,6 +7487,105 @@
             </a:avLst>
           </a:prstGeom>
           <a:solidFill>
+            <a:srgbClr val="EA1D2C"/>
+          </a:solidFill>
+          <a:ln/>
+        </p:spPr>
+        <p:txBody>
+          <a:bodyPr/>
+          <a:lstStyle/>
+          <a:p>
+            <a:endParaRPr lang="pt-BR" noProof="0" dirty="0"/>
+          </a:p>
+        </p:txBody>
+      </p:sp>
+      <p:sp>
+        <p:nvSpPr>
+          <p:cNvPr id="59" name="Text 57"/>
+          <p:cNvSpPr/>
+          <p:nvPr/>
+        </p:nvSpPr>
+        <p:spPr>
+          <a:xfrm>
+            <a:off x="10241280" y="5486400"/>
+            <a:ext cx="1234440" cy="310896"/>
+          </a:xfrm>
+          <a:prstGeom prst="rect">
+            <a:avLst/>
+          </a:prstGeom>
+          <a:noFill/>
+          <a:ln/>
+        </p:spPr>
+        <p:txBody>
+          <a:bodyPr wrap="square" lIns="0" tIns="0" rIns="0" bIns="0" rtlCol="0" anchor="ctr"/>
+          <a:lstStyle/>
+          <a:p>
+            <a:pPr marL="0" indent="0" algn="ctr">
+              <a:buNone/>
+            </a:pPr>
+            <a:r>
+              <a:rPr lang="pt-BR" sz="1000" b="1" noProof="0" dirty="0">
+                <a:solidFill>
+                  <a:srgbClr val="FFFFFF"/>
+                </a:solidFill>
+              </a:rPr>
+              <a:t>SQL</a:t>
+            </a:r>
+            <a:endParaRPr lang="pt-BR" sz="1000" noProof="0" dirty="0"/>
+          </a:p>
+        </p:txBody>
+      </p:sp>
+      <p:sp>
+        <p:nvSpPr>
+          <p:cNvPr id="60" name="Shape 58"/>
+          <p:cNvSpPr/>
+          <p:nvPr/>
+        </p:nvSpPr>
+        <p:spPr>
+          <a:xfrm>
+            <a:off x="548640" y="5943600"/>
+            <a:ext cx="11064240" cy="493776"/>
+          </a:xfrm>
+          <a:prstGeom prst="roundRect">
+            <a:avLst>
+              <a:gd name="adj" fmla="val 7407"/>
+            </a:avLst>
+          </a:prstGeom>
+          <a:solidFill>
+            <a:srgbClr val="F4F4F4"/>
+          </a:solidFill>
+          <a:ln w="12700">
+            <a:solidFill>
+              <a:srgbClr val="EEEEEE"/>
+            </a:solidFill>
+            <a:prstDash val="solid"/>
+          </a:ln>
+        </p:spPr>
+        <p:txBody>
+          <a:bodyPr/>
+          <a:lstStyle/>
+          <a:p>
+            <a:endParaRPr lang="pt-BR" noProof="0" dirty="0"/>
+          </a:p>
+        </p:txBody>
+      </p:sp>
+      <p:sp>
+        <p:nvSpPr>
+          <p:cNvPr id="61" name="Shape 59"/>
+          <p:cNvSpPr/>
+          <p:nvPr/>
+        </p:nvSpPr>
+        <p:spPr>
+          <a:xfrm>
+            <a:off x="640080" y="6016752"/>
+            <a:ext cx="1005840" cy="347472"/>
+          </a:xfrm>
+          <a:prstGeom prst="roundRect">
+            <a:avLst>
+              <a:gd name="adj" fmla="val 10526"/>
+            </a:avLst>
+          </a:prstGeom>
+          <a:solidFill>
             <a:srgbClr val="1A1A1A"/>
           </a:solidFill>
           <a:ln/>
@@ -6893,15 +7600,152 @@
       </p:sp>
       <p:sp>
         <p:nvSpPr>
-          <p:cNvPr id="59" name="Text 57"/>
-          <p:cNvSpPr/>
-          <p:nvPr/>
-        </p:nvSpPr>
-        <p:spPr>
-          <a:xfrm>
-            <a:off x="10241280" y="6071616"/>
+          <p:cNvPr id="62" name="Text 60"/>
+          <p:cNvSpPr/>
+          <p:nvPr/>
+        </p:nvSpPr>
+        <p:spPr>
+          <a:xfrm>
+            <a:off x="640080" y="6016752"/>
+            <a:ext cx="1005840" cy="347472"/>
+          </a:xfrm>
+          <a:prstGeom prst="rect">
+            <a:avLst/>
+          </a:prstGeom>
+          <a:noFill/>
+          <a:ln/>
+        </p:spPr>
+        <p:txBody>
+          <a:bodyPr wrap="square" lIns="0" tIns="0" rIns="0" bIns="0" rtlCol="0" anchor="ctr"/>
+          <a:lstStyle/>
+          <a:p>
+            <a:pPr marL="0" indent="0" algn="ctr">
+              <a:buNone/>
+            </a:pPr>
+            <a:r>
+              <a:rPr lang="pt-BR" sz="1100" b="1" noProof="0" dirty="0">
+                <a:solidFill>
+                  <a:srgbClr val="FFFFFF"/>
+                </a:solidFill>
+              </a:rPr>
+              <a:t>visual</a:t>
+            </a:r>
+            <a:endParaRPr lang="pt-BR" sz="1100" noProof="0" dirty="0"/>
+          </a:p>
+        </p:txBody>
+      </p:sp>
+      <p:sp>
+        <p:nvSpPr>
+          <p:cNvPr id="63" name="Text 61"/>
+          <p:cNvSpPr/>
+          <p:nvPr/>
+        </p:nvSpPr>
+        <p:spPr>
+          <a:xfrm>
+            <a:off x="1828800" y="6016752"/>
+            <a:ext cx="2377440" cy="347472"/>
+          </a:xfrm>
+          <a:prstGeom prst="rect">
+            <a:avLst/>
+          </a:prstGeom>
+          <a:noFill/>
+          <a:ln/>
+        </p:spPr>
+        <p:txBody>
+          <a:bodyPr wrap="square" lIns="0" tIns="0" rIns="0" bIns="0" rtlCol="0" anchor="ctr"/>
+          <a:lstStyle/>
+          <a:p>
+            <a:pPr marL="0" indent="0">
+              <a:buNone/>
+            </a:pPr>
+            <a:r>
+              <a:rPr lang="pt-BR" sz="1300" b="1" noProof="0" dirty="0">
+                <a:solidFill>
+                  <a:srgbClr val="1A1A1A"/>
+                </a:solidFill>
+              </a:rPr>
+              <a:t>Visual</a:t>
+            </a:r>
+            <a:endParaRPr lang="pt-BR" sz="1300" noProof="0" dirty="0"/>
+          </a:p>
+        </p:txBody>
+      </p:sp>
+      <p:sp>
+        <p:nvSpPr>
+          <p:cNvPr id="64" name="Text 62"/>
+          <p:cNvSpPr/>
+          <p:nvPr/>
+        </p:nvSpPr>
+        <p:spPr>
+          <a:xfrm>
+            <a:off x="4206240" y="6016752"/>
+            <a:ext cx="5852160" cy="347472"/>
+          </a:xfrm>
+          <a:prstGeom prst="rect">
+            <a:avLst/>
+          </a:prstGeom>
+          <a:noFill/>
+          <a:ln/>
+        </p:spPr>
+        <p:txBody>
+          <a:bodyPr wrap="square" lIns="0" tIns="0" rIns="0" bIns="0" rtlCol="0" anchor="ctr"/>
+          <a:lstStyle/>
+          <a:p>
+            <a:pPr marL="0" indent="0">
+              <a:buNone/>
+            </a:pPr>
+            <a:r>
+              <a:rPr lang="pt-BR" sz="1100" noProof="0" dirty="0">
+                <a:solidFill>
+                  <a:srgbClr val="5A5A5A"/>
+                </a:solidFill>
+              </a:rPr>
+              <a:t>Gráficos de qualidade e analise</a:t>
+            </a:r>
+            <a:endParaRPr lang="pt-BR" sz="1100" noProof="0" dirty="0"/>
+          </a:p>
+        </p:txBody>
+      </p:sp>
+      <p:sp>
+        <p:nvSpPr>
+          <p:cNvPr id="65" name="Shape 63"/>
+          <p:cNvSpPr/>
+          <p:nvPr/>
+        </p:nvSpPr>
+        <p:spPr>
+          <a:xfrm>
+            <a:off x="10241280" y="6035040"/>
             <a:ext cx="1234440" cy="310896"/>
           </a:xfrm>
+          <a:prstGeom prst="roundRect">
+            <a:avLst>
+              <a:gd name="adj" fmla="val 11765"/>
+            </a:avLst>
+          </a:prstGeom>
+          <a:solidFill>
+            <a:srgbClr val="1A1A1A"/>
+          </a:solidFill>
+          <a:ln/>
+        </p:spPr>
+        <p:txBody>
+          <a:bodyPr/>
+          <a:lstStyle/>
+          <a:p>
+            <a:endParaRPr lang="pt-BR" noProof="0" dirty="0"/>
+          </a:p>
+        </p:txBody>
+      </p:sp>
+      <p:sp>
+        <p:nvSpPr>
+          <p:cNvPr id="66" name="Text 64"/>
+          <p:cNvSpPr/>
+          <p:nvPr/>
+        </p:nvSpPr>
+        <p:spPr>
+          <a:xfrm>
+            <a:off x="10241280" y="6035040"/>
+            <a:ext cx="1234440" cy="310896"/>
+          </a:xfrm>
           <a:prstGeom prst="rect">
             <a:avLst/>
           </a:prstGeom>
@@ -6929,7 +7773,7 @@
       </p:sp>
       <p:sp>
         <p:nvSpPr>
-          <p:cNvPr id="60" name="Text 58"/>
+          <p:cNvPr id="67" name="Text 65"/>
           <p:cNvSpPr/>
           <p:nvPr/>
         </p:nvSpPr>
@@ -6965,7 +7809,7 @@
       </p:sp>
       <p:sp>
         <p:nvSpPr>
-          <p:cNvPr id="61" name="Text 59"/>
+          <p:cNvPr id="68" name="Text 66"/>
           <p:cNvSpPr/>
           <p:nvPr/>
         </p:nvSpPr>
@@ -7912,7 +8756,7 @@
                   <a:srgbClr val="1A1A1A"/>
                 </a:solidFill>
               </a:rPr>
-              <a:t>Governance e linhagem de ponta a ponta</a:t>
+              <a:t>Governança e linhagem de ponta a ponta</a:t>
             </a:r>
             <a:endParaRPr lang="pt-BR" sz="1300" noProof="0" dirty="0"/>
           </a:p>
@@ -8321,7 +9165,7 @@
                   <a:srgbClr val="1A1A1A"/>
                 </a:solidFill>
               </a:rPr>
-              <a:t>Idempotente: IF NOT EXISTS em tudo</a:t>
+              <a:t>IF NOT EXISTS em tudo</a:t>
             </a:r>
             <a:endParaRPr lang="pt-BR" sz="1200" noProof="0" dirty="0"/>
           </a:p>
@@ -8647,7 +9491,7 @@
                   <a:srgbClr val="1B7A3E"/>
                 </a:solidFill>
               </a:rPr>
-              <a:t>Solução: ler cada arquivo, cast explicito</a:t>
+              <a:t>Solução: ler cada arquivo, cast explícito</a:t>
             </a:r>
             <a:endParaRPr lang="pt-BR" sz="1200" noProof="0" dirty="0"/>
           </a:p>
@@ -9052,7 +9896,7 @@
                   <a:srgbClr val="5A5A5A"/>
                 </a:solidFill>
               </a:rPr>
-              <a:t>Analise da Bronze ANTES da limpeza. Cada problema vira uma regra de limpeza justificada.</a:t>
+              <a:t>Análise da Bronze ANTES da limpeza. Cada problema vira uma regra de limpeza justificada.</a:t>
             </a:r>
             <a:endParaRPr lang="pt-BR" sz="1300" noProof="0" dirty="0"/>
           </a:p>
@@ -9744,7 +10588,7 @@
                   <a:srgbClr val="1A1A1A"/>
                 </a:solidFill>
               </a:rPr>
-              <a:t>Min: -US$ 982,95 (estorno)    Max: US$ 6.304,90    Média: US$ 27,84</a:t>
+              <a:t>Min: -US$ 982,95 (estorno)    Max: US$ 6.304,90    Media: US$ 27,84</a:t>
             </a:r>
             <a:endParaRPr lang="pt-BR" sz="1100" noProof="0" dirty="0"/>
           </a:p>
@@ -9848,7 +10692,7 @@
                   <a:srgbClr val="1A1A1A"/>
                 </a:solidFill>
               </a:rPr>
-              <a:t>94,76% dos dados são aproveitáveis. Nenhuma regra de limpeza e arbitraria: cada uma tem evidencia quantitativa.</a:t>
+              <a:t>94,76% dos dados são aproveitáveis. Nenhuma regra de limpeza é arbitraria: cada uma tem evidência quantitativa.</a:t>
             </a:r>
             <a:endParaRPr lang="pt-BR" sz="1100" noProof="0" dirty="0"/>
           </a:p>
@@ -9989,7 +10833,7 @@
                   <a:srgbClr val="EA1D2C"/>
                 </a:solidFill>
               </a:rPr>
-              <a:t>ETAPA 02 - QUALIDADE DE DADOS</a:t>
+              <a:t>ETAPA 00C - ANÁLISE EXPLORATÓRIA</a:t>
             </a:r>
             <a:endParaRPr lang="pt-BR" sz="1100" noProof="0" dirty="0"/>
           </a:p>
@@ -10025,7 +10869,7 @@
                   <a:srgbClr val="1A1A1A"/>
                 </a:solidFill>
               </a:rPr>
-              <a:t>Silver: limpeza, quality gate e log</a:t>
+              <a:t>Exploração: o que justifica cada decisão</a:t>
             </a:r>
             <a:endParaRPr lang="pt-BR" sz="2500" noProof="0" dirty="0"/>
           </a:p>
@@ -10090,7 +10934,7 @@
                   <a:srgbClr val="EA1D2C"/>
                 </a:solidFill>
               </a:rPr>
-              <a:t>ARQUIVO 02   </a:t>
+              <a:t>ARQUIVO 00c   </a:t>
             </a:r>
             <a:r>
               <a:rPr lang="pt-BR" sz="1000" noProof="0" dirty="0">
@@ -10098,7 +10942,7 @@
                   <a:srgbClr val="FFFFFF"/>
                 </a:solidFill>
               </a:rPr>
-              <a:t>02_silver</a:t>
+              <a:t>00c_exploration</a:t>
             </a:r>
             <a:endParaRPr lang="pt-BR" sz="1000" noProof="0" dirty="0"/>
           </a:p>
@@ -10113,7 +10957,7 @@
         <p:spPr>
           <a:xfrm>
             <a:off x="457200" y="1463040"/>
-            <a:ext cx="10972800" cy="320040"/>
+            <a:ext cx="10972800" cy="365760"/>
           </a:xfrm>
           <a:prstGeom prst="rect">
             <a:avLst/>
@@ -10129,35 +10973,1224 @@
               <a:buNone/>
             </a:pPr>
             <a:r>
-              <a:rPr lang="pt-BR" sz="1300" b="1" noProof="0" dirty="0">
-                <a:solidFill>
-                  <a:srgbClr val="1A1A1A"/>
-                </a:solidFill>
-              </a:rPr>
-              <a:t>Regras aplicadas (cada uma justificada pelo profiling):</a:t>
+              <a:rPr lang="pt-BR" sz="1300" noProof="0" dirty="0">
+                <a:solidFill>
+                  <a:srgbClr val="5A5A5A"/>
+                </a:solidFill>
+              </a:rPr>
+              <a:t>Antes de construir as queries, explorei o domínio. Cada distribuição sustenta uma decisão técnica.</a:t>
             </a:r>
             <a:endParaRPr lang="pt-BR" sz="1300" noProof="0" dirty="0"/>
           </a:p>
         </p:txBody>
       </p:sp>
-      <p:sp>
-        <p:nvSpPr>
-          <p:cNvPr id="7" name="Shape 5"/>
-          <p:cNvSpPr/>
-          <p:nvPr/>
-        </p:nvSpPr>
-        <p:spPr>
-          <a:xfrm>
-            <a:off x="548640" y="1874520"/>
-            <a:ext cx="2157984" cy="868680"/>
+      <p:graphicFrame>
+        <p:nvGraphicFramePr>
+          <p:cNvPr id="7" name="Table 0"/>
+          <p:cNvGraphicFramePr>
+            <a:graphicFrameLocks noGrp="1"/>
+          </p:cNvGraphicFramePr>
+          <p:nvPr>
+            <p:extLst>
+              <p:ext uri="{D42A27DB-BD31-4B8C-83A1-F6EECF244321}">
+                <p14:modId xmlns:p14="http://schemas.microsoft.com/office/powerpoint/2010/main" val="59832140"/>
+              </p:ext>
+            </p:extLst>
+          </p:nvPr>
+        </p:nvGraphicFramePr>
+        <p:xfrm>
+          <a:off x="457200" y="2011680"/>
+          <a:ext cx="11247120" cy="1554480"/>
+        </p:xfrm>
+        <a:graphic>
+          <a:graphicData uri="http://schemas.openxmlformats.org/drawingml/2006/table">
+            <a:tbl>
+              <a:tblPr/>
+              <a:tblGrid>
+                <a:gridCol w="2286000">
+                  <a:extLst>
+                    <a:ext uri="{9D8B030D-6E8A-4147-A177-3AD203B41FA5}">
+                      <a16:colId xmlns:a16="http://schemas.microsoft.com/office/drawing/2014/main" val="20000"/>
+                    </a:ext>
+                  </a:extLst>
+                </a:gridCol>
+                <a:gridCol w="4572000">
+                  <a:extLst>
+                    <a:ext uri="{9D8B030D-6E8A-4147-A177-3AD203B41FA5}">
+                      <a16:colId xmlns:a16="http://schemas.microsoft.com/office/drawing/2014/main" val="20001"/>
+                    </a:ext>
+                  </a:extLst>
+                </a:gridCol>
+                <a:gridCol w="4389120">
+                  <a:extLst>
+                    <a:ext uri="{9D8B030D-6E8A-4147-A177-3AD203B41FA5}">
+                      <a16:colId xmlns:a16="http://schemas.microsoft.com/office/drawing/2014/main" val="20002"/>
+                    </a:ext>
+                  </a:extLst>
+                </a:gridCol>
+              </a:tblGrid>
+              <a:tr h="0">
+                <a:tc>
+                  <a:txBody>
+                    <a:bodyPr/>
+                    <a:lstStyle/>
+                    <a:p>
+                      <a:pPr marL="0" indent="0">
+                        <a:buNone/>
+                      </a:pPr>
+                      <a:r>
+                        <a:rPr lang="pt-BR" sz="1100" b="1" noProof="0" dirty="0">
+                          <a:solidFill>
+                            <a:srgbClr val="FFFFFF"/>
+                          </a:solidFill>
+                        </a:rPr>
+                        <a:t>Exploração</a:t>
+                      </a:r>
+                      <a:endParaRPr lang="pt-BR" sz="1100" noProof="0" dirty="0"/>
+                    </a:p>
+                  </a:txBody>
+                  <a:tcPr>
+                    <a:lnL w="12700" cap="flat" cmpd="sng" algn="ctr">
+                      <a:solidFill>
+                        <a:srgbClr val="DDDDDD"/>
+                      </a:solidFill>
+                      <a:prstDash val="solid"/>
+                      <a:round/>
+                      <a:headEnd type="none" w="med" len="med"/>
+                      <a:tailEnd type="none" w="med" len="med"/>
+                    </a:lnL>
+                    <a:lnR w="12700" cap="flat" cmpd="sng" algn="ctr">
+                      <a:solidFill>
+                        <a:srgbClr val="DDDDDD"/>
+                      </a:solidFill>
+                      <a:prstDash val="solid"/>
+                      <a:round/>
+                      <a:headEnd type="none" w="med" len="med"/>
+                      <a:tailEnd type="none" w="med" len="med"/>
+                    </a:lnR>
+                    <a:lnT w="12700" cap="flat" cmpd="sng" algn="ctr">
+                      <a:solidFill>
+                        <a:srgbClr val="DDDDDD"/>
+                      </a:solidFill>
+                      <a:prstDash val="solid"/>
+                      <a:round/>
+                      <a:headEnd type="none" w="med" len="med"/>
+                      <a:tailEnd type="none" w="med" len="med"/>
+                    </a:lnT>
+                    <a:lnB w="12700" cap="flat" cmpd="sng" algn="ctr">
+                      <a:solidFill>
+                        <a:srgbClr val="DDDDDD"/>
+                      </a:solidFill>
+                      <a:prstDash val="solid"/>
+                      <a:round/>
+                      <a:headEnd type="none" w="med" len="med"/>
+                      <a:tailEnd type="none" w="med" len="med"/>
+                    </a:lnB>
+                    <a:solidFill>
+                      <a:srgbClr val="1A1A1A"/>
+                    </a:solidFill>
+                  </a:tcPr>
+                </a:tc>
+                <a:tc>
+                  <a:txBody>
+                    <a:bodyPr/>
+                    <a:lstStyle/>
+                    <a:p>
+                      <a:pPr marL="0" indent="0">
+                        <a:buNone/>
+                      </a:pPr>
+                      <a:r>
+                        <a:rPr lang="pt-BR" sz="1100" b="1" noProof="0" dirty="0">
+                          <a:solidFill>
+                            <a:srgbClr val="FFFFFF"/>
+                          </a:solidFill>
+                        </a:rPr>
+                        <a:t>Evidencia real</a:t>
+                      </a:r>
+                      <a:endParaRPr lang="pt-BR" sz="1100" noProof="0" dirty="0"/>
+                    </a:p>
+                  </a:txBody>
+                  <a:tcPr>
+                    <a:lnL w="12700" cap="flat" cmpd="sng" algn="ctr">
+                      <a:solidFill>
+                        <a:srgbClr val="DDDDDD"/>
+                      </a:solidFill>
+                      <a:prstDash val="solid"/>
+                      <a:round/>
+                      <a:headEnd type="none" w="med" len="med"/>
+                      <a:tailEnd type="none" w="med" len="med"/>
+                    </a:lnL>
+                    <a:lnR w="12700" cap="flat" cmpd="sng" algn="ctr">
+                      <a:solidFill>
+                        <a:srgbClr val="DDDDDD"/>
+                      </a:solidFill>
+                      <a:prstDash val="solid"/>
+                      <a:round/>
+                      <a:headEnd type="none" w="med" len="med"/>
+                      <a:tailEnd type="none" w="med" len="med"/>
+                    </a:lnR>
+                    <a:lnT w="12700" cap="flat" cmpd="sng" algn="ctr">
+                      <a:solidFill>
+                        <a:srgbClr val="DDDDDD"/>
+                      </a:solidFill>
+                      <a:prstDash val="solid"/>
+                      <a:round/>
+                      <a:headEnd type="none" w="med" len="med"/>
+                      <a:tailEnd type="none" w="med" len="med"/>
+                    </a:lnT>
+                    <a:lnB w="12700" cap="flat" cmpd="sng" algn="ctr">
+                      <a:solidFill>
+                        <a:srgbClr val="DDDDDD"/>
+                      </a:solidFill>
+                      <a:prstDash val="solid"/>
+                      <a:round/>
+                      <a:headEnd type="none" w="med" len="med"/>
+                      <a:tailEnd type="none" w="med" len="med"/>
+                    </a:lnB>
+                    <a:solidFill>
+                      <a:srgbClr val="1A1A1A"/>
+                    </a:solidFill>
+                  </a:tcPr>
+                </a:tc>
+                <a:tc>
+                  <a:txBody>
+                    <a:bodyPr/>
+                    <a:lstStyle/>
+                    <a:p>
+                      <a:pPr marL="0" indent="0">
+                        <a:buNone/>
+                      </a:pPr>
+                      <a:r>
+                        <a:rPr lang="pt-BR" sz="1100" b="1" noProof="0" dirty="0">
+                          <a:solidFill>
+                            <a:srgbClr val="FFFFFF"/>
+                          </a:solidFill>
+                        </a:rPr>
+                        <a:t>Decisão sustentada</a:t>
+                      </a:r>
+                      <a:endParaRPr lang="pt-BR" sz="1100" noProof="0" dirty="0"/>
+                    </a:p>
+                  </a:txBody>
+                  <a:tcPr>
+                    <a:lnL w="12700" cap="flat" cmpd="sng" algn="ctr">
+                      <a:solidFill>
+                        <a:srgbClr val="DDDDDD"/>
+                      </a:solidFill>
+                      <a:prstDash val="solid"/>
+                      <a:round/>
+                      <a:headEnd type="none" w="med" len="med"/>
+                      <a:tailEnd type="none" w="med" len="med"/>
+                    </a:lnL>
+                    <a:lnR w="12700" cap="flat" cmpd="sng" algn="ctr">
+                      <a:solidFill>
+                        <a:srgbClr val="DDDDDD"/>
+                      </a:solidFill>
+                      <a:prstDash val="solid"/>
+                      <a:round/>
+                      <a:headEnd type="none" w="med" len="med"/>
+                      <a:tailEnd type="none" w="med" len="med"/>
+                    </a:lnR>
+                    <a:lnT w="12700" cap="flat" cmpd="sng" algn="ctr">
+                      <a:solidFill>
+                        <a:srgbClr val="DDDDDD"/>
+                      </a:solidFill>
+                      <a:prstDash val="solid"/>
+                      <a:round/>
+                      <a:headEnd type="none" w="med" len="med"/>
+                      <a:tailEnd type="none" w="med" len="med"/>
+                    </a:lnT>
+                    <a:lnB w="12700" cap="flat" cmpd="sng" algn="ctr">
+                      <a:solidFill>
+                        <a:srgbClr val="DDDDDD"/>
+                      </a:solidFill>
+                      <a:prstDash val="solid"/>
+                      <a:round/>
+                      <a:headEnd type="none" w="med" len="med"/>
+                      <a:tailEnd type="none" w="med" len="med"/>
+                    </a:lnB>
+                    <a:solidFill>
+                      <a:srgbClr val="1A1A1A"/>
+                    </a:solidFill>
+                  </a:tcPr>
+                </a:tc>
+                <a:extLst>
+                  <a:ext uri="{0D108BD9-81ED-4DB2-BD59-A6C34878D82A}">
+                    <a16:rowId xmlns:a16="http://schemas.microsoft.com/office/drawing/2014/main" val="10000"/>
+                  </a:ext>
+                </a:extLst>
+              </a:tr>
+              <a:tr h="0">
+                <a:tc>
+                  <a:txBody>
+                    <a:bodyPr/>
+                    <a:lstStyle/>
+                    <a:p>
+                      <a:pPr marL="0" indent="0">
+                        <a:buNone/>
+                      </a:pPr>
+                      <a:r>
+                        <a:rPr lang="pt-BR" sz="1100" b="1" noProof="0" dirty="0">
+                          <a:solidFill>
+                            <a:srgbClr val="EA1D2C"/>
+                          </a:solidFill>
+                        </a:rPr>
+                        <a:t>VendorID</a:t>
+                      </a:r>
+                      <a:endParaRPr lang="pt-BR" sz="1100" noProof="0" dirty="0"/>
+                    </a:p>
+                  </a:txBody>
+                  <a:tcPr>
+                    <a:lnL w="12700" cap="flat" cmpd="sng" algn="ctr">
+                      <a:solidFill>
+                        <a:srgbClr val="DDDDDD"/>
+                      </a:solidFill>
+                      <a:prstDash val="solid"/>
+                      <a:round/>
+                      <a:headEnd type="none" w="med" len="med"/>
+                      <a:tailEnd type="none" w="med" len="med"/>
+                    </a:lnL>
+                    <a:lnR w="12700" cap="flat" cmpd="sng" algn="ctr">
+                      <a:solidFill>
+                        <a:srgbClr val="DDDDDD"/>
+                      </a:solidFill>
+                      <a:prstDash val="solid"/>
+                      <a:round/>
+                      <a:headEnd type="none" w="med" len="med"/>
+                      <a:tailEnd type="none" w="med" len="med"/>
+                    </a:lnR>
+                    <a:lnT w="12700" cap="flat" cmpd="sng" algn="ctr">
+                      <a:solidFill>
+                        <a:srgbClr val="DDDDDD"/>
+                      </a:solidFill>
+                      <a:prstDash val="solid"/>
+                      <a:round/>
+                      <a:headEnd type="none" w="med" len="med"/>
+                      <a:tailEnd type="none" w="med" len="med"/>
+                    </a:lnT>
+                    <a:lnB w="12700" cap="flat" cmpd="sng" algn="ctr">
+                      <a:solidFill>
+                        <a:srgbClr val="DDDDDD"/>
+                      </a:solidFill>
+                      <a:prstDash val="solid"/>
+                      <a:round/>
+                      <a:headEnd type="none" w="med" len="med"/>
+                      <a:tailEnd type="none" w="med" len="med"/>
+                    </a:lnB>
+                    <a:solidFill>
+                      <a:srgbClr val="F4F4F4"/>
+                    </a:solidFill>
+                  </a:tcPr>
+                </a:tc>
+                <a:tc>
+                  <a:txBody>
+                    <a:bodyPr/>
+                    <a:lstStyle/>
+                    <a:p>
+                      <a:pPr marL="0" indent="0">
+                        <a:buNone/>
+                      </a:pPr>
+                      <a:r>
+                        <a:rPr lang="pt-BR" sz="1100" noProof="0" dirty="0">
+                          <a:solidFill>
+                            <a:srgbClr val="1A1A1A"/>
+                          </a:solidFill>
+                        </a:rPr>
+                        <a:t>Vendor 2 = 73%, Vendor 1 = 27%, Vendor 6 ~0%</a:t>
+                      </a:r>
+                      <a:endParaRPr lang="pt-BR" sz="1100" noProof="0" dirty="0"/>
+                    </a:p>
+                  </a:txBody>
+                  <a:tcPr>
+                    <a:lnL w="12700" cap="flat" cmpd="sng" algn="ctr">
+                      <a:solidFill>
+                        <a:srgbClr val="DDDDDD"/>
+                      </a:solidFill>
+                      <a:prstDash val="solid"/>
+                      <a:round/>
+                      <a:headEnd type="none" w="med" len="med"/>
+                      <a:tailEnd type="none" w="med" len="med"/>
+                    </a:lnL>
+                    <a:lnR w="12700" cap="flat" cmpd="sng" algn="ctr">
+                      <a:solidFill>
+                        <a:srgbClr val="DDDDDD"/>
+                      </a:solidFill>
+                      <a:prstDash val="solid"/>
+                      <a:round/>
+                      <a:headEnd type="none" w="med" len="med"/>
+                      <a:tailEnd type="none" w="med" len="med"/>
+                    </a:lnR>
+                    <a:lnT w="12700" cap="flat" cmpd="sng" algn="ctr">
+                      <a:solidFill>
+                        <a:srgbClr val="DDDDDD"/>
+                      </a:solidFill>
+                      <a:prstDash val="solid"/>
+                      <a:round/>
+                      <a:headEnd type="none" w="med" len="med"/>
+                      <a:tailEnd type="none" w="med" len="med"/>
+                    </a:lnT>
+                    <a:lnB w="12700" cap="flat" cmpd="sng" algn="ctr">
+                      <a:solidFill>
+                        <a:srgbClr val="DDDDDD"/>
+                      </a:solidFill>
+                      <a:prstDash val="solid"/>
+                      <a:round/>
+                      <a:headEnd type="none" w="med" len="med"/>
+                      <a:tailEnd type="none" w="med" len="med"/>
+                    </a:lnB>
+                    <a:solidFill>
+                      <a:srgbClr val="F4F4F4"/>
+                    </a:solidFill>
+                  </a:tcPr>
+                </a:tc>
+                <a:tc>
+                  <a:txBody>
+                    <a:bodyPr/>
+                    <a:lstStyle/>
+                    <a:p>
+                      <a:pPr marL="0" indent="0">
+                        <a:buNone/>
+                      </a:pPr>
+                      <a:r>
+                        <a:rPr lang="pt-BR" sz="1100" noProof="0" dirty="0">
+                          <a:solidFill>
+                            <a:srgbClr val="1A1A1A"/>
+                          </a:solidFill>
+                        </a:rPr>
+                        <a:t>vendor_id = IDENTIFIER/INTERNAL</a:t>
+                      </a:r>
+                      <a:endParaRPr lang="pt-BR" sz="1100" noProof="0" dirty="0"/>
+                    </a:p>
+                  </a:txBody>
+                  <a:tcPr>
+                    <a:lnL w="12700" cap="flat" cmpd="sng" algn="ctr">
+                      <a:solidFill>
+                        <a:srgbClr val="DDDDDD"/>
+                      </a:solidFill>
+                      <a:prstDash val="solid"/>
+                      <a:round/>
+                      <a:headEnd type="none" w="med" len="med"/>
+                      <a:tailEnd type="none" w="med" len="med"/>
+                    </a:lnL>
+                    <a:lnR w="12700" cap="flat" cmpd="sng" algn="ctr">
+                      <a:solidFill>
+                        <a:srgbClr val="DDDDDD"/>
+                      </a:solidFill>
+                      <a:prstDash val="solid"/>
+                      <a:round/>
+                      <a:headEnd type="none" w="med" len="med"/>
+                      <a:tailEnd type="none" w="med" len="med"/>
+                    </a:lnR>
+                    <a:lnT w="12700" cap="flat" cmpd="sng" algn="ctr">
+                      <a:solidFill>
+                        <a:srgbClr val="DDDDDD"/>
+                      </a:solidFill>
+                      <a:prstDash val="solid"/>
+                      <a:round/>
+                      <a:headEnd type="none" w="med" len="med"/>
+                      <a:tailEnd type="none" w="med" len="med"/>
+                    </a:lnT>
+                    <a:lnB w="12700" cap="flat" cmpd="sng" algn="ctr">
+                      <a:solidFill>
+                        <a:srgbClr val="DDDDDD"/>
+                      </a:solidFill>
+                      <a:prstDash val="solid"/>
+                      <a:round/>
+                      <a:headEnd type="none" w="med" len="med"/>
+                      <a:tailEnd type="none" w="med" len="med"/>
+                    </a:lnB>
+                    <a:solidFill>
+                      <a:srgbClr val="F4F4F4"/>
+                    </a:solidFill>
+                  </a:tcPr>
+                </a:tc>
+                <a:extLst>
+                  <a:ext uri="{0D108BD9-81ED-4DB2-BD59-A6C34878D82A}">
+                    <a16:rowId xmlns:a16="http://schemas.microsoft.com/office/drawing/2014/main" val="10001"/>
+                  </a:ext>
+                </a:extLst>
+              </a:tr>
+              <a:tr h="0">
+                <a:tc>
+                  <a:txBody>
+                    <a:bodyPr/>
+                    <a:lstStyle/>
+                    <a:p>
+                      <a:pPr marL="0" indent="0">
+                        <a:buNone/>
+                      </a:pPr>
+                      <a:r>
+                        <a:rPr lang="pt-BR" sz="1100" b="1" noProof="0" dirty="0">
+                          <a:solidFill>
+                            <a:srgbClr val="EA1D2C"/>
+                          </a:solidFill>
+                        </a:rPr>
+                        <a:t>passenger_count</a:t>
+                      </a:r>
+                      <a:endParaRPr lang="pt-BR" sz="1100" noProof="0" dirty="0"/>
+                    </a:p>
+                  </a:txBody>
+                  <a:tcPr>
+                    <a:lnL w="12700" cap="flat" cmpd="sng" algn="ctr">
+                      <a:solidFill>
+                        <a:srgbClr val="DDDDDD"/>
+                      </a:solidFill>
+                      <a:prstDash val="solid"/>
+                      <a:round/>
+                      <a:headEnd type="none" w="med" len="med"/>
+                      <a:tailEnd type="none" w="med" len="med"/>
+                    </a:lnL>
+                    <a:lnR w="12700" cap="flat" cmpd="sng" algn="ctr">
+                      <a:solidFill>
+                        <a:srgbClr val="DDDDDD"/>
+                      </a:solidFill>
+                      <a:prstDash val="solid"/>
+                      <a:round/>
+                      <a:headEnd type="none" w="med" len="med"/>
+                      <a:tailEnd type="none" w="med" len="med"/>
+                    </a:lnR>
+                    <a:lnT w="12700" cap="flat" cmpd="sng" algn="ctr">
+                      <a:solidFill>
+                        <a:srgbClr val="DDDDDD"/>
+                      </a:solidFill>
+                      <a:prstDash val="solid"/>
+                      <a:round/>
+                      <a:headEnd type="none" w="med" len="med"/>
+                      <a:tailEnd type="none" w="med" len="med"/>
+                    </a:lnT>
+                    <a:lnB w="12700" cap="flat" cmpd="sng" algn="ctr">
+                      <a:solidFill>
+                        <a:srgbClr val="DDDDDD"/>
+                      </a:solidFill>
+                      <a:prstDash val="solid"/>
+                      <a:round/>
+                      <a:headEnd type="none" w="med" len="med"/>
+                      <a:tailEnd type="none" w="med" len="med"/>
+                    </a:lnB>
+                    <a:solidFill>
+                      <a:srgbClr val="FFFFFF"/>
+                    </a:solidFill>
+                  </a:tcPr>
+                </a:tc>
+                <a:tc>
+                  <a:txBody>
+                    <a:bodyPr/>
+                    <a:lstStyle/>
+                    <a:p>
+                      <a:pPr marL="0" indent="0">
+                        <a:buNone/>
+                      </a:pPr>
+                      <a:r>
+                        <a:rPr lang="pt-BR" sz="1100" noProof="0" dirty="0">
+                          <a:solidFill>
+                            <a:srgbClr val="1A1A1A"/>
+                          </a:solidFill>
+                        </a:rPr>
+                        <a:t>1 passageiro = 11,9 mi (73,5% das corridas)</a:t>
+                      </a:r>
+                      <a:endParaRPr lang="pt-BR" sz="1100" noProof="0" dirty="0"/>
+                    </a:p>
+                  </a:txBody>
+                  <a:tcPr>
+                    <a:lnL w="12700" cap="flat" cmpd="sng" algn="ctr">
+                      <a:solidFill>
+                        <a:srgbClr val="DDDDDD"/>
+                      </a:solidFill>
+                      <a:prstDash val="solid"/>
+                      <a:round/>
+                      <a:headEnd type="none" w="med" len="med"/>
+                      <a:tailEnd type="none" w="med" len="med"/>
+                    </a:lnL>
+                    <a:lnR w="12700" cap="flat" cmpd="sng" algn="ctr">
+                      <a:solidFill>
+                        <a:srgbClr val="DDDDDD"/>
+                      </a:solidFill>
+                      <a:prstDash val="solid"/>
+                      <a:round/>
+                      <a:headEnd type="none" w="med" len="med"/>
+                      <a:tailEnd type="none" w="med" len="med"/>
+                    </a:lnR>
+                    <a:lnT w="12700" cap="flat" cmpd="sng" algn="ctr">
+                      <a:solidFill>
+                        <a:srgbClr val="DDDDDD"/>
+                      </a:solidFill>
+                      <a:prstDash val="solid"/>
+                      <a:round/>
+                      <a:headEnd type="none" w="med" len="med"/>
+                      <a:tailEnd type="none" w="med" len="med"/>
+                    </a:lnT>
+                    <a:lnB w="12700" cap="flat" cmpd="sng" algn="ctr">
+                      <a:solidFill>
+                        <a:srgbClr val="DDDDDD"/>
+                      </a:solidFill>
+                      <a:prstDash val="solid"/>
+                      <a:round/>
+                      <a:headEnd type="none" w="med" len="med"/>
+                      <a:tailEnd type="none" w="med" len="med"/>
+                    </a:lnB>
+                    <a:solidFill>
+                      <a:srgbClr val="FFFFFF"/>
+                    </a:solidFill>
+                  </a:tcPr>
+                </a:tc>
+                <a:tc>
+                  <a:txBody>
+                    <a:bodyPr/>
+                    <a:lstStyle/>
+                    <a:p>
+                      <a:pPr marL="0" indent="0">
+                        <a:buNone/>
+                      </a:pPr>
+                      <a:r>
+                        <a:rPr lang="pt-BR" sz="1100" noProof="0" dirty="0">
+                          <a:solidFill>
+                            <a:srgbClr val="1A1A1A"/>
+                          </a:solidFill>
+                        </a:rPr>
+                        <a:t>Modal individual; filtros nulo e zero</a:t>
+                      </a:r>
+                      <a:endParaRPr lang="pt-BR" sz="1100" noProof="0" dirty="0"/>
+                    </a:p>
+                  </a:txBody>
+                  <a:tcPr>
+                    <a:lnL w="12700" cap="flat" cmpd="sng" algn="ctr">
+                      <a:solidFill>
+                        <a:srgbClr val="DDDDDD"/>
+                      </a:solidFill>
+                      <a:prstDash val="solid"/>
+                      <a:round/>
+                      <a:headEnd type="none" w="med" len="med"/>
+                      <a:tailEnd type="none" w="med" len="med"/>
+                    </a:lnL>
+                    <a:lnR w="12700" cap="flat" cmpd="sng" algn="ctr">
+                      <a:solidFill>
+                        <a:srgbClr val="DDDDDD"/>
+                      </a:solidFill>
+                      <a:prstDash val="solid"/>
+                      <a:round/>
+                      <a:headEnd type="none" w="med" len="med"/>
+                      <a:tailEnd type="none" w="med" len="med"/>
+                    </a:lnR>
+                    <a:lnT w="12700" cap="flat" cmpd="sng" algn="ctr">
+                      <a:solidFill>
+                        <a:srgbClr val="DDDDDD"/>
+                      </a:solidFill>
+                      <a:prstDash val="solid"/>
+                      <a:round/>
+                      <a:headEnd type="none" w="med" len="med"/>
+                      <a:tailEnd type="none" w="med" len="med"/>
+                    </a:lnT>
+                    <a:lnB w="12700" cap="flat" cmpd="sng" algn="ctr">
+                      <a:solidFill>
+                        <a:srgbClr val="DDDDDD"/>
+                      </a:solidFill>
+                      <a:prstDash val="solid"/>
+                      <a:round/>
+                      <a:headEnd type="none" w="med" len="med"/>
+                      <a:tailEnd type="none" w="med" len="med"/>
+                    </a:lnB>
+                    <a:solidFill>
+                      <a:srgbClr val="FFFFFF"/>
+                    </a:solidFill>
+                  </a:tcPr>
+                </a:tc>
+                <a:extLst>
+                  <a:ext uri="{0D108BD9-81ED-4DB2-BD59-A6C34878D82A}">
+                    <a16:rowId xmlns:a16="http://schemas.microsoft.com/office/drawing/2014/main" val="10002"/>
+                  </a:ext>
+                </a:extLst>
+              </a:tr>
+              <a:tr h="0">
+                <a:tc>
+                  <a:txBody>
+                    <a:bodyPr/>
+                    <a:lstStyle/>
+                    <a:p>
+                      <a:pPr marL="0" indent="0">
+                        <a:buNone/>
+                      </a:pPr>
+                      <a:r>
+                        <a:rPr lang="pt-BR" sz="1100" b="1" noProof="0" dirty="0">
+                          <a:solidFill>
+                            <a:srgbClr val="EA1D2C"/>
+                          </a:solidFill>
+                        </a:rPr>
+                        <a:t>total_amount</a:t>
+                      </a:r>
+                      <a:endParaRPr lang="pt-BR" sz="1100" noProof="0" dirty="0"/>
+                    </a:p>
+                  </a:txBody>
+                  <a:tcPr>
+                    <a:lnL w="12700" cap="flat" cmpd="sng" algn="ctr">
+                      <a:solidFill>
+                        <a:srgbClr val="DDDDDD"/>
+                      </a:solidFill>
+                      <a:prstDash val="solid"/>
+                      <a:round/>
+                      <a:headEnd type="none" w="med" len="med"/>
+                      <a:tailEnd type="none" w="med" len="med"/>
+                    </a:lnL>
+                    <a:lnR w="12700" cap="flat" cmpd="sng" algn="ctr">
+                      <a:solidFill>
+                        <a:srgbClr val="DDDDDD"/>
+                      </a:solidFill>
+                      <a:prstDash val="solid"/>
+                      <a:round/>
+                      <a:headEnd type="none" w="med" len="med"/>
+                      <a:tailEnd type="none" w="med" len="med"/>
+                    </a:lnR>
+                    <a:lnT w="12700" cap="flat" cmpd="sng" algn="ctr">
+                      <a:solidFill>
+                        <a:srgbClr val="DDDDDD"/>
+                      </a:solidFill>
+                      <a:prstDash val="solid"/>
+                      <a:round/>
+                      <a:headEnd type="none" w="med" len="med"/>
+                      <a:tailEnd type="none" w="med" len="med"/>
+                    </a:lnT>
+                    <a:lnB w="12700" cap="flat" cmpd="sng" algn="ctr">
+                      <a:solidFill>
+                        <a:srgbClr val="DDDDDD"/>
+                      </a:solidFill>
+                      <a:prstDash val="solid"/>
+                      <a:round/>
+                      <a:headEnd type="none" w="med" len="med"/>
+                      <a:tailEnd type="none" w="med" len="med"/>
+                    </a:lnB>
+                    <a:solidFill>
+                      <a:srgbClr val="F4F4F4"/>
+                    </a:solidFill>
+                  </a:tcPr>
+                </a:tc>
+                <a:tc>
+                  <a:txBody>
+                    <a:bodyPr/>
+                    <a:lstStyle/>
+                    <a:p>
+                      <a:pPr marL="0" indent="0">
+                        <a:buNone/>
+                      </a:pPr>
+                      <a:r>
+                        <a:rPr lang="pt-BR" sz="1100" noProof="0" dirty="0">
+                          <a:solidFill>
+                            <a:srgbClr val="1A1A1A"/>
+                          </a:solidFill>
+                        </a:rPr>
+                        <a:t>Mediana 20,60 &lt; Media 27,84 (assimétrica)</a:t>
+                      </a:r>
+                      <a:endParaRPr lang="pt-BR" sz="1100" noProof="0" dirty="0"/>
+                    </a:p>
+                  </a:txBody>
+                  <a:tcPr>
+                    <a:lnL w="12700" cap="flat" cmpd="sng" algn="ctr">
+                      <a:solidFill>
+                        <a:srgbClr val="DDDDDD"/>
+                      </a:solidFill>
+                      <a:prstDash val="solid"/>
+                      <a:round/>
+                      <a:headEnd type="none" w="med" len="med"/>
+                      <a:tailEnd type="none" w="med" len="med"/>
+                    </a:lnL>
+                    <a:lnR w="12700" cap="flat" cmpd="sng" algn="ctr">
+                      <a:solidFill>
+                        <a:srgbClr val="DDDDDD"/>
+                      </a:solidFill>
+                      <a:prstDash val="solid"/>
+                      <a:round/>
+                      <a:headEnd type="none" w="med" len="med"/>
+                      <a:tailEnd type="none" w="med" len="med"/>
+                    </a:lnR>
+                    <a:lnT w="12700" cap="flat" cmpd="sng" algn="ctr">
+                      <a:solidFill>
+                        <a:srgbClr val="DDDDDD"/>
+                      </a:solidFill>
+                      <a:prstDash val="solid"/>
+                      <a:round/>
+                      <a:headEnd type="none" w="med" len="med"/>
+                      <a:tailEnd type="none" w="med" len="med"/>
+                    </a:lnT>
+                    <a:lnB w="12700" cap="flat" cmpd="sng" algn="ctr">
+                      <a:solidFill>
+                        <a:srgbClr val="DDDDDD"/>
+                      </a:solidFill>
+                      <a:prstDash val="solid"/>
+                      <a:round/>
+                      <a:headEnd type="none" w="med" len="med"/>
+                      <a:tailEnd type="none" w="med" len="med"/>
+                    </a:lnB>
+                    <a:solidFill>
+                      <a:srgbClr val="F4F4F4"/>
+                    </a:solidFill>
+                  </a:tcPr>
+                </a:tc>
+                <a:tc>
+                  <a:txBody>
+                    <a:bodyPr/>
+                    <a:lstStyle/>
+                    <a:p>
+                      <a:pPr marL="0" indent="0">
+                        <a:buNone/>
+                      </a:pPr>
+                      <a:r>
+                        <a:rPr lang="pt-BR" sz="1100" noProof="0" dirty="0">
+                          <a:solidFill>
+                            <a:srgbClr val="1A1A1A"/>
+                          </a:solidFill>
+                        </a:rPr>
+                        <a:t>Filtro &gt;= 0; duas interpretações P1</a:t>
+                      </a:r>
+                      <a:endParaRPr lang="pt-BR" sz="1100" noProof="0" dirty="0"/>
+                    </a:p>
+                  </a:txBody>
+                  <a:tcPr>
+                    <a:lnL w="12700" cap="flat" cmpd="sng" algn="ctr">
+                      <a:solidFill>
+                        <a:srgbClr val="DDDDDD"/>
+                      </a:solidFill>
+                      <a:prstDash val="solid"/>
+                      <a:round/>
+                      <a:headEnd type="none" w="med" len="med"/>
+                      <a:tailEnd type="none" w="med" len="med"/>
+                    </a:lnL>
+                    <a:lnR w="12700" cap="flat" cmpd="sng" algn="ctr">
+                      <a:solidFill>
+                        <a:srgbClr val="DDDDDD"/>
+                      </a:solidFill>
+                      <a:prstDash val="solid"/>
+                      <a:round/>
+                      <a:headEnd type="none" w="med" len="med"/>
+                      <a:tailEnd type="none" w="med" len="med"/>
+                    </a:lnR>
+                    <a:lnT w="12700" cap="flat" cmpd="sng" algn="ctr">
+                      <a:solidFill>
+                        <a:srgbClr val="DDDDDD"/>
+                      </a:solidFill>
+                      <a:prstDash val="solid"/>
+                      <a:round/>
+                      <a:headEnd type="none" w="med" len="med"/>
+                      <a:tailEnd type="none" w="med" len="med"/>
+                    </a:lnT>
+                    <a:lnB w="12700" cap="flat" cmpd="sng" algn="ctr">
+                      <a:solidFill>
+                        <a:srgbClr val="DDDDDD"/>
+                      </a:solidFill>
+                      <a:prstDash val="solid"/>
+                      <a:round/>
+                      <a:headEnd type="none" w="med" len="med"/>
+                      <a:tailEnd type="none" w="med" len="med"/>
+                    </a:lnB>
+                    <a:solidFill>
+                      <a:srgbClr val="F4F4F4"/>
+                    </a:solidFill>
+                  </a:tcPr>
+                </a:tc>
+                <a:extLst>
+                  <a:ext uri="{0D108BD9-81ED-4DB2-BD59-A6C34878D82A}">
+                    <a16:rowId xmlns:a16="http://schemas.microsoft.com/office/drawing/2014/main" val="10003"/>
+                  </a:ext>
+                </a:extLst>
+              </a:tr>
+              <a:tr h="0">
+                <a:tc>
+                  <a:txBody>
+                    <a:bodyPr/>
+                    <a:lstStyle/>
+                    <a:p>
+                      <a:pPr marL="0" indent="0">
+                        <a:buNone/>
+                      </a:pPr>
+                      <a:r>
+                        <a:rPr lang="pt-BR" sz="1100" b="1" noProof="0" dirty="0">
+                          <a:solidFill>
+                            <a:srgbClr val="EA1D2C"/>
+                          </a:solidFill>
+                        </a:rPr>
+                        <a:t>Distância x valor</a:t>
+                      </a:r>
+                      <a:endParaRPr lang="pt-BR" sz="1100" noProof="0" dirty="0"/>
+                    </a:p>
+                  </a:txBody>
+                  <a:tcPr>
+                    <a:lnL w="12700" cap="flat" cmpd="sng" algn="ctr">
+                      <a:solidFill>
+                        <a:srgbClr val="DDDDDD"/>
+                      </a:solidFill>
+                      <a:prstDash val="solid"/>
+                      <a:round/>
+                      <a:headEnd type="none" w="med" len="med"/>
+                      <a:tailEnd type="none" w="med" len="med"/>
+                    </a:lnL>
+                    <a:lnR w="12700" cap="flat" cmpd="sng" algn="ctr">
+                      <a:solidFill>
+                        <a:srgbClr val="DDDDDD"/>
+                      </a:solidFill>
+                      <a:prstDash val="solid"/>
+                      <a:round/>
+                      <a:headEnd type="none" w="med" len="med"/>
+                      <a:tailEnd type="none" w="med" len="med"/>
+                    </a:lnR>
+                    <a:lnT w="12700" cap="flat" cmpd="sng" algn="ctr">
+                      <a:solidFill>
+                        <a:srgbClr val="DDDDDD"/>
+                      </a:solidFill>
+                      <a:prstDash val="solid"/>
+                      <a:round/>
+                      <a:headEnd type="none" w="med" len="med"/>
+                      <a:tailEnd type="none" w="med" len="med"/>
+                    </a:lnT>
+                    <a:lnB w="12700" cap="flat" cmpd="sng" algn="ctr">
+                      <a:solidFill>
+                        <a:srgbClr val="DDDDDD"/>
+                      </a:solidFill>
+                      <a:prstDash val="solid"/>
+                      <a:round/>
+                      <a:headEnd type="none" w="med" len="med"/>
+                      <a:tailEnd type="none" w="med" len="med"/>
+                    </a:lnB>
+                    <a:solidFill>
+                      <a:srgbClr val="FFFFFF"/>
+                    </a:solidFill>
+                  </a:tcPr>
+                </a:tc>
+                <a:tc>
+                  <a:txBody>
+                    <a:bodyPr/>
+                    <a:lstStyle/>
+                    <a:p>
+                      <a:pPr marL="0" indent="0">
+                        <a:buNone/>
+                      </a:pPr>
+                      <a:r>
+                        <a:rPr lang="pt-BR" sz="1100" noProof="0" dirty="0">
+                          <a:solidFill>
+                            <a:srgbClr val="1A1A1A"/>
+                          </a:solidFill>
+                        </a:rPr>
+                        <a:t>Correlação = 0,93 (forte e positiva)</a:t>
+                      </a:r>
+                      <a:endParaRPr lang="pt-BR" sz="1100" noProof="0" dirty="0"/>
+                    </a:p>
+                  </a:txBody>
+                  <a:tcPr>
+                    <a:lnL w="12700" cap="flat" cmpd="sng" algn="ctr">
+                      <a:solidFill>
+                        <a:srgbClr val="DDDDDD"/>
+                      </a:solidFill>
+                      <a:prstDash val="solid"/>
+                      <a:round/>
+                      <a:headEnd type="none" w="med" len="med"/>
+                      <a:tailEnd type="none" w="med" len="med"/>
+                    </a:lnL>
+                    <a:lnR w="12700" cap="flat" cmpd="sng" algn="ctr">
+                      <a:solidFill>
+                        <a:srgbClr val="DDDDDD"/>
+                      </a:solidFill>
+                      <a:prstDash val="solid"/>
+                      <a:round/>
+                      <a:headEnd type="none" w="med" len="med"/>
+                      <a:tailEnd type="none" w="med" len="med"/>
+                    </a:lnR>
+                    <a:lnT w="12700" cap="flat" cmpd="sng" algn="ctr">
+                      <a:solidFill>
+                        <a:srgbClr val="DDDDDD"/>
+                      </a:solidFill>
+                      <a:prstDash val="solid"/>
+                      <a:round/>
+                      <a:headEnd type="none" w="med" len="med"/>
+                      <a:tailEnd type="none" w="med" len="med"/>
+                    </a:lnT>
+                    <a:lnB w="12700" cap="flat" cmpd="sng" algn="ctr">
+                      <a:solidFill>
+                        <a:srgbClr val="DDDDDD"/>
+                      </a:solidFill>
+                      <a:prstDash val="solid"/>
+                      <a:round/>
+                      <a:headEnd type="none" w="med" len="med"/>
+                      <a:tailEnd type="none" w="med" len="med"/>
+                    </a:lnB>
+                    <a:solidFill>
+                      <a:srgbClr val="FFFFFF"/>
+                    </a:solidFill>
+                  </a:tcPr>
+                </a:tc>
+                <a:tc>
+                  <a:txBody>
+                    <a:bodyPr/>
+                    <a:lstStyle/>
+                    <a:p>
+                      <a:pPr marL="0" indent="0">
+                        <a:buNone/>
+                      </a:pPr>
+                      <a:r>
+                        <a:rPr lang="pt-BR" sz="1100" noProof="0" dirty="0">
+                          <a:solidFill>
+                            <a:srgbClr val="1A1A1A"/>
+                          </a:solidFill>
+                        </a:rPr>
+                        <a:t>total_amount confiável p/ faturamento</a:t>
+                      </a:r>
+                      <a:endParaRPr lang="pt-BR" sz="1100" noProof="0" dirty="0"/>
+                    </a:p>
+                  </a:txBody>
+                  <a:tcPr>
+                    <a:lnL w="12700" cap="flat" cmpd="sng" algn="ctr">
+                      <a:solidFill>
+                        <a:srgbClr val="DDDDDD"/>
+                      </a:solidFill>
+                      <a:prstDash val="solid"/>
+                      <a:round/>
+                      <a:headEnd type="none" w="med" len="med"/>
+                      <a:tailEnd type="none" w="med" len="med"/>
+                    </a:lnL>
+                    <a:lnR w="12700" cap="flat" cmpd="sng" algn="ctr">
+                      <a:solidFill>
+                        <a:srgbClr val="DDDDDD"/>
+                      </a:solidFill>
+                      <a:prstDash val="solid"/>
+                      <a:round/>
+                      <a:headEnd type="none" w="med" len="med"/>
+                      <a:tailEnd type="none" w="med" len="med"/>
+                    </a:lnR>
+                    <a:lnT w="12700" cap="flat" cmpd="sng" algn="ctr">
+                      <a:solidFill>
+                        <a:srgbClr val="DDDDDD"/>
+                      </a:solidFill>
+                      <a:prstDash val="solid"/>
+                      <a:round/>
+                      <a:headEnd type="none" w="med" len="med"/>
+                      <a:tailEnd type="none" w="med" len="med"/>
+                    </a:lnT>
+                    <a:lnB w="12700" cap="flat" cmpd="sng" algn="ctr">
+                      <a:solidFill>
+                        <a:srgbClr val="DDDDDD"/>
+                      </a:solidFill>
+                      <a:prstDash val="solid"/>
+                      <a:round/>
+                      <a:headEnd type="none" w="med" len="med"/>
+                      <a:tailEnd type="none" w="med" len="med"/>
+                    </a:lnB>
+                    <a:solidFill>
+                      <a:srgbClr val="FFFFFF"/>
+                    </a:solidFill>
+                  </a:tcPr>
+                </a:tc>
+                <a:extLst>
+                  <a:ext uri="{0D108BD9-81ED-4DB2-BD59-A6C34878D82A}">
+                    <a16:rowId xmlns:a16="http://schemas.microsoft.com/office/drawing/2014/main" val="10004"/>
+                  </a:ext>
+                </a:extLst>
+              </a:tr>
+              <a:tr h="0">
+                <a:tc>
+                  <a:txBody>
+                    <a:bodyPr/>
+                    <a:lstStyle/>
+                    <a:p>
+                      <a:pPr marL="0" indent="0">
+                        <a:buNone/>
+                      </a:pPr>
+                      <a:r>
+                        <a:rPr lang="pt-BR" sz="1100" b="1" noProof="0" dirty="0">
+                          <a:solidFill>
+                            <a:srgbClr val="EA1D2C"/>
+                          </a:solidFill>
+                        </a:rPr>
+                        <a:t>Bronze vs Silver</a:t>
+                      </a:r>
+                      <a:endParaRPr lang="pt-BR" sz="1100" noProof="0" dirty="0"/>
+                    </a:p>
+                  </a:txBody>
+                  <a:tcPr>
+                    <a:lnL w="12700" cap="flat" cmpd="sng" algn="ctr">
+                      <a:solidFill>
+                        <a:srgbClr val="DDDDDD"/>
+                      </a:solidFill>
+                      <a:prstDash val="solid"/>
+                      <a:round/>
+                      <a:headEnd type="none" w="med" len="med"/>
+                      <a:tailEnd type="none" w="med" len="med"/>
+                    </a:lnL>
+                    <a:lnR w="12700" cap="flat" cmpd="sng" algn="ctr">
+                      <a:solidFill>
+                        <a:srgbClr val="DDDDDD"/>
+                      </a:solidFill>
+                      <a:prstDash val="solid"/>
+                      <a:round/>
+                      <a:headEnd type="none" w="med" len="med"/>
+                      <a:tailEnd type="none" w="med" len="med"/>
+                    </a:lnR>
+                    <a:lnT w="12700" cap="flat" cmpd="sng" algn="ctr">
+                      <a:solidFill>
+                        <a:srgbClr val="DDDDDD"/>
+                      </a:solidFill>
+                      <a:prstDash val="solid"/>
+                      <a:round/>
+                      <a:headEnd type="none" w="med" len="med"/>
+                      <a:tailEnd type="none" w="med" len="med"/>
+                    </a:lnT>
+                    <a:lnB w="12700" cap="flat" cmpd="sng" algn="ctr">
+                      <a:solidFill>
+                        <a:srgbClr val="DDDDDD"/>
+                      </a:solidFill>
+                      <a:prstDash val="solid"/>
+                      <a:round/>
+                      <a:headEnd type="none" w="med" len="med"/>
+                      <a:tailEnd type="none" w="med" len="med"/>
+                    </a:lnB>
+                    <a:solidFill>
+                      <a:srgbClr val="F4F4F4"/>
+                    </a:solidFill>
+                  </a:tcPr>
+                </a:tc>
+                <a:tc>
+                  <a:txBody>
+                    <a:bodyPr/>
+                    <a:lstStyle/>
+                    <a:p>
+                      <a:pPr marL="0" indent="0">
+                        <a:buNone/>
+                      </a:pPr>
+                      <a:r>
+                        <a:rPr lang="pt-BR" sz="1100" noProof="0" dirty="0">
+                          <a:solidFill>
+                            <a:srgbClr val="1A1A1A"/>
+                          </a:solidFill>
+                        </a:rPr>
+                        <a:t>Tendencia de alta preservada apos limpeza</a:t>
+                      </a:r>
+                      <a:endParaRPr lang="pt-BR" sz="1100" noProof="0" dirty="0"/>
+                    </a:p>
+                  </a:txBody>
+                  <a:tcPr>
+                    <a:lnL w="12700" cap="flat" cmpd="sng" algn="ctr">
+                      <a:solidFill>
+                        <a:srgbClr val="DDDDDD"/>
+                      </a:solidFill>
+                      <a:prstDash val="solid"/>
+                      <a:round/>
+                      <a:headEnd type="none" w="med" len="med"/>
+                      <a:tailEnd type="none" w="med" len="med"/>
+                    </a:lnL>
+                    <a:lnR w="12700" cap="flat" cmpd="sng" algn="ctr">
+                      <a:solidFill>
+                        <a:srgbClr val="DDDDDD"/>
+                      </a:solidFill>
+                      <a:prstDash val="solid"/>
+                      <a:round/>
+                      <a:headEnd type="none" w="med" len="med"/>
+                      <a:tailEnd type="none" w="med" len="med"/>
+                    </a:lnR>
+                    <a:lnT w="12700" cap="flat" cmpd="sng" algn="ctr">
+                      <a:solidFill>
+                        <a:srgbClr val="DDDDDD"/>
+                      </a:solidFill>
+                      <a:prstDash val="solid"/>
+                      <a:round/>
+                      <a:headEnd type="none" w="med" len="med"/>
+                      <a:tailEnd type="none" w="med" len="med"/>
+                    </a:lnT>
+                    <a:lnB w="12700" cap="flat" cmpd="sng" algn="ctr">
+                      <a:solidFill>
+                        <a:srgbClr val="DDDDDD"/>
+                      </a:solidFill>
+                      <a:prstDash val="solid"/>
+                      <a:round/>
+                      <a:headEnd type="none" w="med" len="med"/>
+                      <a:tailEnd type="none" w="med" len="med"/>
+                    </a:lnB>
+                    <a:solidFill>
+                      <a:srgbClr val="F4F4F4"/>
+                    </a:solidFill>
+                  </a:tcPr>
+                </a:tc>
+                <a:tc>
+                  <a:txBody>
+                    <a:bodyPr/>
+                    <a:lstStyle/>
+                    <a:p>
+                      <a:pPr marL="0" indent="0">
+                        <a:buNone/>
+                      </a:pPr>
+                      <a:r>
+                        <a:rPr lang="pt-BR" sz="1100" noProof="0" dirty="0">
+                          <a:solidFill>
+                            <a:srgbClr val="1A1A1A"/>
+                          </a:solidFill>
+                        </a:rPr>
+                        <a:t>Limpeza removeu ruido sem distorcer</a:t>
+                      </a:r>
+                      <a:endParaRPr lang="pt-BR" sz="1100" noProof="0" dirty="0"/>
+                    </a:p>
+                  </a:txBody>
+                  <a:tcPr>
+                    <a:lnL w="12700" cap="flat" cmpd="sng" algn="ctr">
+                      <a:solidFill>
+                        <a:srgbClr val="DDDDDD"/>
+                      </a:solidFill>
+                      <a:prstDash val="solid"/>
+                      <a:round/>
+                      <a:headEnd type="none" w="med" len="med"/>
+                      <a:tailEnd type="none" w="med" len="med"/>
+                    </a:lnL>
+                    <a:lnR w="12700" cap="flat" cmpd="sng" algn="ctr">
+                      <a:solidFill>
+                        <a:srgbClr val="DDDDDD"/>
+                      </a:solidFill>
+                      <a:prstDash val="solid"/>
+                      <a:round/>
+                      <a:headEnd type="none" w="med" len="med"/>
+                      <a:tailEnd type="none" w="med" len="med"/>
+                    </a:lnR>
+                    <a:lnT w="12700" cap="flat" cmpd="sng" algn="ctr">
+                      <a:solidFill>
+                        <a:srgbClr val="DDDDDD"/>
+                      </a:solidFill>
+                      <a:prstDash val="solid"/>
+                      <a:round/>
+                      <a:headEnd type="none" w="med" len="med"/>
+                      <a:tailEnd type="none" w="med" len="med"/>
+                    </a:lnT>
+                    <a:lnB w="12700" cap="flat" cmpd="sng" algn="ctr">
+                      <a:solidFill>
+                        <a:srgbClr val="DDDDDD"/>
+                      </a:solidFill>
+                      <a:prstDash val="solid"/>
+                      <a:round/>
+                      <a:headEnd type="none" w="med" len="med"/>
+                      <a:tailEnd type="none" w="med" len="med"/>
+                    </a:lnB>
+                    <a:solidFill>
+                      <a:srgbClr val="F4F4F4"/>
+                    </a:solidFill>
+                  </a:tcPr>
+                </a:tc>
+                <a:extLst>
+                  <a:ext uri="{0D108BD9-81ED-4DB2-BD59-A6C34878D82A}">
+                    <a16:rowId xmlns:a16="http://schemas.microsoft.com/office/drawing/2014/main" val="10005"/>
+                  </a:ext>
+                </a:extLst>
+              </a:tr>
+            </a:tbl>
+          </a:graphicData>
+        </a:graphic>
+      </p:graphicFrame>
+      <p:sp>
+        <p:nvSpPr>
+          <p:cNvPr id="8" name="Shape 5"/>
+          <p:cNvSpPr/>
+          <p:nvPr/>
+        </p:nvSpPr>
+        <p:spPr>
+          <a:xfrm>
+            <a:off x="457200" y="5212080"/>
+            <a:ext cx="11247120" cy="1005840"/>
           </a:xfrm>
           <a:prstGeom prst="roundRect">
             <a:avLst>
-              <a:gd name="adj" fmla="val 6316"/>
+              <a:gd name="adj" fmla="val 5455"/>
             </a:avLst>
           </a:prstGeom>
           <a:solidFill>
-            <a:srgbClr val="F4F4F4"/>
+            <a:srgbClr val="E8F5ED"/>
           </a:solidFill>
           <a:ln/>
         </p:spPr>
@@ -10171,534 +12204,14 @@
       </p:sp>
       <p:sp>
         <p:nvSpPr>
-          <p:cNvPr id="8" name="Text 6"/>
-          <p:cNvSpPr/>
-          <p:nvPr/>
-        </p:nvSpPr>
-        <p:spPr>
-          <a:xfrm>
-            <a:off x="640080" y="1965960"/>
-            <a:ext cx="1975104" cy="457200"/>
-          </a:xfrm>
-          <a:prstGeom prst="rect">
-            <a:avLst/>
-          </a:prstGeom>
-          <a:noFill/>
-          <a:ln/>
-        </p:spPr>
-        <p:txBody>
-          <a:bodyPr wrap="square" lIns="0" tIns="0" rIns="0" bIns="0" rtlCol="0" anchor="ctr"/>
-          <a:lstStyle/>
-          <a:p>
-            <a:pPr marL="0" indent="0" algn="ctr">
-              <a:lnSpc>
-                <a:spcPct val="100000"/>
-              </a:lnSpc>
-              <a:buNone/>
-            </a:pPr>
-            <a:r>
-              <a:rPr lang="pt-BR" sz="1000" b="1" noProof="0" dirty="0">
-                <a:solidFill>
-                  <a:srgbClr val="1A1A1A"/>
-                </a:solidFill>
-              </a:rPr>
-              <a:t>passenger IS NOT NULL</a:t>
-            </a:r>
-            <a:endParaRPr lang="pt-BR" sz="1000" noProof="0" dirty="0"/>
-          </a:p>
-        </p:txBody>
-      </p:sp>
-      <p:sp>
-        <p:nvSpPr>
-          <p:cNvPr id="9" name="Text 7"/>
-          <p:cNvSpPr/>
-          <p:nvPr/>
-        </p:nvSpPr>
-        <p:spPr>
-          <a:xfrm>
-            <a:off x="640080" y="2377440"/>
-            <a:ext cx="1975104" cy="274320"/>
-          </a:xfrm>
-          <a:prstGeom prst="rect">
-            <a:avLst/>
-          </a:prstGeom>
-          <a:noFill/>
-          <a:ln/>
-        </p:spPr>
-        <p:txBody>
-          <a:bodyPr wrap="square" lIns="0" tIns="0" rIns="0" bIns="0" rtlCol="0" anchor="ctr"/>
-          <a:lstStyle/>
-          <a:p>
-            <a:pPr marL="0" indent="0" algn="ctr">
-              <a:buNone/>
-            </a:pPr>
-            <a:r>
-              <a:rPr lang="pt-BR" sz="1100" b="1" noProof="0" dirty="0">
-                <a:solidFill>
-                  <a:srgbClr val="EA1D2C"/>
-                </a:solidFill>
-              </a:rPr>
-              <a:t>-428.665</a:t>
-            </a:r>
-            <a:endParaRPr lang="pt-BR" sz="1100" noProof="0" dirty="0"/>
-          </a:p>
-        </p:txBody>
-      </p:sp>
-      <p:sp>
-        <p:nvSpPr>
-          <p:cNvPr id="10" name="Shape 8"/>
-          <p:cNvSpPr/>
-          <p:nvPr/>
-        </p:nvSpPr>
-        <p:spPr>
-          <a:xfrm>
-            <a:off x="2816352" y="1874520"/>
-            <a:ext cx="2157984" cy="868680"/>
-          </a:xfrm>
-          <a:prstGeom prst="roundRect">
-            <a:avLst>
-              <a:gd name="adj" fmla="val 6316"/>
-            </a:avLst>
-          </a:prstGeom>
-          <a:solidFill>
-            <a:srgbClr val="F4F4F4"/>
-          </a:solidFill>
-          <a:ln/>
-        </p:spPr>
-        <p:txBody>
-          <a:bodyPr/>
-          <a:lstStyle/>
-          <a:p>
-            <a:endParaRPr lang="pt-BR" noProof="0" dirty="0"/>
-          </a:p>
-        </p:txBody>
-      </p:sp>
-      <p:sp>
-        <p:nvSpPr>
-          <p:cNvPr id="11" name="Text 9"/>
-          <p:cNvSpPr/>
-          <p:nvPr/>
-        </p:nvSpPr>
-        <p:spPr>
-          <a:xfrm>
-            <a:off x="2907792" y="1965960"/>
-            <a:ext cx="1975104" cy="457200"/>
-          </a:xfrm>
-          <a:prstGeom prst="rect">
-            <a:avLst/>
-          </a:prstGeom>
-          <a:noFill/>
-          <a:ln/>
-        </p:spPr>
-        <p:txBody>
-          <a:bodyPr wrap="square" lIns="0" tIns="0" rIns="0" bIns="0" rtlCol="0" anchor="ctr"/>
-          <a:lstStyle/>
-          <a:p>
-            <a:pPr marL="0" indent="0" algn="ctr">
-              <a:lnSpc>
-                <a:spcPct val="100000"/>
-              </a:lnSpc>
-              <a:buNone/>
-            </a:pPr>
-            <a:r>
-              <a:rPr lang="pt-BR" sz="1000" b="1" noProof="0" dirty="0">
-                <a:solidFill>
-                  <a:srgbClr val="1A1A1A"/>
-                </a:solidFill>
-              </a:rPr>
-              <a:t>passenger &gt; 0</a:t>
-            </a:r>
-            <a:endParaRPr lang="pt-BR" sz="1000" noProof="0" dirty="0"/>
-          </a:p>
-        </p:txBody>
-      </p:sp>
-      <p:sp>
-        <p:nvSpPr>
-          <p:cNvPr id="12" name="Text 10"/>
-          <p:cNvSpPr/>
-          <p:nvPr/>
-        </p:nvSpPr>
-        <p:spPr>
-          <a:xfrm>
-            <a:off x="2907792" y="2377440"/>
-            <a:ext cx="1975104" cy="274320"/>
-          </a:xfrm>
-          <a:prstGeom prst="rect">
-            <a:avLst/>
-          </a:prstGeom>
-          <a:noFill/>
-          <a:ln/>
-        </p:spPr>
-        <p:txBody>
-          <a:bodyPr wrap="square" lIns="0" tIns="0" rIns="0" bIns="0" rtlCol="0" anchor="ctr"/>
-          <a:lstStyle/>
-          <a:p>
-            <a:pPr marL="0" indent="0" algn="ctr">
-              <a:buNone/>
-            </a:pPr>
-            <a:r>
-              <a:rPr lang="pt-BR" sz="1100" b="1" noProof="0" dirty="0">
-                <a:solidFill>
-                  <a:srgbClr val="EA1D2C"/>
-                </a:solidFill>
-              </a:rPr>
-              <a:t>-273.481</a:t>
-            </a:r>
-            <a:endParaRPr lang="pt-BR" sz="1100" noProof="0" dirty="0"/>
-          </a:p>
-        </p:txBody>
-      </p:sp>
-      <p:sp>
-        <p:nvSpPr>
-          <p:cNvPr id="13" name="Shape 11"/>
-          <p:cNvSpPr/>
-          <p:nvPr/>
-        </p:nvSpPr>
-        <p:spPr>
-          <a:xfrm>
-            <a:off x="5084064" y="1874520"/>
-            <a:ext cx="2157984" cy="868680"/>
-          </a:xfrm>
-          <a:prstGeom prst="roundRect">
-            <a:avLst>
-              <a:gd name="adj" fmla="val 6316"/>
-            </a:avLst>
-          </a:prstGeom>
-          <a:solidFill>
-            <a:srgbClr val="F4F4F4"/>
-          </a:solidFill>
-          <a:ln/>
-        </p:spPr>
-        <p:txBody>
-          <a:bodyPr/>
-          <a:lstStyle/>
-          <a:p>
-            <a:endParaRPr lang="pt-BR" noProof="0" dirty="0"/>
-          </a:p>
-        </p:txBody>
-      </p:sp>
-      <p:sp>
-        <p:nvSpPr>
-          <p:cNvPr id="14" name="Text 12"/>
-          <p:cNvSpPr/>
-          <p:nvPr/>
-        </p:nvSpPr>
-        <p:spPr>
-          <a:xfrm>
-            <a:off x="5175504" y="1965960"/>
-            <a:ext cx="1975104" cy="457200"/>
-          </a:xfrm>
-          <a:prstGeom prst="rect">
-            <a:avLst/>
-          </a:prstGeom>
-          <a:noFill/>
-          <a:ln/>
-        </p:spPr>
-        <p:txBody>
-          <a:bodyPr wrap="square" lIns="0" tIns="0" rIns="0" bIns="0" rtlCol="0" anchor="ctr"/>
-          <a:lstStyle/>
-          <a:p>
-            <a:pPr marL="0" indent="0" algn="ctr">
-              <a:lnSpc>
-                <a:spcPct val="100000"/>
-              </a:lnSpc>
-              <a:buNone/>
-            </a:pPr>
-            <a:r>
-              <a:rPr lang="pt-BR" sz="1000" b="1" noProof="0" dirty="0">
-                <a:solidFill>
-                  <a:srgbClr val="1A1A1A"/>
-                </a:solidFill>
-              </a:rPr>
-              <a:t>total_amount &gt;= 0</a:t>
-            </a:r>
-            <a:endParaRPr lang="pt-BR" sz="1000" noProof="0" dirty="0"/>
-          </a:p>
-        </p:txBody>
-      </p:sp>
-      <p:sp>
-        <p:nvSpPr>
-          <p:cNvPr id="15" name="Text 13"/>
-          <p:cNvSpPr/>
-          <p:nvPr/>
-        </p:nvSpPr>
-        <p:spPr>
-          <a:xfrm>
-            <a:off x="5175504" y="2377440"/>
-            <a:ext cx="1975104" cy="274320"/>
-          </a:xfrm>
-          <a:prstGeom prst="rect">
-            <a:avLst/>
-          </a:prstGeom>
-          <a:noFill/>
-          <a:ln/>
-        </p:spPr>
-        <p:txBody>
-          <a:bodyPr wrap="square" lIns="0" tIns="0" rIns="0" bIns="0" rtlCol="0" anchor="ctr"/>
-          <a:lstStyle/>
-          <a:p>
-            <a:pPr marL="0" indent="0" algn="ctr">
-              <a:buNone/>
-            </a:pPr>
-            <a:r>
-              <a:rPr lang="pt-BR" sz="1100" b="1" noProof="0" dirty="0">
-                <a:solidFill>
-                  <a:srgbClr val="EA1D2C"/>
-                </a:solidFill>
-              </a:rPr>
-              <a:t>-141.407</a:t>
-            </a:r>
-            <a:endParaRPr lang="pt-BR" sz="1100" noProof="0" dirty="0"/>
-          </a:p>
-        </p:txBody>
-      </p:sp>
-      <p:sp>
-        <p:nvSpPr>
-          <p:cNvPr id="16" name="Shape 14"/>
-          <p:cNvSpPr/>
-          <p:nvPr/>
-        </p:nvSpPr>
-        <p:spPr>
-          <a:xfrm>
-            <a:off x="7351776" y="1874520"/>
-            <a:ext cx="2157984" cy="868680"/>
-          </a:xfrm>
-          <a:prstGeom prst="roundRect">
-            <a:avLst>
-              <a:gd name="adj" fmla="val 6316"/>
-            </a:avLst>
-          </a:prstGeom>
-          <a:solidFill>
-            <a:srgbClr val="F4F4F4"/>
-          </a:solidFill>
-          <a:ln/>
-        </p:spPr>
-        <p:txBody>
-          <a:bodyPr/>
-          <a:lstStyle/>
-          <a:p>
-            <a:endParaRPr lang="pt-BR" noProof="0" dirty="0"/>
-          </a:p>
-        </p:txBody>
-      </p:sp>
-      <p:sp>
-        <p:nvSpPr>
-          <p:cNvPr id="17" name="Text 15"/>
-          <p:cNvSpPr/>
-          <p:nvPr/>
-        </p:nvSpPr>
-        <p:spPr>
-          <a:xfrm>
-            <a:off x="7443216" y="1965960"/>
-            <a:ext cx="1975104" cy="457200"/>
-          </a:xfrm>
-          <a:prstGeom prst="rect">
-            <a:avLst/>
-          </a:prstGeom>
-          <a:noFill/>
-          <a:ln/>
-        </p:spPr>
-        <p:txBody>
-          <a:bodyPr wrap="square" lIns="0" tIns="0" rIns="0" bIns="0" rtlCol="0" anchor="ctr"/>
-          <a:lstStyle/>
-          <a:p>
-            <a:pPr marL="0" indent="0" algn="ctr">
-              <a:lnSpc>
-                <a:spcPct val="100000"/>
-              </a:lnSpc>
-              <a:buNone/>
-            </a:pPr>
-            <a:r>
-              <a:rPr lang="pt-BR" sz="1000" b="1" noProof="0" dirty="0">
-                <a:solidFill>
-                  <a:srgbClr val="1A1A1A"/>
-                </a:solidFill>
-              </a:rPr>
-              <a:t>dropoff &gt; pickup</a:t>
-            </a:r>
-            <a:endParaRPr lang="pt-BR" sz="1000" noProof="0" dirty="0"/>
-          </a:p>
-        </p:txBody>
-      </p:sp>
-      <p:sp>
-        <p:nvSpPr>
-          <p:cNvPr id="18" name="Text 16"/>
-          <p:cNvSpPr/>
-          <p:nvPr/>
-        </p:nvSpPr>
-        <p:spPr>
-          <a:xfrm>
-            <a:off x="7443216" y="2377440"/>
-            <a:ext cx="1975104" cy="274320"/>
-          </a:xfrm>
-          <a:prstGeom prst="rect">
-            <a:avLst/>
-          </a:prstGeom>
-          <a:noFill/>
-          <a:ln/>
-        </p:spPr>
-        <p:txBody>
-          <a:bodyPr wrap="square" lIns="0" tIns="0" rIns="0" bIns="0" rtlCol="0" anchor="ctr"/>
-          <a:lstStyle/>
-          <a:p>
-            <a:pPr marL="0" indent="0" algn="ctr">
-              <a:buNone/>
-            </a:pPr>
-            <a:r>
-              <a:rPr lang="pt-BR" sz="1100" b="1" noProof="0" dirty="0">
-                <a:solidFill>
-                  <a:srgbClr val="EA1D2C"/>
-                </a:solidFill>
-              </a:rPr>
-              <a:t>-6.181</a:t>
-            </a:r>
-            <a:endParaRPr lang="pt-BR" sz="1100" noProof="0" dirty="0"/>
-          </a:p>
-        </p:txBody>
-      </p:sp>
-      <p:sp>
-        <p:nvSpPr>
-          <p:cNvPr id="19" name="Shape 17"/>
-          <p:cNvSpPr/>
-          <p:nvPr/>
-        </p:nvSpPr>
-        <p:spPr>
-          <a:xfrm>
-            <a:off x="9619488" y="1874520"/>
-            <a:ext cx="2157984" cy="868680"/>
-          </a:xfrm>
-          <a:prstGeom prst="roundRect">
-            <a:avLst>
-              <a:gd name="adj" fmla="val 6316"/>
-            </a:avLst>
-          </a:prstGeom>
-          <a:solidFill>
-            <a:srgbClr val="F4F4F4"/>
-          </a:solidFill>
-          <a:ln/>
-        </p:spPr>
-        <p:txBody>
-          <a:bodyPr/>
-          <a:lstStyle/>
-          <a:p>
-            <a:endParaRPr lang="pt-BR" noProof="0" dirty="0"/>
-          </a:p>
-        </p:txBody>
-      </p:sp>
-      <p:sp>
-        <p:nvSpPr>
-          <p:cNvPr id="20" name="Text 18"/>
-          <p:cNvSpPr/>
-          <p:nvPr/>
-        </p:nvSpPr>
-        <p:spPr>
-          <a:xfrm>
-            <a:off x="9710928" y="1965960"/>
-            <a:ext cx="1975104" cy="457200"/>
-          </a:xfrm>
-          <a:prstGeom prst="rect">
-            <a:avLst/>
-          </a:prstGeom>
-          <a:noFill/>
-          <a:ln/>
-        </p:spPr>
-        <p:txBody>
-          <a:bodyPr wrap="square" lIns="0" tIns="0" rIns="0" bIns="0" rtlCol="0" anchor="ctr"/>
-          <a:lstStyle/>
-          <a:p>
-            <a:pPr marL="0" indent="0" algn="ctr">
-              <a:lnSpc>
-                <a:spcPct val="100000"/>
-              </a:lnSpc>
-              <a:buNone/>
-            </a:pPr>
-            <a:r>
-              <a:rPr lang="pt-BR" sz="1000" b="1" noProof="0" dirty="0">
-                <a:solidFill>
-                  <a:srgbClr val="1A1A1A"/>
-                </a:solidFill>
-              </a:rPr>
-              <a:t>janela jan-mai/2023</a:t>
-            </a:r>
-            <a:endParaRPr lang="pt-BR" sz="1000" noProof="0" dirty="0"/>
-          </a:p>
-        </p:txBody>
-      </p:sp>
-      <p:sp>
-        <p:nvSpPr>
-          <p:cNvPr id="21" name="Text 19"/>
-          <p:cNvSpPr/>
-          <p:nvPr/>
-        </p:nvSpPr>
-        <p:spPr>
-          <a:xfrm>
-            <a:off x="9710928" y="2377440"/>
-            <a:ext cx="1975104" cy="274320"/>
-          </a:xfrm>
-          <a:prstGeom prst="rect">
-            <a:avLst/>
-          </a:prstGeom>
-          <a:noFill/>
-          <a:ln/>
-        </p:spPr>
-        <p:txBody>
-          <a:bodyPr wrap="square" lIns="0" tIns="0" rIns="0" bIns="0" rtlCol="0" anchor="ctr"/>
-          <a:lstStyle/>
-          <a:p>
-            <a:pPr marL="0" indent="0" algn="ctr">
-              <a:buNone/>
-            </a:pPr>
-            <a:r>
-              <a:rPr lang="pt-BR" sz="1100" b="1" noProof="0" dirty="0">
-                <a:solidFill>
-                  <a:srgbClr val="EA1D2C"/>
-                </a:solidFill>
-              </a:rPr>
-              <a:t>-104</a:t>
-            </a:r>
-            <a:endParaRPr lang="pt-BR" sz="1100" noProof="0" dirty="0"/>
-          </a:p>
-        </p:txBody>
-      </p:sp>
-      <p:sp>
-        <p:nvSpPr>
-          <p:cNvPr id="22" name="Shape 20"/>
-          <p:cNvSpPr/>
-          <p:nvPr/>
-        </p:nvSpPr>
-        <p:spPr>
-          <a:xfrm>
-            <a:off x="548640" y="2971800"/>
-            <a:ext cx="5394960" cy="1371600"/>
-          </a:xfrm>
-          <a:prstGeom prst="roundRect">
-            <a:avLst>
-              <a:gd name="adj" fmla="val 5333"/>
-            </a:avLst>
-          </a:prstGeom>
-          <a:solidFill>
-            <a:srgbClr val="1A1A1A"/>
-          </a:solidFill>
-          <a:ln/>
-        </p:spPr>
-        <p:txBody>
-          <a:bodyPr/>
-          <a:lstStyle/>
-          <a:p>
-            <a:endParaRPr lang="pt-BR" noProof="0" dirty="0"/>
-          </a:p>
-        </p:txBody>
-      </p:sp>
-      <p:sp>
-        <p:nvSpPr>
-          <p:cNvPr id="23" name="Text 21"/>
-          <p:cNvSpPr/>
-          <p:nvPr/>
-        </p:nvSpPr>
-        <p:spPr>
-          <a:xfrm>
-            <a:off x="777240" y="3108960"/>
-            <a:ext cx="4572000" cy="274320"/>
+          <p:cNvPr id="9" name="Text 6"/>
+          <p:cNvSpPr/>
+          <p:nvPr/>
+        </p:nvSpPr>
+        <p:spPr>
+          <a:xfrm>
+            <a:off x="685800" y="5321808"/>
+            <a:ext cx="10789920" cy="274320"/>
           </a:xfrm>
           <a:prstGeom prst="rect">
             <a:avLst/>
@@ -10714,12 +12227,12 @@
               <a:buNone/>
             </a:pPr>
             <a:r>
-              <a:rPr lang="pt-BR" sz="1200" b="1" kern="0" spc="100" noProof="0" dirty="0">
-                <a:solidFill>
-                  <a:srgbClr val="EA1D2C"/>
-                </a:solidFill>
-              </a:rPr>
-              <a:t>RESULTADO</a:t>
+              <a:rPr lang="pt-BR" sz="1200" b="1" noProof="0" dirty="0">
+                <a:solidFill>
+                  <a:srgbClr val="1B7A3E"/>
+                </a:solidFill>
+              </a:rPr>
+              <a:t>Por que isso importa</a:t>
             </a:r>
             <a:endParaRPr lang="pt-BR" sz="1200" noProof="0" dirty="0"/>
           </a:p>
@@ -10727,146 +12240,53 @@
       </p:sp>
       <p:sp>
         <p:nvSpPr>
-          <p:cNvPr id="24" name="Text 22"/>
-          <p:cNvSpPr/>
-          <p:nvPr/>
-        </p:nvSpPr>
-        <p:spPr>
-          <a:xfrm>
-            <a:off x="777240" y="3429000"/>
-            <a:ext cx="4937760" cy="822960"/>
-          </a:xfrm>
-          <a:prstGeom prst="rect">
-            <a:avLst/>
-          </a:prstGeom>
-          <a:noFill/>
-          <a:ln/>
-        </p:spPr>
-        <p:txBody>
-          <a:bodyPr wrap="square" lIns="0" tIns="0" rIns="0" bIns="0" rtlCol="0" anchor="ctr"/>
-          <a:lstStyle/>
-          <a:p>
-            <a:pPr marL="0" indent="0">
+          <p:cNvPr id="10" name="Text 7"/>
+          <p:cNvSpPr/>
+          <p:nvPr/>
+        </p:nvSpPr>
+        <p:spPr>
+          <a:xfrm>
+            <a:off x="685800" y="5623560"/>
+            <a:ext cx="10789920" cy="548640"/>
+          </a:xfrm>
+          <a:prstGeom prst="rect">
+            <a:avLst/>
+          </a:prstGeom>
+          <a:noFill/>
+          <a:ln/>
+        </p:spPr>
+        <p:txBody>
+          <a:bodyPr wrap="square" lIns="0" tIns="0" rIns="0" bIns="0" rtlCol="0" anchor="ctr"/>
+          <a:lstStyle/>
+          <a:p>
+            <a:pPr>
               <a:lnSpc>
                 <a:spcPct val="120000"/>
               </a:lnSpc>
-              <a:buNone/>
-            </a:pPr>
-            <a:r>
-              <a:rPr lang="pt-BR" sz="1400" noProof="0" dirty="0">
-                <a:solidFill>
-                  <a:srgbClr val="FFFFFF"/>
-                </a:solidFill>
-                <a:latin typeface="Consolas" pitchFamily="34" charset="0"/>
-                <a:ea typeface="Consolas" pitchFamily="34" charset="-122"/>
-                <a:cs typeface="Consolas" pitchFamily="34" charset="-120"/>
-              </a:rPr>
-              <a:t>Bronze:  16.186.386</a:t>
-            </a:r>
-            <a:endParaRPr lang="pt-BR" sz="1400" noProof="0" dirty="0"/>
-          </a:p>
-          <a:p>
-            <a:pPr marL="0" indent="0">
-              <a:lnSpc>
-                <a:spcPct val="120000"/>
-              </a:lnSpc>
-              <a:buNone/>
-            </a:pPr>
-            <a:r>
-              <a:rPr lang="pt-BR" sz="1400" noProof="0" dirty="0">
-                <a:solidFill>
-                  <a:srgbClr val="FFFFFF"/>
-                </a:solidFill>
-                <a:latin typeface="Consolas" pitchFamily="34" charset="0"/>
-                <a:ea typeface="Consolas" pitchFamily="34" charset="-122"/>
-                <a:cs typeface="Consolas" pitchFamily="34" charset="-120"/>
-              </a:rPr>
-              <a:t>Silver:   15.337.137</a:t>
-            </a:r>
-            <a:endParaRPr lang="pt-BR" sz="1400" noProof="0" dirty="0"/>
-          </a:p>
-          <a:p>
-            <a:pPr marL="0" indent="0">
-              <a:lnSpc>
-                <a:spcPct val="120000"/>
-              </a:lnSpc>
-              <a:buNone/>
-            </a:pPr>
-            <a:r>
-              <a:rPr lang="pt-BR" sz="1400" noProof="0" dirty="0">
-                <a:solidFill>
-                  <a:srgbClr val="FFFFFF"/>
-                </a:solidFill>
-                <a:latin typeface="Consolas" pitchFamily="34" charset="0"/>
-                <a:ea typeface="Consolas" pitchFamily="34" charset="-122"/>
-                <a:cs typeface="Consolas" pitchFamily="34" charset="-120"/>
-              </a:rPr>
-              <a:t>Aproveitamento: 94,76%</a:t>
-            </a:r>
-            <a:endParaRPr lang="pt-BR" sz="1400" noProof="0" dirty="0"/>
-          </a:p>
-        </p:txBody>
-      </p:sp>
-      <p:sp>
-        <p:nvSpPr>
-          <p:cNvPr id="25" name="Shape 23"/>
-          <p:cNvSpPr/>
-          <p:nvPr/>
-        </p:nvSpPr>
-        <p:spPr>
-          <a:xfrm>
-            <a:off x="6217920" y="2971800"/>
-            <a:ext cx="5394960" cy="1371600"/>
-          </a:xfrm>
-          <a:prstGeom prst="roundRect">
-            <a:avLst>
-              <a:gd name="adj" fmla="val 5333"/>
-            </a:avLst>
-          </a:prstGeom>
-          <a:solidFill>
-            <a:srgbClr val="E8F5ED"/>
-          </a:solidFill>
-          <a:ln/>
-        </p:spPr>
-        <p:txBody>
-          <a:bodyPr/>
-          <a:lstStyle/>
-          <a:p>
-            <a:endParaRPr lang="pt-BR" noProof="0" dirty="0"/>
-          </a:p>
-        </p:txBody>
-      </p:sp>
-      <p:sp>
-        <p:nvSpPr>
-          <p:cNvPr id="26" name="Text 24"/>
-          <p:cNvSpPr/>
-          <p:nvPr/>
-        </p:nvSpPr>
-        <p:spPr>
-          <a:xfrm>
-            <a:off x="6446520" y="3108960"/>
-            <a:ext cx="4572000" cy="274320"/>
-          </a:xfrm>
-          <a:prstGeom prst="rect">
-            <a:avLst/>
-          </a:prstGeom>
-          <a:noFill/>
-          <a:ln/>
-        </p:spPr>
-        <p:txBody>
-          <a:bodyPr wrap="square" lIns="0" tIns="0" rIns="0" bIns="0" rtlCol="0" anchor="ctr"/>
-          <a:lstStyle/>
-          <a:p>
-            <a:pPr marL="0" indent="0">
-              <a:buNone/>
-            </a:pPr>
-            <a:r>
-              <a:rPr lang="pt-BR" sz="1200" b="1" kern="0" spc="100" noProof="0" dirty="0">
-                <a:solidFill>
-                  <a:srgbClr val="1B7A3E"/>
-                </a:solidFill>
-              </a:rPr>
-              <a:t>QUALITY GATE</a:t>
+            </a:pPr>
+            <a:r>
+              <a:rPr lang="pt-BR" sz="1200" noProof="0" dirty="0">
+                <a:solidFill>
+                  <a:srgbClr val="1A1A1A"/>
+                </a:solidFill>
+              </a:rPr>
+              <a:t>Cada query e cada regra de limpeza tem origem em uma evidência exploratória, não apenas no enunciado</a:t>
+            </a:r>
+            <a:r>
+              <a:rPr lang="pt-BR" sz="1200" dirty="0">
+                <a:solidFill>
+                  <a:srgbClr val="1A1A1A"/>
+                </a:solidFill>
+              </a:rPr>
+              <a:t>. Resposta é visual e fundamentada de 'como </a:t>
+            </a:r>
+            <a:r>
+              <a:rPr lang="pt-BR" sz="1200" noProof="0" dirty="0">
+                <a:solidFill>
+                  <a:srgbClr val="1A1A1A"/>
+                </a:solidFill>
+              </a:rPr>
+              <a:t>cheguei nessas queries'</a:t>
             </a:r>
             <a:endParaRPr lang="pt-BR" sz="1200" noProof="0" dirty="0"/>
           </a:p>
@@ -10874,223 +12294,7 @@
       </p:sp>
       <p:sp>
         <p:nvSpPr>
-          <p:cNvPr id="27" name="Text 25"/>
-          <p:cNvSpPr/>
-          <p:nvPr/>
-        </p:nvSpPr>
-        <p:spPr>
-          <a:xfrm>
-            <a:off x="6446520" y="3474720"/>
-            <a:ext cx="4937760" cy="548640"/>
-          </a:xfrm>
-          <a:prstGeom prst="rect">
-            <a:avLst/>
-          </a:prstGeom>
-          <a:noFill/>
-          <a:ln/>
-        </p:spPr>
-        <p:txBody>
-          <a:bodyPr wrap="square" lIns="0" tIns="0" rIns="0" bIns="0" rtlCol="0" anchor="ctr"/>
-          <a:lstStyle/>
-          <a:p>
-            <a:pPr marL="0" indent="0">
-              <a:buNone/>
-            </a:pPr>
-            <a:r>
-              <a:rPr lang="pt-BR" sz="2800" b="1" noProof="0" dirty="0">
-                <a:solidFill>
-                  <a:srgbClr val="1B7A3E"/>
-                </a:solidFill>
-              </a:rPr>
-              <a:t>0</a:t>
-            </a:r>
-            <a:r>
-              <a:rPr lang="pt-BR" sz="1200" noProof="0" dirty="0">
-                <a:solidFill>
-                  <a:srgbClr val="1A1A1A"/>
-                </a:solidFill>
-              </a:rPr>
-              <a:t>  negativos    </a:t>
-            </a:r>
-            <a:r>
-              <a:rPr lang="pt-BR" sz="2800" b="1" noProof="0" dirty="0">
-                <a:solidFill>
-                  <a:srgbClr val="1B7A3E"/>
-                </a:solidFill>
-              </a:rPr>
-              <a:t>0</a:t>
-            </a:r>
-            <a:r>
-              <a:rPr lang="pt-BR" sz="1200" noProof="0" dirty="0">
-                <a:solidFill>
-                  <a:srgbClr val="1A1A1A"/>
-                </a:solidFill>
-              </a:rPr>
-              <a:t>  pax&lt;=0    </a:t>
-            </a:r>
-            <a:r>
-              <a:rPr lang="pt-BR" sz="2800" b="1" noProof="0" dirty="0">
-                <a:solidFill>
-                  <a:srgbClr val="1B7A3E"/>
-                </a:solidFill>
-              </a:rPr>
-              <a:t>0</a:t>
-            </a:r>
-            <a:r>
-              <a:rPr lang="pt-BR" sz="1200" noProof="0" dirty="0">
-                <a:solidFill>
-                  <a:srgbClr val="1A1A1A"/>
-                </a:solidFill>
-              </a:rPr>
-              <a:t>  tempo</a:t>
-            </a:r>
-            <a:endParaRPr lang="pt-BR" sz="2800" noProof="0" dirty="0"/>
-          </a:p>
-        </p:txBody>
-      </p:sp>
-      <p:sp>
-        <p:nvSpPr>
-          <p:cNvPr id="28" name="Text 26"/>
-          <p:cNvSpPr/>
-          <p:nvPr/>
-        </p:nvSpPr>
-        <p:spPr>
-          <a:xfrm>
-            <a:off x="6446520" y="4023360"/>
-            <a:ext cx="4937760" cy="274320"/>
-          </a:xfrm>
-          <a:prstGeom prst="rect">
-            <a:avLst/>
-          </a:prstGeom>
-          <a:noFill/>
-          <a:ln/>
-        </p:spPr>
-        <p:txBody>
-          <a:bodyPr wrap="square" lIns="0" tIns="0" rIns="0" bIns="0" rtlCol="0" anchor="ctr"/>
-          <a:lstStyle/>
-          <a:p>
-            <a:pPr marL="0" indent="0">
-              <a:buNone/>
-            </a:pPr>
-            <a:r>
-              <a:rPr lang="pt-BR" sz="1100" i="1" noProof="0" dirty="0">
-                <a:solidFill>
-                  <a:srgbClr val="1A1A1A"/>
-                </a:solidFill>
-              </a:rPr>
-              <a:t>Zero violações após a limpeza</a:t>
-            </a:r>
-            <a:endParaRPr lang="pt-BR" sz="1100" noProof="0" dirty="0"/>
-          </a:p>
-        </p:txBody>
-      </p:sp>
-      <p:sp>
-        <p:nvSpPr>
-          <p:cNvPr id="29" name="Shape 27"/>
-          <p:cNvSpPr/>
-          <p:nvPr/>
-        </p:nvSpPr>
-        <p:spPr>
-          <a:xfrm>
-            <a:off x="548640" y="4526280"/>
-            <a:ext cx="11064240" cy="1234440"/>
-          </a:xfrm>
-          <a:prstGeom prst="roundRect">
-            <a:avLst>
-              <a:gd name="adj" fmla="val 5926"/>
-            </a:avLst>
-          </a:prstGeom>
-          <a:solidFill>
-            <a:srgbClr val="FDECEA"/>
-          </a:solidFill>
-          <a:ln/>
-        </p:spPr>
-        <p:txBody>
-          <a:bodyPr/>
-          <a:lstStyle/>
-          <a:p>
-            <a:endParaRPr lang="pt-BR" noProof="0" dirty="0"/>
-          </a:p>
-        </p:txBody>
-      </p:sp>
-      <p:sp>
-        <p:nvSpPr>
-          <p:cNvPr id="30" name="Text 28"/>
-          <p:cNvSpPr/>
-          <p:nvPr/>
-        </p:nvSpPr>
-        <p:spPr>
-          <a:xfrm>
-            <a:off x="777240" y="4663440"/>
-            <a:ext cx="10607040" cy="274320"/>
-          </a:xfrm>
-          <a:prstGeom prst="rect">
-            <a:avLst/>
-          </a:prstGeom>
-          <a:noFill/>
-          <a:ln/>
-        </p:spPr>
-        <p:txBody>
-          <a:bodyPr wrap="square" lIns="0" tIns="0" rIns="0" bIns="0" rtlCol="0" anchor="ctr"/>
-          <a:lstStyle/>
-          <a:p>
-            <a:pPr marL="0" indent="0">
-              <a:buNone/>
-            </a:pPr>
-            <a:r>
-              <a:rPr lang="pt-BR" sz="1200" b="1" kern="0" spc="100" noProof="0" dirty="0">
-                <a:solidFill>
-                  <a:srgbClr val="EA1D2C"/>
-                </a:solidFill>
-              </a:rPr>
-              <a:t>QUALITY LOG - o diferencial de governança</a:t>
-            </a:r>
-            <a:endParaRPr lang="pt-BR" sz="1200" noProof="0" dirty="0"/>
-          </a:p>
-        </p:txBody>
-      </p:sp>
-      <p:sp>
-        <p:nvSpPr>
-          <p:cNvPr id="31" name="Text 29"/>
-          <p:cNvSpPr/>
-          <p:nvPr/>
-        </p:nvSpPr>
-        <p:spPr>
-          <a:xfrm>
-            <a:off x="777240" y="4983480"/>
-            <a:ext cx="10607040" cy="731520"/>
-          </a:xfrm>
-          <a:prstGeom prst="rect">
-            <a:avLst/>
-          </a:prstGeom>
-          <a:noFill/>
-          <a:ln/>
-        </p:spPr>
-        <p:txBody>
-          <a:bodyPr wrap="square" lIns="0" tIns="0" rIns="0" bIns="0" rtlCol="0" anchor="ctr"/>
-          <a:lstStyle/>
-          <a:p>
-            <a:pPr marL="0" indent="0">
-              <a:lnSpc>
-                <a:spcPct val="120000"/>
-              </a:lnSpc>
-              <a:buNone/>
-            </a:pPr>
-            <a:r>
-              <a:rPr lang="pt-BR" sz="1300" noProof="0" dirty="0">
-                <a:solidFill>
-                  <a:srgbClr val="1A1A1A"/>
-                </a:solidFill>
-              </a:rPr>
-              <a:t>Cada execução é persistida numa tabela Delta. Duas cargas registradas (26 e 27/06), mesmo resultado: prova que o pipeline e reprodutível e a qualidade e auditável ao longo do tempo. Não é um teste pontual, é um histórico.</a:t>
-            </a:r>
-            <a:endParaRPr lang="pt-BR" sz="1300" noProof="0" dirty="0"/>
-          </a:p>
-        </p:txBody>
-      </p:sp>
-      <p:sp>
-        <p:nvSpPr>
-          <p:cNvPr id="32" name="Text 30"/>
+          <p:cNvPr id="11" name="Text 8"/>
           <p:cNvSpPr/>
           <p:nvPr/>
         </p:nvSpPr>
@@ -11126,7 +12330,7 @@
       </p:sp>
       <p:sp>
         <p:nvSpPr>
-          <p:cNvPr id="33" name="Text 31"/>
+          <p:cNvPr id="12" name="Text 9"/>
           <p:cNvSpPr/>
           <p:nvPr/>
         </p:nvSpPr>
@@ -11223,7 +12427,7 @@
                   <a:srgbClr val="EA1D2C"/>
                 </a:solidFill>
               </a:rPr>
-              <a:t>ETAPA 03</a:t>
+              <a:t>ETAPA 02 - QUALIDADE DE DADOS</a:t>
             </a:r>
             <a:endParaRPr lang="pt-BR" sz="1100" noProof="0" dirty="0"/>
           </a:p>
@@ -11259,7 +12463,7 @@
                   <a:srgbClr val="1A1A1A"/>
                 </a:solidFill>
               </a:rPr>
-              <a:t>Gold: consumo e time travel</a:t>
+              <a:t>Silver: limpeza, quality gate e log</a:t>
             </a:r>
             <a:endParaRPr lang="pt-BR" sz="2500" noProof="0" dirty="0"/>
           </a:p>
@@ -11324,7 +12528,7 @@
                   <a:srgbClr val="EA1D2C"/>
                 </a:solidFill>
               </a:rPr>
-              <a:t>ARQUIVO 03   </a:t>
+              <a:t>ARQUIVO 02   </a:t>
             </a:r>
             <a:r>
               <a:rPr lang="pt-BR" sz="1000" noProof="0" dirty="0">
@@ -11332,7 +12536,7 @@
                   <a:srgbClr val="FFFFFF"/>
                 </a:solidFill>
               </a:rPr>
-              <a:t>03_gold</a:t>
+              <a:t>02_silver</a:t>
             </a:r>
             <a:endParaRPr lang="pt-BR" sz="1000" noProof="0" dirty="0"/>
           </a:p>
@@ -11340,18 +12544,54 @@
       </p:sp>
       <p:sp>
         <p:nvSpPr>
-          <p:cNvPr id="6" name="Shape 4"/>
-          <p:cNvSpPr/>
-          <p:nvPr/>
-        </p:nvSpPr>
-        <p:spPr>
-          <a:xfrm>
-            <a:off x="548640" y="1691640"/>
-            <a:ext cx="5394960" cy="2194560"/>
+          <p:cNvPr id="6" name="Text 4"/>
+          <p:cNvSpPr/>
+          <p:nvPr/>
+        </p:nvSpPr>
+        <p:spPr>
+          <a:xfrm>
+            <a:off x="457200" y="1463040"/>
+            <a:ext cx="10972800" cy="320040"/>
+          </a:xfrm>
+          <a:prstGeom prst="rect">
+            <a:avLst/>
+          </a:prstGeom>
+          <a:noFill/>
+          <a:ln/>
+        </p:spPr>
+        <p:txBody>
+          <a:bodyPr wrap="square" lIns="0" tIns="0" rIns="0" bIns="0" rtlCol="0" anchor="ctr"/>
+          <a:lstStyle/>
+          <a:p>
+            <a:pPr marL="0" indent="0">
+              <a:buNone/>
+            </a:pPr>
+            <a:r>
+              <a:rPr lang="pt-BR" sz="1300" b="1" noProof="0" dirty="0">
+                <a:solidFill>
+                  <a:srgbClr val="1A1A1A"/>
+                </a:solidFill>
+              </a:rPr>
+              <a:t>Regras aplicadas (cada uma justificada pelo profiling):</a:t>
+            </a:r>
+            <a:endParaRPr lang="pt-BR" sz="1300" noProof="0" dirty="0"/>
+          </a:p>
+        </p:txBody>
+      </p:sp>
+      <p:sp>
+        <p:nvSpPr>
+          <p:cNvPr id="7" name="Shape 5"/>
+          <p:cNvSpPr/>
+          <p:nvPr/>
+        </p:nvSpPr>
+        <p:spPr>
+          <a:xfrm>
+            <a:off x="548640" y="1874520"/>
+            <a:ext cx="2157984" cy="868680"/>
           </a:xfrm>
           <a:prstGeom prst="roundRect">
             <a:avLst>
-              <a:gd name="adj" fmla="val 3333"/>
+              <a:gd name="adj" fmla="val 6316"/>
             </a:avLst>
           </a:prstGeom>
           <a:solidFill>
@@ -11369,163 +12609,509 @@
       </p:sp>
       <p:sp>
         <p:nvSpPr>
-          <p:cNvPr id="7" name="Text 5"/>
-          <p:cNvSpPr/>
-          <p:nvPr/>
-        </p:nvSpPr>
-        <p:spPr>
-          <a:xfrm>
-            <a:off x="777240" y="1828800"/>
-            <a:ext cx="4572000" cy="320040"/>
-          </a:xfrm>
-          <a:prstGeom prst="rect">
-            <a:avLst/>
-          </a:prstGeom>
-          <a:noFill/>
-          <a:ln/>
-        </p:spPr>
-        <p:txBody>
-          <a:bodyPr wrap="square" lIns="0" tIns="0" rIns="0" bIns="0" rtlCol="0" anchor="ctr"/>
-          <a:lstStyle/>
-          <a:p>
-            <a:pPr marL="0" indent="0">
-              <a:buNone/>
-            </a:pPr>
-            <a:r>
-              <a:rPr lang="pt-BR" sz="1300" b="1" kern="0" spc="100" noProof="0" dirty="0">
+          <p:cNvPr id="8" name="Text 6"/>
+          <p:cNvSpPr/>
+          <p:nvPr/>
+        </p:nvSpPr>
+        <p:spPr>
+          <a:xfrm>
+            <a:off x="640080" y="1965960"/>
+            <a:ext cx="1975104" cy="457200"/>
+          </a:xfrm>
+          <a:prstGeom prst="rect">
+            <a:avLst/>
+          </a:prstGeom>
+          <a:noFill/>
+          <a:ln/>
+        </p:spPr>
+        <p:txBody>
+          <a:bodyPr wrap="square" lIns="0" tIns="0" rIns="0" bIns="0" rtlCol="0" anchor="ctr"/>
+          <a:lstStyle/>
+          <a:p>
+            <a:pPr marL="0" indent="0" algn="ctr">
+              <a:lnSpc>
+                <a:spcPct val="100000"/>
+              </a:lnSpc>
+              <a:buNone/>
+            </a:pPr>
+            <a:r>
+              <a:rPr lang="pt-BR" sz="1000" b="1" noProof="0" dirty="0">
+                <a:solidFill>
+                  <a:srgbClr val="1A1A1A"/>
+                </a:solidFill>
+              </a:rPr>
+              <a:t>passenger IS NOT NULL</a:t>
+            </a:r>
+            <a:endParaRPr lang="pt-BR" sz="1000" noProof="0" dirty="0"/>
+          </a:p>
+        </p:txBody>
+      </p:sp>
+      <p:sp>
+        <p:nvSpPr>
+          <p:cNvPr id="9" name="Text 7"/>
+          <p:cNvSpPr/>
+          <p:nvPr/>
+        </p:nvSpPr>
+        <p:spPr>
+          <a:xfrm>
+            <a:off x="640080" y="2377440"/>
+            <a:ext cx="1975104" cy="274320"/>
+          </a:xfrm>
+          <a:prstGeom prst="rect">
+            <a:avLst/>
+          </a:prstGeom>
+          <a:noFill/>
+          <a:ln/>
+        </p:spPr>
+        <p:txBody>
+          <a:bodyPr wrap="square" lIns="0" tIns="0" rIns="0" bIns="0" rtlCol="0" anchor="ctr"/>
+          <a:lstStyle/>
+          <a:p>
+            <a:pPr marL="0" indent="0" algn="ctr">
+              <a:buNone/>
+            </a:pPr>
+            <a:r>
+              <a:rPr lang="pt-BR" sz="1100" b="1" noProof="0" dirty="0">
                 <a:solidFill>
                   <a:srgbClr val="EA1D2C"/>
                 </a:solidFill>
               </a:rPr>
-              <a:t>TABELAS DE CONSUMO</a:t>
-            </a:r>
-            <a:endParaRPr lang="pt-BR" sz="1300" noProof="0" dirty="0"/>
-          </a:p>
-        </p:txBody>
-      </p:sp>
-      <p:sp>
-        <p:nvSpPr>
-          <p:cNvPr id="8" name="Text 6"/>
-          <p:cNvSpPr/>
-          <p:nvPr/>
-        </p:nvSpPr>
-        <p:spPr>
-          <a:xfrm>
-            <a:off x="868680" y="2194560"/>
-            <a:ext cx="4937760" cy="1554480"/>
-          </a:xfrm>
-          <a:prstGeom prst="rect">
-            <a:avLst/>
-          </a:prstGeom>
-          <a:noFill/>
-          <a:ln/>
-        </p:spPr>
-        <p:txBody>
-          <a:bodyPr wrap="square" lIns="0" tIns="0" rIns="0" bIns="0" rtlCol="0" anchor="ctr"/>
-          <a:lstStyle/>
-          <a:p>
-            <a:pPr marL="342900" indent="-342900">
-              <a:lnSpc>
-                <a:spcPct val="125000"/>
-              </a:lnSpc>
-              <a:buSzPct val="100000"/>
-              <a:buChar char="•"/>
-            </a:pPr>
-            <a:r>
-              <a:rPr lang="pt-BR" sz="1300" b="1" noProof="0" dirty="0">
-                <a:solidFill>
-                  <a:srgbClr val="1A1A1A"/>
-                </a:solidFill>
-              </a:rPr>
-              <a:t>gold.receita_mensal</a:t>
-            </a:r>
-            <a:endParaRPr lang="pt-BR" sz="1300" noProof="0" dirty="0"/>
-          </a:p>
-          <a:p>
-            <a:pPr marL="0" indent="0">
-              <a:lnSpc>
-                <a:spcPct val="125000"/>
-              </a:lnSpc>
-              <a:buNone/>
-            </a:pPr>
-            <a:r>
-              <a:rPr lang="pt-BR" sz="1100" noProof="0" dirty="0">
-                <a:solidFill>
-                  <a:srgbClr val="5A5A5A"/>
-                </a:solidFill>
-              </a:rPr>
-              <a:t>receita total e ticket médio por mês</a:t>
-            </a:r>
-            <a:endParaRPr lang="pt-BR" sz="1300" noProof="0" dirty="0"/>
-          </a:p>
-          <a:p>
-            <a:pPr marL="342900" indent="-342900">
-              <a:lnSpc>
-                <a:spcPct val="125000"/>
-              </a:lnSpc>
-              <a:buSzPct val="100000"/>
-              <a:buChar char="•"/>
-            </a:pPr>
-            <a:r>
-              <a:rPr lang="pt-BR" sz="1300" b="1" noProof="0" dirty="0">
-                <a:solidFill>
-                  <a:srgbClr val="1A1A1A"/>
-                </a:solidFill>
-              </a:rPr>
-              <a:t>gold.passageiros_por_hora</a:t>
-            </a:r>
-            <a:endParaRPr lang="pt-BR" sz="1300" noProof="0" dirty="0"/>
-          </a:p>
-          <a:p>
-            <a:pPr marL="0" indent="0">
-              <a:lnSpc>
-                <a:spcPct val="125000"/>
-              </a:lnSpc>
-              <a:buNone/>
-            </a:pPr>
-            <a:r>
-              <a:rPr lang="pt-BR" sz="1100" noProof="0" dirty="0">
-                <a:solidFill>
-                  <a:srgbClr val="5A5A5A"/>
-                </a:solidFill>
-              </a:rPr>
-              <a:t>media de passageiros por hora do dia</a:t>
-            </a:r>
-            <a:endParaRPr lang="pt-BR" sz="1300" noProof="0" dirty="0"/>
-          </a:p>
-          <a:p>
-            <a:pPr marL="0" indent="0">
-              <a:lnSpc>
-                <a:spcPct val="125000"/>
-              </a:lnSpc>
-              <a:buNone/>
-            </a:pPr>
-            <a:r>
-              <a:rPr lang="pt-BR" sz="1100" i="1" noProof="0" dirty="0">
-                <a:solidFill>
-                  <a:srgbClr val="1A1A1A"/>
-                </a:solidFill>
-              </a:rPr>
-              <a:t>O usuário consome via SQL, sem conhecer as camadas anteriores.</a:t>
-            </a:r>
-            <a:endParaRPr lang="pt-BR" sz="1300" noProof="0" dirty="0"/>
-          </a:p>
-        </p:txBody>
-      </p:sp>
-      <p:sp>
-        <p:nvSpPr>
-          <p:cNvPr id="9" name="Shape 7"/>
-          <p:cNvSpPr/>
-          <p:nvPr/>
-        </p:nvSpPr>
-        <p:spPr>
-          <a:xfrm>
-            <a:off x="6217920" y="1691640"/>
-            <a:ext cx="5394960" cy="2194560"/>
+              <a:t>-428.665</a:t>
+            </a:r>
+            <a:endParaRPr lang="pt-BR" sz="1100" noProof="0" dirty="0"/>
+          </a:p>
+        </p:txBody>
+      </p:sp>
+      <p:sp>
+        <p:nvSpPr>
+          <p:cNvPr id="10" name="Shape 8"/>
+          <p:cNvSpPr/>
+          <p:nvPr/>
+        </p:nvSpPr>
+        <p:spPr>
+          <a:xfrm>
+            <a:off x="2816352" y="1874520"/>
+            <a:ext cx="2157984" cy="868680"/>
           </a:xfrm>
           <a:prstGeom prst="roundRect">
             <a:avLst>
-              <a:gd name="adj" fmla="val 3333"/>
+              <a:gd name="adj" fmla="val 6316"/>
+            </a:avLst>
+          </a:prstGeom>
+          <a:solidFill>
+            <a:srgbClr val="F4F4F4"/>
+          </a:solidFill>
+          <a:ln/>
+        </p:spPr>
+        <p:txBody>
+          <a:bodyPr/>
+          <a:lstStyle/>
+          <a:p>
+            <a:endParaRPr lang="pt-BR" noProof="0" dirty="0"/>
+          </a:p>
+        </p:txBody>
+      </p:sp>
+      <p:sp>
+        <p:nvSpPr>
+          <p:cNvPr id="11" name="Text 9"/>
+          <p:cNvSpPr/>
+          <p:nvPr/>
+        </p:nvSpPr>
+        <p:spPr>
+          <a:xfrm>
+            <a:off x="2907792" y="1965960"/>
+            <a:ext cx="1975104" cy="457200"/>
+          </a:xfrm>
+          <a:prstGeom prst="rect">
+            <a:avLst/>
+          </a:prstGeom>
+          <a:noFill/>
+          <a:ln/>
+        </p:spPr>
+        <p:txBody>
+          <a:bodyPr wrap="square" lIns="0" tIns="0" rIns="0" bIns="0" rtlCol="0" anchor="ctr"/>
+          <a:lstStyle/>
+          <a:p>
+            <a:pPr marL="0" indent="0" algn="ctr">
+              <a:lnSpc>
+                <a:spcPct val="100000"/>
+              </a:lnSpc>
+              <a:buNone/>
+            </a:pPr>
+            <a:r>
+              <a:rPr lang="pt-BR" sz="1000" b="1" noProof="0" dirty="0">
+                <a:solidFill>
+                  <a:srgbClr val="1A1A1A"/>
+                </a:solidFill>
+              </a:rPr>
+              <a:t>passenger &gt; 0</a:t>
+            </a:r>
+            <a:endParaRPr lang="pt-BR" sz="1000" noProof="0" dirty="0"/>
+          </a:p>
+        </p:txBody>
+      </p:sp>
+      <p:sp>
+        <p:nvSpPr>
+          <p:cNvPr id="12" name="Text 10"/>
+          <p:cNvSpPr/>
+          <p:nvPr/>
+        </p:nvSpPr>
+        <p:spPr>
+          <a:xfrm>
+            <a:off x="2907792" y="2377440"/>
+            <a:ext cx="1975104" cy="274320"/>
+          </a:xfrm>
+          <a:prstGeom prst="rect">
+            <a:avLst/>
+          </a:prstGeom>
+          <a:noFill/>
+          <a:ln/>
+        </p:spPr>
+        <p:txBody>
+          <a:bodyPr wrap="square" lIns="0" tIns="0" rIns="0" bIns="0" rtlCol="0" anchor="ctr"/>
+          <a:lstStyle/>
+          <a:p>
+            <a:pPr marL="0" indent="0" algn="ctr">
+              <a:buNone/>
+            </a:pPr>
+            <a:r>
+              <a:rPr lang="pt-BR" sz="1100" b="1" noProof="0" dirty="0">
+                <a:solidFill>
+                  <a:srgbClr val="EA1D2C"/>
+                </a:solidFill>
+              </a:rPr>
+              <a:t>-273.481</a:t>
+            </a:r>
+            <a:endParaRPr lang="pt-BR" sz="1100" noProof="0" dirty="0"/>
+          </a:p>
+        </p:txBody>
+      </p:sp>
+      <p:sp>
+        <p:nvSpPr>
+          <p:cNvPr id="13" name="Shape 11"/>
+          <p:cNvSpPr/>
+          <p:nvPr/>
+        </p:nvSpPr>
+        <p:spPr>
+          <a:xfrm>
+            <a:off x="5084064" y="1874520"/>
+            <a:ext cx="2157984" cy="868680"/>
+          </a:xfrm>
+          <a:prstGeom prst="roundRect">
+            <a:avLst>
+              <a:gd name="adj" fmla="val 6316"/>
+            </a:avLst>
+          </a:prstGeom>
+          <a:solidFill>
+            <a:srgbClr val="F4F4F4"/>
+          </a:solidFill>
+          <a:ln/>
+        </p:spPr>
+        <p:txBody>
+          <a:bodyPr/>
+          <a:lstStyle/>
+          <a:p>
+            <a:endParaRPr lang="pt-BR" noProof="0" dirty="0"/>
+          </a:p>
+        </p:txBody>
+      </p:sp>
+      <p:sp>
+        <p:nvSpPr>
+          <p:cNvPr id="14" name="Text 12"/>
+          <p:cNvSpPr/>
+          <p:nvPr/>
+        </p:nvSpPr>
+        <p:spPr>
+          <a:xfrm>
+            <a:off x="5175504" y="1965960"/>
+            <a:ext cx="1975104" cy="457200"/>
+          </a:xfrm>
+          <a:prstGeom prst="rect">
+            <a:avLst/>
+          </a:prstGeom>
+          <a:noFill/>
+          <a:ln/>
+        </p:spPr>
+        <p:txBody>
+          <a:bodyPr wrap="square" lIns="0" tIns="0" rIns="0" bIns="0" rtlCol="0" anchor="ctr"/>
+          <a:lstStyle/>
+          <a:p>
+            <a:pPr marL="0" indent="0" algn="ctr">
+              <a:lnSpc>
+                <a:spcPct val="100000"/>
+              </a:lnSpc>
+              <a:buNone/>
+            </a:pPr>
+            <a:r>
+              <a:rPr lang="pt-BR" sz="1000" b="1" noProof="0" dirty="0">
+                <a:solidFill>
+                  <a:srgbClr val="1A1A1A"/>
+                </a:solidFill>
+              </a:rPr>
+              <a:t>total_amount &gt;= 0</a:t>
+            </a:r>
+            <a:endParaRPr lang="pt-BR" sz="1000" noProof="0" dirty="0"/>
+          </a:p>
+        </p:txBody>
+      </p:sp>
+      <p:sp>
+        <p:nvSpPr>
+          <p:cNvPr id="15" name="Text 13"/>
+          <p:cNvSpPr/>
+          <p:nvPr/>
+        </p:nvSpPr>
+        <p:spPr>
+          <a:xfrm>
+            <a:off x="5175504" y="2377440"/>
+            <a:ext cx="1975104" cy="274320"/>
+          </a:xfrm>
+          <a:prstGeom prst="rect">
+            <a:avLst/>
+          </a:prstGeom>
+          <a:noFill/>
+          <a:ln/>
+        </p:spPr>
+        <p:txBody>
+          <a:bodyPr wrap="square" lIns="0" tIns="0" rIns="0" bIns="0" rtlCol="0" anchor="ctr"/>
+          <a:lstStyle/>
+          <a:p>
+            <a:pPr marL="0" indent="0" algn="ctr">
+              <a:buNone/>
+            </a:pPr>
+            <a:r>
+              <a:rPr lang="pt-BR" sz="1100" b="1" noProof="0" dirty="0">
+                <a:solidFill>
+                  <a:srgbClr val="EA1D2C"/>
+                </a:solidFill>
+              </a:rPr>
+              <a:t>-141.407</a:t>
+            </a:r>
+            <a:endParaRPr lang="pt-BR" sz="1100" noProof="0" dirty="0"/>
+          </a:p>
+        </p:txBody>
+      </p:sp>
+      <p:sp>
+        <p:nvSpPr>
+          <p:cNvPr id="16" name="Shape 14"/>
+          <p:cNvSpPr/>
+          <p:nvPr/>
+        </p:nvSpPr>
+        <p:spPr>
+          <a:xfrm>
+            <a:off x="7351776" y="1874520"/>
+            <a:ext cx="2157984" cy="868680"/>
+          </a:xfrm>
+          <a:prstGeom prst="roundRect">
+            <a:avLst>
+              <a:gd name="adj" fmla="val 6316"/>
+            </a:avLst>
+          </a:prstGeom>
+          <a:solidFill>
+            <a:srgbClr val="F4F4F4"/>
+          </a:solidFill>
+          <a:ln/>
+        </p:spPr>
+        <p:txBody>
+          <a:bodyPr/>
+          <a:lstStyle/>
+          <a:p>
+            <a:endParaRPr lang="pt-BR" noProof="0" dirty="0"/>
+          </a:p>
+        </p:txBody>
+      </p:sp>
+      <p:sp>
+        <p:nvSpPr>
+          <p:cNvPr id="17" name="Text 15"/>
+          <p:cNvSpPr/>
+          <p:nvPr/>
+        </p:nvSpPr>
+        <p:spPr>
+          <a:xfrm>
+            <a:off x="7443216" y="1965960"/>
+            <a:ext cx="1975104" cy="457200"/>
+          </a:xfrm>
+          <a:prstGeom prst="rect">
+            <a:avLst/>
+          </a:prstGeom>
+          <a:noFill/>
+          <a:ln/>
+        </p:spPr>
+        <p:txBody>
+          <a:bodyPr wrap="square" lIns="0" tIns="0" rIns="0" bIns="0" rtlCol="0" anchor="ctr"/>
+          <a:lstStyle/>
+          <a:p>
+            <a:pPr marL="0" indent="0" algn="ctr">
+              <a:lnSpc>
+                <a:spcPct val="100000"/>
+              </a:lnSpc>
+              <a:buNone/>
+            </a:pPr>
+            <a:r>
+              <a:rPr lang="pt-BR" sz="1000" b="1" noProof="0" dirty="0">
+                <a:solidFill>
+                  <a:srgbClr val="1A1A1A"/>
+                </a:solidFill>
+              </a:rPr>
+              <a:t>dropoff &gt; pickup</a:t>
+            </a:r>
+            <a:endParaRPr lang="pt-BR" sz="1000" noProof="0" dirty="0"/>
+          </a:p>
+        </p:txBody>
+      </p:sp>
+      <p:sp>
+        <p:nvSpPr>
+          <p:cNvPr id="18" name="Text 16"/>
+          <p:cNvSpPr/>
+          <p:nvPr/>
+        </p:nvSpPr>
+        <p:spPr>
+          <a:xfrm>
+            <a:off x="7443216" y="2377440"/>
+            <a:ext cx="1975104" cy="274320"/>
+          </a:xfrm>
+          <a:prstGeom prst="rect">
+            <a:avLst/>
+          </a:prstGeom>
+          <a:noFill/>
+          <a:ln/>
+        </p:spPr>
+        <p:txBody>
+          <a:bodyPr wrap="square" lIns="0" tIns="0" rIns="0" bIns="0" rtlCol="0" anchor="ctr"/>
+          <a:lstStyle/>
+          <a:p>
+            <a:pPr marL="0" indent="0" algn="ctr">
+              <a:buNone/>
+            </a:pPr>
+            <a:r>
+              <a:rPr lang="pt-BR" sz="1100" b="1" noProof="0" dirty="0">
+                <a:solidFill>
+                  <a:srgbClr val="EA1D2C"/>
+                </a:solidFill>
+              </a:rPr>
+              <a:t>-6.181</a:t>
+            </a:r>
+            <a:endParaRPr lang="pt-BR" sz="1100" noProof="0" dirty="0"/>
+          </a:p>
+        </p:txBody>
+      </p:sp>
+      <p:sp>
+        <p:nvSpPr>
+          <p:cNvPr id="19" name="Shape 17"/>
+          <p:cNvSpPr/>
+          <p:nvPr/>
+        </p:nvSpPr>
+        <p:spPr>
+          <a:xfrm>
+            <a:off x="9619488" y="1874520"/>
+            <a:ext cx="2157984" cy="868680"/>
+          </a:xfrm>
+          <a:prstGeom prst="roundRect">
+            <a:avLst>
+              <a:gd name="adj" fmla="val 6316"/>
+            </a:avLst>
+          </a:prstGeom>
+          <a:solidFill>
+            <a:srgbClr val="F4F4F4"/>
+          </a:solidFill>
+          <a:ln/>
+        </p:spPr>
+        <p:txBody>
+          <a:bodyPr/>
+          <a:lstStyle/>
+          <a:p>
+            <a:endParaRPr lang="pt-BR" noProof="0" dirty="0"/>
+          </a:p>
+        </p:txBody>
+      </p:sp>
+      <p:sp>
+        <p:nvSpPr>
+          <p:cNvPr id="20" name="Text 18"/>
+          <p:cNvSpPr/>
+          <p:nvPr/>
+        </p:nvSpPr>
+        <p:spPr>
+          <a:xfrm>
+            <a:off x="9710928" y="1965960"/>
+            <a:ext cx="1975104" cy="457200"/>
+          </a:xfrm>
+          <a:prstGeom prst="rect">
+            <a:avLst/>
+          </a:prstGeom>
+          <a:noFill/>
+          <a:ln/>
+        </p:spPr>
+        <p:txBody>
+          <a:bodyPr wrap="square" lIns="0" tIns="0" rIns="0" bIns="0" rtlCol="0" anchor="ctr"/>
+          <a:lstStyle/>
+          <a:p>
+            <a:pPr marL="0" indent="0" algn="ctr">
+              <a:lnSpc>
+                <a:spcPct val="100000"/>
+              </a:lnSpc>
+              <a:buNone/>
+            </a:pPr>
+            <a:r>
+              <a:rPr lang="pt-BR" sz="1000" b="1" noProof="0" dirty="0">
+                <a:solidFill>
+                  <a:srgbClr val="1A1A1A"/>
+                </a:solidFill>
+              </a:rPr>
+              <a:t>janela jan-mai/2023</a:t>
+            </a:r>
+            <a:endParaRPr lang="pt-BR" sz="1000" noProof="0" dirty="0"/>
+          </a:p>
+        </p:txBody>
+      </p:sp>
+      <p:sp>
+        <p:nvSpPr>
+          <p:cNvPr id="21" name="Text 19"/>
+          <p:cNvSpPr/>
+          <p:nvPr/>
+        </p:nvSpPr>
+        <p:spPr>
+          <a:xfrm>
+            <a:off x="9710928" y="2377440"/>
+            <a:ext cx="1975104" cy="274320"/>
+          </a:xfrm>
+          <a:prstGeom prst="rect">
+            <a:avLst/>
+          </a:prstGeom>
+          <a:noFill/>
+          <a:ln/>
+        </p:spPr>
+        <p:txBody>
+          <a:bodyPr wrap="square" lIns="0" tIns="0" rIns="0" bIns="0" rtlCol="0" anchor="ctr"/>
+          <a:lstStyle/>
+          <a:p>
+            <a:pPr marL="0" indent="0" algn="ctr">
+              <a:buNone/>
+            </a:pPr>
+            <a:r>
+              <a:rPr lang="pt-BR" sz="1100" b="1" noProof="0" dirty="0">
+                <a:solidFill>
+                  <a:srgbClr val="EA1D2C"/>
+                </a:solidFill>
+              </a:rPr>
+              <a:t>-104</a:t>
+            </a:r>
+            <a:endParaRPr lang="pt-BR" sz="1100" noProof="0" dirty="0"/>
+          </a:p>
+        </p:txBody>
+      </p:sp>
+      <p:sp>
+        <p:nvSpPr>
+          <p:cNvPr id="22" name="Shape 20"/>
+          <p:cNvSpPr/>
+          <p:nvPr/>
+        </p:nvSpPr>
+        <p:spPr>
+          <a:xfrm>
+            <a:off x="548640" y="2971800"/>
+            <a:ext cx="5394960" cy="1371600"/>
+          </a:xfrm>
+          <a:prstGeom prst="roundRect">
+            <a:avLst>
+              <a:gd name="adj" fmla="val 5333"/>
             </a:avLst>
           </a:prstGeom>
           <a:solidFill>
@@ -11543,14 +13129,14 @@
       </p:sp>
       <p:sp>
         <p:nvSpPr>
-          <p:cNvPr id="10" name="Text 8"/>
-          <p:cNvSpPr/>
-          <p:nvPr/>
-        </p:nvSpPr>
-        <p:spPr>
-          <a:xfrm>
-            <a:off x="6446520" y="1828800"/>
-            <a:ext cx="5029200" cy="320040"/>
+          <p:cNvPr id="23" name="Text 21"/>
+          <p:cNvSpPr/>
+          <p:nvPr/>
+        </p:nvSpPr>
+        <p:spPr>
+          <a:xfrm>
+            <a:off x="777240" y="3108960"/>
+            <a:ext cx="4572000" cy="274320"/>
           </a:xfrm>
           <a:prstGeom prst="rect">
             <a:avLst/>
@@ -11566,26 +13152,26 @@
               <a:buNone/>
             </a:pPr>
             <a:r>
-              <a:rPr lang="pt-BR" sz="1300" b="1" kern="0" spc="100" noProof="0" dirty="0">
+              <a:rPr lang="pt-BR" sz="1200" b="1" kern="0" spc="100" noProof="0" dirty="0">
                 <a:solidFill>
                   <a:srgbClr val="EA1D2C"/>
                 </a:solidFill>
               </a:rPr>
-              <a:t>TIME TRAVEL (Delta Lake)</a:t>
-            </a:r>
-            <a:endParaRPr lang="pt-BR" sz="1300" noProof="0" dirty="0"/>
-          </a:p>
-        </p:txBody>
-      </p:sp>
-      <p:sp>
-        <p:nvSpPr>
-          <p:cNvPr id="11" name="Text 9"/>
-          <p:cNvSpPr/>
-          <p:nvPr/>
-        </p:nvSpPr>
-        <p:spPr>
-          <a:xfrm>
-            <a:off x="6446520" y="2194560"/>
+              <a:t>RESULTADO</a:t>
+            </a:r>
+            <a:endParaRPr lang="pt-BR" sz="1200" noProof="0" dirty="0"/>
+          </a:p>
+        </p:txBody>
+      </p:sp>
+      <p:sp>
+        <p:nvSpPr>
+          <p:cNvPr id="24" name="Text 22"/>
+          <p:cNvSpPr/>
+          <p:nvPr/>
+        </p:nvSpPr>
+        <p:spPr>
+          <a:xfrm>
+            <a:off x="777240" y="3429000"/>
             <a:ext cx="4937760" cy="822960"/>
           </a:xfrm>
           <a:prstGeom prst="rect">
@@ -11605,194 +13191,18 @@
               <a:buNone/>
             </a:pPr>
             <a:r>
-              <a:rPr lang="pt-BR" sz="1200" noProof="0" dirty="0">
-                <a:solidFill>
-                  <a:srgbClr val="CFCFCF"/>
-                </a:solidFill>
-              </a:rPr>
-              <a:t>DESCRIBE HISTORY mostra todas as versões da tabela. VERSION AS OF permite consultar qualquer estado anterior.</a:t>
-            </a:r>
-            <a:endParaRPr lang="pt-BR" sz="1200" noProof="0" dirty="0"/>
-          </a:p>
-        </p:txBody>
-      </p:sp>
-      <p:sp>
-        <p:nvSpPr>
-          <p:cNvPr id="12" name="Text 10"/>
-          <p:cNvSpPr/>
-          <p:nvPr/>
-        </p:nvSpPr>
-        <p:spPr>
-          <a:xfrm>
-            <a:off x="6446520" y="2971800"/>
-            <a:ext cx="4937760" cy="548640"/>
-          </a:xfrm>
-          <a:prstGeom prst="rect">
-            <a:avLst/>
-          </a:prstGeom>
-          <a:noFill/>
-          <a:ln/>
-        </p:spPr>
-        <p:txBody>
-          <a:bodyPr wrap="square" lIns="0" tIns="0" rIns="0" bIns="0" rtlCol="0" anchor="ctr"/>
-          <a:lstStyle/>
-          <a:p>
-            <a:pPr marL="0" indent="0">
-              <a:buNone/>
-            </a:pPr>
-            <a:r>
-              <a:rPr lang="pt-BR" sz="1100" noProof="0" dirty="0">
-                <a:solidFill>
-                  <a:srgbClr val="9CDCFE"/>
+              <a:rPr lang="pt-BR" sz="1400" noProof="0" dirty="0">
+                <a:solidFill>
+                  <a:srgbClr val="FFFFFF"/>
                 </a:solidFill>
                 <a:latin typeface="Consolas" pitchFamily="34" charset="0"/>
                 <a:ea typeface="Consolas" pitchFamily="34" charset="-122"/>
                 <a:cs typeface="Consolas" pitchFamily="34" charset="-120"/>
               </a:rPr>
-              <a:t>SELECT * FROM silver.yellow_trips</a:t>
-            </a:r>
-            <a:endParaRPr lang="pt-BR" sz="1100" noProof="0" dirty="0"/>
-          </a:p>
-          <a:p>
-            <a:pPr marL="0" indent="0">
-              <a:buNone/>
-            </a:pPr>
-            <a:r>
-              <a:rPr lang="pt-BR" sz="1100" noProof="0" dirty="0">
-                <a:solidFill>
-                  <a:srgbClr val="9CDCFE"/>
-                </a:solidFill>
-                <a:latin typeface="Consolas" pitchFamily="34" charset="0"/>
-                <a:ea typeface="Consolas" pitchFamily="34" charset="-122"/>
-                <a:cs typeface="Consolas" pitchFamily="34" charset="-120"/>
-              </a:rPr>
-              <a:t>  VERSION AS OF 0;</a:t>
-            </a:r>
-            <a:endParaRPr lang="pt-BR" sz="1100" noProof="0" dirty="0"/>
-          </a:p>
-        </p:txBody>
-      </p:sp>
-      <p:sp>
-        <p:nvSpPr>
-          <p:cNvPr id="13" name="Text 11"/>
-          <p:cNvSpPr/>
-          <p:nvPr/>
-        </p:nvSpPr>
-        <p:spPr>
-          <a:xfrm>
-            <a:off x="6446520" y="3520440"/>
-            <a:ext cx="4937760" cy="365760"/>
-          </a:xfrm>
-          <a:prstGeom prst="rect">
-            <a:avLst/>
-          </a:prstGeom>
-          <a:noFill/>
-          <a:ln/>
-        </p:spPr>
-        <p:txBody>
-          <a:bodyPr wrap="square" lIns="0" tIns="0" rIns="0" bIns="0" rtlCol="0" anchor="ctr"/>
-          <a:lstStyle/>
-          <a:p>
-            <a:pPr marL="0" indent="0">
-              <a:buNone/>
-            </a:pPr>
-            <a:r>
-              <a:rPr lang="pt-BR" sz="1100" b="1" i="1" noProof="0" dirty="0">
-                <a:solidFill>
-                  <a:srgbClr val="1B7A3E"/>
-                </a:solidFill>
-              </a:rPr>
-              <a:t>Em caso de incidente, restauro o estado exato antes da falha.</a:t>
-            </a:r>
-            <a:endParaRPr lang="pt-BR" sz="1100" noProof="0" dirty="0"/>
-          </a:p>
-        </p:txBody>
-      </p:sp>
-      <p:sp>
-        <p:nvSpPr>
-          <p:cNvPr id="14" name="Shape 12"/>
-          <p:cNvSpPr/>
-          <p:nvPr/>
-        </p:nvSpPr>
-        <p:spPr>
-          <a:xfrm>
-            <a:off x="548640" y="4069080"/>
-            <a:ext cx="11064240" cy="1463040"/>
-          </a:xfrm>
-          <a:prstGeom prst="roundRect">
-            <a:avLst>
-              <a:gd name="adj" fmla="val 5000"/>
-            </a:avLst>
-          </a:prstGeom>
-          <a:solidFill>
-            <a:srgbClr val="FEF3C7"/>
-          </a:solidFill>
-          <a:ln/>
-        </p:spPr>
-        <p:txBody>
-          <a:bodyPr/>
-          <a:lstStyle/>
-          <a:p>
-            <a:endParaRPr lang="pt-BR" noProof="0" dirty="0"/>
-          </a:p>
-        </p:txBody>
-      </p:sp>
-      <p:sp>
-        <p:nvSpPr>
-          <p:cNvPr id="15" name="Text 13"/>
-          <p:cNvSpPr/>
-          <p:nvPr/>
-        </p:nvSpPr>
-        <p:spPr>
-          <a:xfrm>
-            <a:off x="777240" y="4206240"/>
-            <a:ext cx="10607040" cy="320040"/>
-          </a:xfrm>
-          <a:prstGeom prst="rect">
-            <a:avLst/>
-          </a:prstGeom>
-          <a:noFill/>
-          <a:ln/>
-        </p:spPr>
-        <p:txBody>
-          <a:bodyPr wrap="square" lIns="0" tIns="0" rIns="0" bIns="0" rtlCol="0" anchor="ctr"/>
-          <a:lstStyle/>
-          <a:p>
-            <a:pPr marL="0" indent="0">
-              <a:buNone/>
-            </a:pPr>
-            <a:r>
-              <a:rPr lang="pt-BR" sz="1300" b="1" noProof="0" dirty="0">
-                <a:solidFill>
-                  <a:srgbClr val="B45309"/>
-                </a:solidFill>
-              </a:rPr>
-              <a:t>Auditoria e recuperação de ponta a ponta</a:t>
-            </a:r>
-            <a:endParaRPr lang="pt-BR" sz="1300" noProof="0" dirty="0"/>
-          </a:p>
-        </p:txBody>
-      </p:sp>
-      <p:sp>
-        <p:nvSpPr>
-          <p:cNvPr id="16" name="Text 14"/>
-          <p:cNvSpPr/>
-          <p:nvPr/>
-        </p:nvSpPr>
-        <p:spPr>
-          <a:xfrm>
-            <a:off x="777240" y="4572000"/>
-            <a:ext cx="10607040" cy="868680"/>
-          </a:xfrm>
-          <a:prstGeom prst="rect">
-            <a:avLst/>
-          </a:prstGeom>
-          <a:noFill/>
-          <a:ln/>
-        </p:spPr>
-        <p:txBody>
-          <a:bodyPr wrap="square" lIns="0" tIns="0" rIns="0" bIns="0" rtlCol="0" anchor="ctr"/>
-          <a:lstStyle/>
+              <a:t>Bronze:  16.186.386</a:t>
+            </a:r>
+            <a:endParaRPr lang="pt-BR" sz="1400" noProof="0" dirty="0"/>
+          </a:p>
           <a:p>
             <a:pPr marL="0" indent="0">
               <a:lnSpc>
@@ -11801,12 +13211,316 @@
               <a:buNone/>
             </a:pPr>
             <a:r>
+              <a:rPr lang="pt-BR" sz="1400" noProof="0" dirty="0">
+                <a:solidFill>
+                  <a:srgbClr val="FFFFFF"/>
+                </a:solidFill>
+                <a:latin typeface="Consolas" pitchFamily="34" charset="0"/>
+                <a:ea typeface="Consolas" pitchFamily="34" charset="-122"/>
+                <a:cs typeface="Consolas" pitchFamily="34" charset="-120"/>
+              </a:rPr>
+              <a:t>Silver:   15.337.137</a:t>
+            </a:r>
+            <a:endParaRPr lang="pt-BR" sz="1400" noProof="0" dirty="0"/>
+          </a:p>
+          <a:p>
+            <a:pPr marL="0" indent="0">
+              <a:lnSpc>
+                <a:spcPct val="120000"/>
+              </a:lnSpc>
+              <a:buNone/>
+            </a:pPr>
+            <a:r>
+              <a:rPr lang="pt-BR" sz="1400" noProof="0" dirty="0">
+                <a:solidFill>
+                  <a:srgbClr val="FFFFFF"/>
+                </a:solidFill>
+                <a:latin typeface="Consolas" pitchFamily="34" charset="0"/>
+                <a:ea typeface="Consolas" pitchFamily="34" charset="-122"/>
+                <a:cs typeface="Consolas" pitchFamily="34" charset="-120"/>
+              </a:rPr>
+              <a:t>Aproveitamento: 94,76%</a:t>
+            </a:r>
+            <a:endParaRPr lang="pt-BR" sz="1400" noProof="0" dirty="0"/>
+          </a:p>
+        </p:txBody>
+      </p:sp>
+      <p:sp>
+        <p:nvSpPr>
+          <p:cNvPr id="25" name="Shape 23"/>
+          <p:cNvSpPr/>
+          <p:nvPr/>
+        </p:nvSpPr>
+        <p:spPr>
+          <a:xfrm>
+            <a:off x="6217920" y="2971800"/>
+            <a:ext cx="5394960" cy="1371600"/>
+          </a:xfrm>
+          <a:prstGeom prst="roundRect">
+            <a:avLst>
+              <a:gd name="adj" fmla="val 5333"/>
+            </a:avLst>
+          </a:prstGeom>
+          <a:solidFill>
+            <a:srgbClr val="E8F5ED"/>
+          </a:solidFill>
+          <a:ln/>
+        </p:spPr>
+        <p:txBody>
+          <a:bodyPr/>
+          <a:lstStyle/>
+          <a:p>
+            <a:endParaRPr lang="pt-BR" noProof="0" dirty="0"/>
+          </a:p>
+        </p:txBody>
+      </p:sp>
+      <p:sp>
+        <p:nvSpPr>
+          <p:cNvPr id="26" name="Text 24"/>
+          <p:cNvSpPr/>
+          <p:nvPr/>
+        </p:nvSpPr>
+        <p:spPr>
+          <a:xfrm>
+            <a:off x="6446520" y="3108960"/>
+            <a:ext cx="4572000" cy="274320"/>
+          </a:xfrm>
+          <a:prstGeom prst="rect">
+            <a:avLst/>
+          </a:prstGeom>
+          <a:noFill/>
+          <a:ln/>
+        </p:spPr>
+        <p:txBody>
+          <a:bodyPr wrap="square" lIns="0" tIns="0" rIns="0" bIns="0" rtlCol="0" anchor="ctr"/>
+          <a:lstStyle/>
+          <a:p>
+            <a:pPr marL="0" indent="0">
+              <a:buNone/>
+            </a:pPr>
+            <a:r>
+              <a:rPr lang="pt-BR" sz="1200" b="1" kern="0" spc="100" noProof="0" dirty="0">
+                <a:solidFill>
+                  <a:srgbClr val="1B7A3E"/>
+                </a:solidFill>
+              </a:rPr>
+              <a:t>QUALITY GATE</a:t>
+            </a:r>
+            <a:endParaRPr lang="pt-BR" sz="1200" noProof="0" dirty="0"/>
+          </a:p>
+        </p:txBody>
+      </p:sp>
+      <p:sp>
+        <p:nvSpPr>
+          <p:cNvPr id="27" name="Text 25"/>
+          <p:cNvSpPr/>
+          <p:nvPr/>
+        </p:nvSpPr>
+        <p:spPr>
+          <a:xfrm>
+            <a:off x="6446520" y="3474720"/>
+            <a:ext cx="4937760" cy="548640"/>
+          </a:xfrm>
+          <a:prstGeom prst="rect">
+            <a:avLst/>
+          </a:prstGeom>
+          <a:noFill/>
+          <a:ln/>
+        </p:spPr>
+        <p:txBody>
+          <a:bodyPr wrap="square" lIns="0" tIns="0" rIns="0" bIns="0" rtlCol="0" anchor="ctr"/>
+          <a:lstStyle/>
+          <a:p>
+            <a:pPr marL="0" indent="0">
+              <a:buNone/>
+            </a:pPr>
+            <a:r>
+              <a:rPr lang="pt-BR" sz="2800" b="1" noProof="0" dirty="0">
+                <a:solidFill>
+                  <a:srgbClr val="1B7A3E"/>
+                </a:solidFill>
+              </a:rPr>
+              <a:t>0</a:t>
+            </a:r>
+            <a:r>
+              <a:rPr lang="pt-BR" sz="1200" noProof="0" dirty="0">
+                <a:solidFill>
+                  <a:srgbClr val="1A1A1A"/>
+                </a:solidFill>
+              </a:rPr>
+              <a:t>  negativos    </a:t>
+            </a:r>
+            <a:r>
+              <a:rPr lang="pt-BR" sz="2800" b="1" noProof="0" dirty="0">
+                <a:solidFill>
+                  <a:srgbClr val="1B7A3E"/>
+                </a:solidFill>
+              </a:rPr>
+              <a:t>0</a:t>
+            </a:r>
+            <a:r>
+              <a:rPr lang="pt-BR" sz="1200" noProof="0" dirty="0">
+                <a:solidFill>
+                  <a:srgbClr val="1A1A1A"/>
+                </a:solidFill>
+              </a:rPr>
+              <a:t>  pax&lt;=0    </a:t>
+            </a:r>
+            <a:r>
+              <a:rPr lang="pt-BR" sz="2800" b="1" noProof="0" dirty="0">
+                <a:solidFill>
+                  <a:srgbClr val="1B7A3E"/>
+                </a:solidFill>
+              </a:rPr>
+              <a:t>0</a:t>
+            </a:r>
+            <a:r>
+              <a:rPr lang="pt-BR" sz="1200" noProof="0" dirty="0">
+                <a:solidFill>
+                  <a:srgbClr val="1A1A1A"/>
+                </a:solidFill>
+              </a:rPr>
+              <a:t>  tempo</a:t>
+            </a:r>
+            <a:endParaRPr lang="pt-BR" sz="2800" noProof="0" dirty="0"/>
+          </a:p>
+        </p:txBody>
+      </p:sp>
+      <p:sp>
+        <p:nvSpPr>
+          <p:cNvPr id="28" name="Text 26"/>
+          <p:cNvSpPr/>
+          <p:nvPr/>
+        </p:nvSpPr>
+        <p:spPr>
+          <a:xfrm>
+            <a:off x="6446520" y="4023360"/>
+            <a:ext cx="4937760" cy="274320"/>
+          </a:xfrm>
+          <a:prstGeom prst="rect">
+            <a:avLst/>
+          </a:prstGeom>
+          <a:noFill/>
+          <a:ln/>
+        </p:spPr>
+        <p:txBody>
+          <a:bodyPr wrap="square" lIns="0" tIns="0" rIns="0" bIns="0" rtlCol="0" anchor="ctr"/>
+          <a:lstStyle/>
+          <a:p>
+            <a:pPr marL="0" indent="0">
+              <a:buNone/>
+            </a:pPr>
+            <a:r>
+              <a:rPr lang="pt-BR" sz="1100" i="1" noProof="0" dirty="0">
+                <a:solidFill>
+                  <a:srgbClr val="1A1A1A"/>
+                </a:solidFill>
+              </a:rPr>
+              <a:t>Zero violações após a limpeza</a:t>
+            </a:r>
+            <a:endParaRPr lang="pt-BR" sz="1100" noProof="0" dirty="0"/>
+          </a:p>
+        </p:txBody>
+      </p:sp>
+      <p:sp>
+        <p:nvSpPr>
+          <p:cNvPr id="29" name="Shape 27"/>
+          <p:cNvSpPr/>
+          <p:nvPr/>
+        </p:nvSpPr>
+        <p:spPr>
+          <a:xfrm>
+            <a:off x="548640" y="4526280"/>
+            <a:ext cx="11064240" cy="1234440"/>
+          </a:xfrm>
+          <a:prstGeom prst="roundRect">
+            <a:avLst>
+              <a:gd name="adj" fmla="val 5926"/>
+            </a:avLst>
+          </a:prstGeom>
+          <a:solidFill>
+            <a:srgbClr val="FDECEA"/>
+          </a:solidFill>
+          <a:ln/>
+        </p:spPr>
+        <p:txBody>
+          <a:bodyPr/>
+          <a:lstStyle/>
+          <a:p>
+            <a:endParaRPr lang="pt-BR" noProof="0" dirty="0"/>
+          </a:p>
+        </p:txBody>
+      </p:sp>
+      <p:sp>
+        <p:nvSpPr>
+          <p:cNvPr id="30" name="Text 28"/>
+          <p:cNvSpPr/>
+          <p:nvPr/>
+        </p:nvSpPr>
+        <p:spPr>
+          <a:xfrm>
+            <a:off x="777240" y="4663440"/>
+            <a:ext cx="10607040" cy="274320"/>
+          </a:xfrm>
+          <a:prstGeom prst="rect">
+            <a:avLst/>
+          </a:prstGeom>
+          <a:noFill/>
+          <a:ln/>
+        </p:spPr>
+        <p:txBody>
+          <a:bodyPr wrap="square" lIns="0" tIns="0" rIns="0" bIns="0" rtlCol="0" anchor="ctr"/>
+          <a:lstStyle/>
+          <a:p>
+            <a:pPr marL="0" indent="0">
+              <a:buNone/>
+            </a:pPr>
+            <a:r>
+              <a:rPr lang="pt-BR" sz="1200" b="1" kern="0" spc="100" noProof="0" dirty="0">
+                <a:solidFill>
+                  <a:srgbClr val="EA1D2C"/>
+                </a:solidFill>
+              </a:rPr>
+              <a:t>QUALITY LOG - o diferencial de governança</a:t>
+            </a:r>
+            <a:endParaRPr lang="pt-BR" sz="1200" noProof="0" dirty="0"/>
+          </a:p>
+        </p:txBody>
+      </p:sp>
+      <p:sp>
+        <p:nvSpPr>
+          <p:cNvPr id="31" name="Text 29"/>
+          <p:cNvSpPr/>
+          <p:nvPr/>
+        </p:nvSpPr>
+        <p:spPr>
+          <a:xfrm>
+            <a:off x="777240" y="4983480"/>
+            <a:ext cx="10607040" cy="731520"/>
+          </a:xfrm>
+          <a:prstGeom prst="rect">
+            <a:avLst/>
+          </a:prstGeom>
+          <a:noFill/>
+          <a:ln/>
+        </p:spPr>
+        <p:txBody>
+          <a:bodyPr wrap="square" lIns="0" tIns="0" rIns="0" bIns="0" rtlCol="0" anchor="ctr"/>
+          <a:lstStyle/>
+          <a:p>
+            <a:pPr marL="0" indent="0">
+              <a:lnSpc>
+                <a:spcPct val="120000"/>
+              </a:lnSpc>
+              <a:buNone/>
+            </a:pPr>
+            <a:r>
               <a:rPr lang="pt-BR" sz="1300" noProof="0" dirty="0">
                 <a:solidFill>
                   <a:srgbClr val="1A1A1A"/>
                 </a:solidFill>
               </a:rPr>
-              <a:t>A combinação de _ingestão_ts na Bronze, DESCRIBE HISTORY no Delta e quality_log na Silver responde as três perguntas de governança: de onde veio o dado, o que foi feito com ele e quando. Isso e o fundamento técnico que ferramentas como o Collibra expõem visualmente.</a:t>
+              <a:t>Cada execução é persistida numa tabela Delta. Duas cargas registradas (26 e 27/06), mesmo resultado: prova que o pipeline é reprodutível e a qualidade é auditável ao longo do tempo. Não é um teste pontual, é um histórico.</a:t>
             </a:r>
             <a:endParaRPr lang="pt-BR" sz="1300" noProof="0" dirty="0"/>
           </a:p>
@@ -11814,7 +13528,7 @@
       </p:sp>
       <p:sp>
         <p:nvSpPr>
-          <p:cNvPr id="17" name="Text 15"/>
+          <p:cNvPr id="32" name="Text 30"/>
           <p:cNvSpPr/>
           <p:nvPr/>
         </p:nvSpPr>
@@ -11850,7 +13564,7 @@
       </p:sp>
       <p:sp>
         <p:nvSpPr>
-          <p:cNvPr id="18" name="Text 16"/>
+          <p:cNvPr id="33" name="Text 31"/>
           <p:cNvSpPr/>
           <p:nvPr/>
         </p:nvSpPr>
@@ -11947,7 +13661,7 @@
                   <a:srgbClr val="EA1D2C"/>
                 </a:solidFill>
               </a:rPr>
-              <a:t>ETAPA 04 - GOVERNANCA</a:t>
+              <a:t>ETAPA 03</a:t>
             </a:r>
             <a:endParaRPr lang="pt-BR" sz="1100" noProof="0" dirty="0"/>
           </a:p>
@@ -11983,7 +13697,7 @@
                   <a:srgbClr val="1A1A1A"/>
                 </a:solidFill>
               </a:rPr>
-              <a:t>Classificação de sensibilidade (LGPD)</a:t>
+              <a:t>Gold: consumo e time travel</a:t>
             </a:r>
             <a:endParaRPr lang="pt-BR" sz="2500" noProof="0" dirty="0"/>
           </a:p>
@@ -12048,6 +13762,730 @@
                   <a:srgbClr val="EA1D2C"/>
                 </a:solidFill>
               </a:rPr>
+              <a:t>ARQUIVO 03   </a:t>
+            </a:r>
+            <a:r>
+              <a:rPr lang="pt-BR" sz="1000" noProof="0" dirty="0">
+                <a:solidFill>
+                  <a:srgbClr val="FFFFFF"/>
+                </a:solidFill>
+              </a:rPr>
+              <a:t>03_gold</a:t>
+            </a:r>
+            <a:endParaRPr lang="pt-BR" sz="1000" noProof="0" dirty="0"/>
+          </a:p>
+        </p:txBody>
+      </p:sp>
+      <p:sp>
+        <p:nvSpPr>
+          <p:cNvPr id="6" name="Shape 4"/>
+          <p:cNvSpPr/>
+          <p:nvPr/>
+        </p:nvSpPr>
+        <p:spPr>
+          <a:xfrm>
+            <a:off x="548640" y="1691640"/>
+            <a:ext cx="5394960" cy="2194560"/>
+          </a:xfrm>
+          <a:prstGeom prst="roundRect">
+            <a:avLst>
+              <a:gd name="adj" fmla="val 3333"/>
+            </a:avLst>
+          </a:prstGeom>
+          <a:solidFill>
+            <a:srgbClr val="F4F4F4"/>
+          </a:solidFill>
+          <a:ln/>
+        </p:spPr>
+        <p:txBody>
+          <a:bodyPr/>
+          <a:lstStyle/>
+          <a:p>
+            <a:endParaRPr lang="pt-BR" noProof="0" dirty="0"/>
+          </a:p>
+        </p:txBody>
+      </p:sp>
+      <p:sp>
+        <p:nvSpPr>
+          <p:cNvPr id="7" name="Text 5"/>
+          <p:cNvSpPr/>
+          <p:nvPr/>
+        </p:nvSpPr>
+        <p:spPr>
+          <a:xfrm>
+            <a:off x="777240" y="1828800"/>
+            <a:ext cx="4572000" cy="320040"/>
+          </a:xfrm>
+          <a:prstGeom prst="rect">
+            <a:avLst/>
+          </a:prstGeom>
+          <a:noFill/>
+          <a:ln/>
+        </p:spPr>
+        <p:txBody>
+          <a:bodyPr wrap="square" lIns="0" tIns="0" rIns="0" bIns="0" rtlCol="0" anchor="ctr"/>
+          <a:lstStyle/>
+          <a:p>
+            <a:pPr marL="0" indent="0">
+              <a:buNone/>
+            </a:pPr>
+            <a:r>
+              <a:rPr lang="pt-BR" sz="1300" b="1" kern="0" spc="100" noProof="0" dirty="0">
+                <a:solidFill>
+                  <a:srgbClr val="EA1D2C"/>
+                </a:solidFill>
+              </a:rPr>
+              <a:t>TABELAS DE CONSUMO</a:t>
+            </a:r>
+            <a:endParaRPr lang="pt-BR" sz="1300" noProof="0" dirty="0"/>
+          </a:p>
+        </p:txBody>
+      </p:sp>
+      <p:sp>
+        <p:nvSpPr>
+          <p:cNvPr id="8" name="Text 6"/>
+          <p:cNvSpPr/>
+          <p:nvPr/>
+        </p:nvSpPr>
+        <p:spPr>
+          <a:xfrm>
+            <a:off x="868680" y="2194560"/>
+            <a:ext cx="4937760" cy="1554480"/>
+          </a:xfrm>
+          <a:prstGeom prst="rect">
+            <a:avLst/>
+          </a:prstGeom>
+          <a:noFill/>
+          <a:ln/>
+        </p:spPr>
+        <p:txBody>
+          <a:bodyPr wrap="square" lIns="0" tIns="0" rIns="0" bIns="0" rtlCol="0" anchor="ctr"/>
+          <a:lstStyle/>
+          <a:p>
+            <a:pPr marL="342900" indent="-342900">
+              <a:lnSpc>
+                <a:spcPct val="125000"/>
+              </a:lnSpc>
+              <a:buSzPct val="100000"/>
+              <a:buChar char="•"/>
+            </a:pPr>
+            <a:r>
+              <a:rPr lang="pt-BR" sz="1300" b="1" noProof="0" dirty="0">
+                <a:solidFill>
+                  <a:srgbClr val="1A1A1A"/>
+                </a:solidFill>
+              </a:rPr>
+              <a:t>gold.receita_mensal</a:t>
+            </a:r>
+            <a:endParaRPr lang="pt-BR" sz="1300" noProof="0" dirty="0"/>
+          </a:p>
+          <a:p>
+            <a:pPr marL="0" indent="0">
+              <a:lnSpc>
+                <a:spcPct val="125000"/>
+              </a:lnSpc>
+              <a:buNone/>
+            </a:pPr>
+            <a:r>
+              <a:rPr lang="pt-BR" sz="1100" noProof="0" dirty="0">
+                <a:solidFill>
+                  <a:srgbClr val="5A5A5A"/>
+                </a:solidFill>
+              </a:rPr>
+              <a:t>receita total e ticket médio por mês</a:t>
+            </a:r>
+            <a:endParaRPr lang="pt-BR" sz="1300" noProof="0" dirty="0"/>
+          </a:p>
+          <a:p>
+            <a:pPr marL="342900" indent="-342900">
+              <a:lnSpc>
+                <a:spcPct val="125000"/>
+              </a:lnSpc>
+              <a:buSzPct val="100000"/>
+              <a:buChar char="•"/>
+            </a:pPr>
+            <a:r>
+              <a:rPr lang="pt-BR" sz="1300" b="1" noProof="0" dirty="0">
+                <a:solidFill>
+                  <a:srgbClr val="1A1A1A"/>
+                </a:solidFill>
+              </a:rPr>
+              <a:t>gold.passageiros_por_hora</a:t>
+            </a:r>
+            <a:endParaRPr lang="pt-BR" sz="1300" noProof="0" dirty="0"/>
+          </a:p>
+          <a:p>
+            <a:pPr marL="0" indent="0">
+              <a:lnSpc>
+                <a:spcPct val="125000"/>
+              </a:lnSpc>
+              <a:buNone/>
+            </a:pPr>
+            <a:r>
+              <a:rPr lang="pt-BR" sz="1100" noProof="0" dirty="0">
+                <a:solidFill>
+                  <a:srgbClr val="5A5A5A"/>
+                </a:solidFill>
+              </a:rPr>
+              <a:t>média de passageiros por hora do dia</a:t>
+            </a:r>
+            <a:endParaRPr lang="pt-BR" sz="1300" noProof="0" dirty="0"/>
+          </a:p>
+          <a:p>
+            <a:pPr marL="0" indent="0">
+              <a:lnSpc>
+                <a:spcPct val="125000"/>
+              </a:lnSpc>
+              <a:buNone/>
+            </a:pPr>
+            <a:r>
+              <a:rPr lang="pt-BR" sz="1100" i="1" noProof="0" dirty="0">
+                <a:solidFill>
+                  <a:srgbClr val="1A1A1A"/>
+                </a:solidFill>
+              </a:rPr>
+              <a:t>O usuário consome via SQL, sem conhecer as camadas anteriores.</a:t>
+            </a:r>
+            <a:endParaRPr lang="pt-BR" sz="1300" noProof="0" dirty="0"/>
+          </a:p>
+        </p:txBody>
+      </p:sp>
+      <p:sp>
+        <p:nvSpPr>
+          <p:cNvPr id="9" name="Shape 7"/>
+          <p:cNvSpPr/>
+          <p:nvPr/>
+        </p:nvSpPr>
+        <p:spPr>
+          <a:xfrm>
+            <a:off x="6217920" y="1691640"/>
+            <a:ext cx="5394960" cy="2194560"/>
+          </a:xfrm>
+          <a:prstGeom prst="roundRect">
+            <a:avLst>
+              <a:gd name="adj" fmla="val 3333"/>
+            </a:avLst>
+          </a:prstGeom>
+          <a:solidFill>
+            <a:srgbClr val="1A1A1A"/>
+          </a:solidFill>
+          <a:ln/>
+        </p:spPr>
+        <p:txBody>
+          <a:bodyPr/>
+          <a:lstStyle/>
+          <a:p>
+            <a:endParaRPr lang="pt-BR" noProof="0" dirty="0"/>
+          </a:p>
+        </p:txBody>
+      </p:sp>
+      <p:sp>
+        <p:nvSpPr>
+          <p:cNvPr id="10" name="Text 8"/>
+          <p:cNvSpPr/>
+          <p:nvPr/>
+        </p:nvSpPr>
+        <p:spPr>
+          <a:xfrm>
+            <a:off x="6446520" y="1828800"/>
+            <a:ext cx="5029200" cy="320040"/>
+          </a:xfrm>
+          <a:prstGeom prst="rect">
+            <a:avLst/>
+          </a:prstGeom>
+          <a:noFill/>
+          <a:ln/>
+        </p:spPr>
+        <p:txBody>
+          <a:bodyPr wrap="square" lIns="0" tIns="0" rIns="0" bIns="0" rtlCol="0" anchor="ctr"/>
+          <a:lstStyle/>
+          <a:p>
+            <a:pPr marL="0" indent="0">
+              <a:buNone/>
+            </a:pPr>
+            <a:r>
+              <a:rPr lang="pt-BR" sz="1300" b="1" kern="0" spc="100" noProof="0" dirty="0">
+                <a:solidFill>
+                  <a:srgbClr val="EA1D2C"/>
+                </a:solidFill>
+              </a:rPr>
+              <a:t>TIME TRAVEL (Delta Lake)</a:t>
+            </a:r>
+            <a:endParaRPr lang="pt-BR" sz="1300" noProof="0" dirty="0"/>
+          </a:p>
+        </p:txBody>
+      </p:sp>
+      <p:sp>
+        <p:nvSpPr>
+          <p:cNvPr id="11" name="Text 9"/>
+          <p:cNvSpPr/>
+          <p:nvPr/>
+        </p:nvSpPr>
+        <p:spPr>
+          <a:xfrm>
+            <a:off x="6446520" y="2194560"/>
+            <a:ext cx="4937760" cy="822960"/>
+          </a:xfrm>
+          <a:prstGeom prst="rect">
+            <a:avLst/>
+          </a:prstGeom>
+          <a:noFill/>
+          <a:ln/>
+        </p:spPr>
+        <p:txBody>
+          <a:bodyPr wrap="square" lIns="0" tIns="0" rIns="0" bIns="0" rtlCol="0" anchor="ctr"/>
+          <a:lstStyle/>
+          <a:p>
+            <a:pPr marL="0" indent="0">
+              <a:lnSpc>
+                <a:spcPct val="120000"/>
+              </a:lnSpc>
+              <a:buNone/>
+            </a:pPr>
+            <a:r>
+              <a:rPr lang="pt-BR" sz="1200" noProof="0" dirty="0">
+                <a:solidFill>
+                  <a:srgbClr val="CFCFCF"/>
+                </a:solidFill>
+              </a:rPr>
+              <a:t>DESCRIBE HISTORY mostra todas as versões da tabela. VERSION AS OF permite consultar qualquer estado anterior.</a:t>
+            </a:r>
+            <a:endParaRPr lang="pt-BR" sz="1200" noProof="0" dirty="0"/>
+          </a:p>
+        </p:txBody>
+      </p:sp>
+      <p:sp>
+        <p:nvSpPr>
+          <p:cNvPr id="12" name="Text 10"/>
+          <p:cNvSpPr/>
+          <p:nvPr/>
+        </p:nvSpPr>
+        <p:spPr>
+          <a:xfrm>
+            <a:off x="6446520" y="2971800"/>
+            <a:ext cx="4937760" cy="548640"/>
+          </a:xfrm>
+          <a:prstGeom prst="rect">
+            <a:avLst/>
+          </a:prstGeom>
+          <a:noFill/>
+          <a:ln/>
+        </p:spPr>
+        <p:txBody>
+          <a:bodyPr wrap="square" lIns="0" tIns="0" rIns="0" bIns="0" rtlCol="0" anchor="ctr"/>
+          <a:lstStyle/>
+          <a:p>
+            <a:pPr marL="0" indent="0">
+              <a:buNone/>
+            </a:pPr>
+            <a:r>
+              <a:rPr lang="pt-BR" sz="1100" noProof="0" dirty="0">
+                <a:solidFill>
+                  <a:srgbClr val="9CDCFE"/>
+                </a:solidFill>
+                <a:latin typeface="Consolas" pitchFamily="34" charset="0"/>
+                <a:ea typeface="Consolas" pitchFamily="34" charset="-122"/>
+                <a:cs typeface="Consolas" pitchFamily="34" charset="-120"/>
+              </a:rPr>
+              <a:t>SELECT * FROM silver.yellow_trips</a:t>
+            </a:r>
+            <a:endParaRPr lang="pt-BR" sz="1100" noProof="0" dirty="0"/>
+          </a:p>
+          <a:p>
+            <a:pPr marL="0" indent="0">
+              <a:buNone/>
+            </a:pPr>
+            <a:r>
+              <a:rPr lang="pt-BR" sz="1100" noProof="0" dirty="0">
+                <a:solidFill>
+                  <a:srgbClr val="9CDCFE"/>
+                </a:solidFill>
+                <a:latin typeface="Consolas" pitchFamily="34" charset="0"/>
+                <a:ea typeface="Consolas" pitchFamily="34" charset="-122"/>
+                <a:cs typeface="Consolas" pitchFamily="34" charset="-120"/>
+              </a:rPr>
+              <a:t>  VERSION AS OF 0;</a:t>
+            </a:r>
+            <a:endParaRPr lang="pt-BR" sz="1100" noProof="0" dirty="0"/>
+          </a:p>
+        </p:txBody>
+      </p:sp>
+      <p:sp>
+        <p:nvSpPr>
+          <p:cNvPr id="13" name="Text 11"/>
+          <p:cNvSpPr/>
+          <p:nvPr/>
+        </p:nvSpPr>
+        <p:spPr>
+          <a:xfrm>
+            <a:off x="6446520" y="3520440"/>
+            <a:ext cx="4937760" cy="365760"/>
+          </a:xfrm>
+          <a:prstGeom prst="rect">
+            <a:avLst/>
+          </a:prstGeom>
+          <a:noFill/>
+          <a:ln/>
+        </p:spPr>
+        <p:txBody>
+          <a:bodyPr wrap="square" lIns="0" tIns="0" rIns="0" bIns="0" rtlCol="0" anchor="ctr"/>
+          <a:lstStyle/>
+          <a:p>
+            <a:pPr marL="0" indent="0">
+              <a:buNone/>
+            </a:pPr>
+            <a:r>
+              <a:rPr lang="pt-BR" sz="1100" b="1" i="1" noProof="0" dirty="0">
+                <a:solidFill>
+                  <a:srgbClr val="1B7A3E"/>
+                </a:solidFill>
+              </a:rPr>
+              <a:t>Em caso de incidente, restauro o estado exato antes da falha.</a:t>
+            </a:r>
+            <a:endParaRPr lang="pt-BR" sz="1100" noProof="0" dirty="0"/>
+          </a:p>
+        </p:txBody>
+      </p:sp>
+      <p:sp>
+        <p:nvSpPr>
+          <p:cNvPr id="14" name="Shape 12"/>
+          <p:cNvSpPr/>
+          <p:nvPr/>
+        </p:nvSpPr>
+        <p:spPr>
+          <a:xfrm>
+            <a:off x="548640" y="4069080"/>
+            <a:ext cx="11064240" cy="1463040"/>
+          </a:xfrm>
+          <a:prstGeom prst="roundRect">
+            <a:avLst>
+              <a:gd name="adj" fmla="val 5000"/>
+            </a:avLst>
+          </a:prstGeom>
+          <a:solidFill>
+            <a:srgbClr val="FEF3C7"/>
+          </a:solidFill>
+          <a:ln/>
+        </p:spPr>
+        <p:txBody>
+          <a:bodyPr/>
+          <a:lstStyle/>
+          <a:p>
+            <a:endParaRPr lang="pt-BR" noProof="0" dirty="0"/>
+          </a:p>
+        </p:txBody>
+      </p:sp>
+      <p:sp>
+        <p:nvSpPr>
+          <p:cNvPr id="15" name="Text 13"/>
+          <p:cNvSpPr/>
+          <p:nvPr/>
+        </p:nvSpPr>
+        <p:spPr>
+          <a:xfrm>
+            <a:off x="777240" y="4206240"/>
+            <a:ext cx="10607040" cy="320040"/>
+          </a:xfrm>
+          <a:prstGeom prst="rect">
+            <a:avLst/>
+          </a:prstGeom>
+          <a:noFill/>
+          <a:ln/>
+        </p:spPr>
+        <p:txBody>
+          <a:bodyPr wrap="square" lIns="0" tIns="0" rIns="0" bIns="0" rtlCol="0" anchor="ctr"/>
+          <a:lstStyle/>
+          <a:p>
+            <a:pPr marL="0" indent="0">
+              <a:buNone/>
+            </a:pPr>
+            <a:r>
+              <a:rPr lang="pt-BR" sz="1300" b="1" noProof="0" dirty="0">
+                <a:solidFill>
+                  <a:srgbClr val="B45309"/>
+                </a:solidFill>
+              </a:rPr>
+              <a:t>Auditoria e recuperação de ponta a ponta</a:t>
+            </a:r>
+            <a:endParaRPr lang="pt-BR" sz="1300" noProof="0" dirty="0"/>
+          </a:p>
+        </p:txBody>
+      </p:sp>
+      <p:sp>
+        <p:nvSpPr>
+          <p:cNvPr id="16" name="Text 14"/>
+          <p:cNvSpPr/>
+          <p:nvPr/>
+        </p:nvSpPr>
+        <p:spPr>
+          <a:xfrm>
+            <a:off x="777240" y="4572000"/>
+            <a:ext cx="10607040" cy="868680"/>
+          </a:xfrm>
+          <a:prstGeom prst="rect">
+            <a:avLst/>
+          </a:prstGeom>
+          <a:noFill/>
+          <a:ln/>
+        </p:spPr>
+        <p:txBody>
+          <a:bodyPr wrap="square" lIns="0" tIns="0" rIns="0" bIns="0" rtlCol="0" anchor="ctr"/>
+          <a:lstStyle/>
+          <a:p>
+            <a:pPr marL="0" indent="0">
+              <a:lnSpc>
+                <a:spcPct val="120000"/>
+              </a:lnSpc>
+              <a:buNone/>
+            </a:pPr>
+            <a:r>
+              <a:rPr lang="pt-BR" sz="1300" noProof="0" dirty="0">
+                <a:solidFill>
+                  <a:srgbClr val="1A1A1A"/>
+                </a:solidFill>
+              </a:rPr>
+              <a:t>A combinação de _ingestão_ts na Bronze, DESCRIBE HISTORY no Delta e quality_log na Silver responde as três perguntas de governança: de onde veio o dado, o que foi feito com ele e quando. Isso é o fundamento técnico que ferramentas de Data Governance expõem visualmente.</a:t>
+            </a:r>
+            <a:endParaRPr lang="pt-BR" sz="1300" noProof="0" dirty="0"/>
+          </a:p>
+        </p:txBody>
+      </p:sp>
+      <p:sp>
+        <p:nvSpPr>
+          <p:cNvPr id="17" name="Text 15"/>
+          <p:cNvSpPr/>
+          <p:nvPr/>
+        </p:nvSpPr>
+        <p:spPr>
+          <a:xfrm>
+            <a:off x="457200" y="6492240"/>
+            <a:ext cx="5486400" cy="274320"/>
+          </a:xfrm>
+          <a:prstGeom prst="rect">
+            <a:avLst/>
+          </a:prstGeom>
+          <a:noFill/>
+          <a:ln/>
+        </p:spPr>
+        <p:txBody>
+          <a:bodyPr wrap="square" lIns="0" tIns="0" rIns="0" bIns="0" rtlCol="0" anchor="ctr"/>
+          <a:lstStyle/>
+          <a:p>
+            <a:pPr marL="0" indent="0" algn="l">
+              <a:buNone/>
+            </a:pPr>
+            <a:r>
+              <a:rPr lang="pt-BR" sz="900" noProof="0" dirty="0">
+                <a:solidFill>
+                  <a:srgbClr val="8A8A8A"/>
+                </a:solidFill>
+              </a:rPr>
+              <a:t>Case Data Architect  |  iFood</a:t>
+            </a:r>
+            <a:endParaRPr lang="pt-BR" sz="900" noProof="0" dirty="0"/>
+          </a:p>
+        </p:txBody>
+      </p:sp>
+      <p:sp>
+        <p:nvSpPr>
+          <p:cNvPr id="18" name="Text 16"/>
+          <p:cNvSpPr/>
+          <p:nvPr/>
+        </p:nvSpPr>
+        <p:spPr>
+          <a:xfrm>
+            <a:off x="11247120" y="6492240"/>
+            <a:ext cx="457200" cy="274320"/>
+          </a:xfrm>
+          <a:prstGeom prst="rect">
+            <a:avLst/>
+          </a:prstGeom>
+          <a:noFill/>
+          <a:ln/>
+        </p:spPr>
+        <p:txBody>
+          <a:bodyPr wrap="square" lIns="0" tIns="0" rIns="0" bIns="0" rtlCol="0" anchor="ctr"/>
+          <a:lstStyle/>
+          <a:p>
+            <a:pPr marL="0" indent="0" algn="r">
+              <a:buNone/>
+            </a:pPr>
+            <a:r>
+              <a:rPr lang="pt-BR" sz="900" noProof="0" dirty="0">
+                <a:solidFill>
+                  <a:srgbClr val="8A8A8A"/>
+                </a:solidFill>
+              </a:rPr>
+              <a:t>8</a:t>
+            </a:r>
+            <a:endParaRPr lang="pt-BR" sz="900" noProof="0" dirty="0"/>
+          </a:p>
+        </p:txBody>
+      </p:sp>
+    </p:spTree>
+  </p:cSld>
+  <p:clrMapOvr>
+    <a:masterClrMapping/>
+  </p:clrMapOvr>
+</p:sld>
+</file>
+
+<file path=ppt/slides/slide9.xml><?xml version="1.0" encoding="utf-8"?>
+<p:sld xmlns:a="http://schemas.openxmlformats.org/drawingml/2006/main" xmlns:r="http://schemas.openxmlformats.org/officeDocument/2006/relationships" xmlns:p="http://schemas.openxmlformats.org/presentationml/2006/main">
+  <p:cSld name="Slide 9">
+    <p:bg>
+      <p:bgPr>
+        <a:solidFill>
+          <a:srgbClr val="FFFFFF"/>
+        </a:solidFill>
+        <a:effectLst/>
+      </p:bgPr>
+    </p:bg>
+    <p:spTree>
+      <p:nvGrpSpPr>
+        <p:cNvPr id="1" name=""/>
+        <p:cNvGrpSpPr/>
+        <p:nvPr/>
+      </p:nvGrpSpPr>
+      <p:grpSpPr>
+        <a:xfrm>
+          <a:off x="0" y="0"/>
+          <a:ext cx="0" cy="0"/>
+          <a:chOff x="0" y="0"/>
+          <a:chExt cx="0" cy="0"/>
+        </a:xfrm>
+      </p:grpSpPr>
+      <p:sp>
+        <p:nvSpPr>
+          <p:cNvPr id="2" name="Text 0"/>
+          <p:cNvSpPr/>
+          <p:nvPr/>
+        </p:nvSpPr>
+        <p:spPr>
+          <a:xfrm>
+            <a:off x="457200" y="384048"/>
+            <a:ext cx="8229600" cy="274320"/>
+          </a:xfrm>
+          <a:prstGeom prst="rect">
+            <a:avLst/>
+          </a:prstGeom>
+          <a:noFill/>
+          <a:ln/>
+        </p:spPr>
+        <p:txBody>
+          <a:bodyPr wrap="square" lIns="0" tIns="0" rIns="0" bIns="0" rtlCol="0" anchor="ctr"/>
+          <a:lstStyle/>
+          <a:p>
+            <a:pPr marL="0" indent="0">
+              <a:buNone/>
+            </a:pPr>
+            <a:r>
+              <a:rPr lang="pt-BR" sz="1100" b="1" kern="0" spc="300" noProof="0" dirty="0">
+                <a:solidFill>
+                  <a:srgbClr val="EA1D2C"/>
+                </a:solidFill>
+              </a:rPr>
+              <a:t>ETAPA 04 - GOVERNANCA</a:t>
+            </a:r>
+            <a:endParaRPr lang="pt-BR" sz="1100" noProof="0" dirty="0"/>
+          </a:p>
+        </p:txBody>
+      </p:sp>
+      <p:sp>
+        <p:nvSpPr>
+          <p:cNvPr id="3" name="Text 1"/>
+          <p:cNvSpPr/>
+          <p:nvPr/>
+        </p:nvSpPr>
+        <p:spPr>
+          <a:xfrm>
+            <a:off x="457200" y="713232"/>
+            <a:ext cx="11247120" cy="640080"/>
+          </a:xfrm>
+          <a:prstGeom prst="rect">
+            <a:avLst/>
+          </a:prstGeom>
+          <a:noFill/>
+          <a:ln/>
+        </p:spPr>
+        <p:txBody>
+          <a:bodyPr wrap="square" lIns="0" tIns="0" rIns="0" bIns="0" rtlCol="0" anchor="ctr"/>
+          <a:lstStyle/>
+          <a:p>
+            <a:pPr marL="0" indent="0">
+              <a:buNone/>
+            </a:pPr>
+            <a:r>
+              <a:rPr lang="pt-BR" sz="2500" b="1" noProof="0" dirty="0">
+                <a:solidFill>
+                  <a:srgbClr val="1A1A1A"/>
+                </a:solidFill>
+              </a:rPr>
+              <a:t>Classificação de sensibilidade (LGPD)</a:t>
+            </a:r>
+            <a:endParaRPr lang="pt-BR" sz="2500" noProof="0" dirty="0"/>
+          </a:p>
+        </p:txBody>
+      </p:sp>
+      <p:sp>
+        <p:nvSpPr>
+          <p:cNvPr id="4" name="Shape 2"/>
+          <p:cNvSpPr/>
+          <p:nvPr/>
+        </p:nvSpPr>
+        <p:spPr>
+          <a:xfrm>
+            <a:off x="8869680" y="384048"/>
+            <a:ext cx="2834640" cy="457200"/>
+          </a:xfrm>
+          <a:prstGeom prst="roundRect">
+            <a:avLst>
+              <a:gd name="adj" fmla="val 10000"/>
+            </a:avLst>
+          </a:prstGeom>
+          <a:solidFill>
+            <a:srgbClr val="1A1A1A"/>
+          </a:solidFill>
+          <a:ln/>
+        </p:spPr>
+        <p:txBody>
+          <a:bodyPr/>
+          <a:lstStyle/>
+          <a:p>
+            <a:endParaRPr lang="pt-BR" noProof="0" dirty="0"/>
+          </a:p>
+        </p:txBody>
+      </p:sp>
+      <p:sp>
+        <p:nvSpPr>
+          <p:cNvPr id="5" name="Text 3"/>
+          <p:cNvSpPr/>
+          <p:nvPr/>
+        </p:nvSpPr>
+        <p:spPr>
+          <a:xfrm>
+            <a:off x="8915400" y="384048"/>
+            <a:ext cx="2743200" cy="457200"/>
+          </a:xfrm>
+          <a:prstGeom prst="rect">
+            <a:avLst/>
+          </a:prstGeom>
+          <a:noFill/>
+          <a:ln/>
+        </p:spPr>
+        <p:txBody>
+          <a:bodyPr wrap="square" lIns="0" tIns="0" rIns="0" bIns="0" rtlCol="0" anchor="ctr"/>
+          <a:lstStyle/>
+          <a:p>
+            <a:pPr marL="0" indent="0" algn="ctr">
+              <a:buNone/>
+            </a:pPr>
+            <a:r>
+              <a:rPr lang="pt-BR" sz="1000" b="1" noProof="0" dirty="0">
+                <a:solidFill>
+                  <a:srgbClr val="EA1D2C"/>
+                </a:solidFill>
+              </a:rPr>
               <a:t>ARQUIVO 04   </a:t>
             </a:r>
             <a:r>
@@ -12064,14 +14502,14 @@
       </p:sp>
       <p:graphicFrame>
         <p:nvGraphicFramePr>
-          <p:cNvPr id="9" name="Table 0"/>
+          <p:cNvPr id="10" name="Table 0"/>
           <p:cNvGraphicFramePr>
             <a:graphicFrameLocks noGrp="1"/>
           </p:cNvGraphicFramePr>
           <p:nvPr>
             <p:extLst>
               <p:ext uri="{D42A27DB-BD31-4B8C-83A1-F6EECF244321}">
-                <p14:modId xmlns:p14="http://schemas.microsoft.com/office/powerpoint/2010/main" val="1303189781"/>
+                <p14:modId xmlns:p14="http://schemas.microsoft.com/office/powerpoint/2010/main" val="1588593331"/>
               </p:ext>
             </p:extLst>
           </p:nvPr>
@@ -14688,7 +17126,7 @@
       </p:sp>
       <p:sp>
         <p:nvSpPr>
-          <p:cNvPr id="6" name="Text 6"/>
+          <p:cNvPr id="9" name="Text 6"/>
           <p:cNvSpPr/>
           <p:nvPr/>
         </p:nvSpPr>
@@ -14719,7 +17157,7 @@
                   <a:srgbClr val="1A1A1A"/>
                 </a:solidFill>
               </a:rPr>
-              <a:t>total_amount e o único RESTRICTED (DADO_FINANCEIRO, LGPD Art. 5). Numa arquitetura real, não seria exposto na Gold sem controle de acesso via Unity Catalog e auditoria de cada consulta. Postura conservadora: num superapp, o campo equivalente seria diretamente sensível.</a:t>
+              <a:t>total_amount é o único RESTRICTED (DADO_FINANCEIRO, LGPD Art. 5). Numa arquitetura real, não seria exposto na Gold sem controle de acesso via Unity Catalog e auditoria de cada consulta. Postura conservadora: num superapp, o campo equivalente seria diretamente sensível.</a:t>
             </a:r>
             <a:endParaRPr lang="pt-BR" sz="1200" noProof="0" dirty="0"/>
           </a:p>
@@ -14727,7 +17165,7 @@
       </p:sp>
       <p:sp>
         <p:nvSpPr>
-          <p:cNvPr id="10" name="Text 7"/>
+          <p:cNvPr id="6" name="Text 7"/>
           <p:cNvSpPr/>
           <p:nvPr/>
         </p:nvSpPr>
@@ -14764,530 +17202,6 @@
       <p:sp>
         <p:nvSpPr>
           <p:cNvPr id="11" name="Text 8"/>
-          <p:cNvSpPr/>
-          <p:nvPr/>
-        </p:nvSpPr>
-        <p:spPr>
-          <a:xfrm>
-            <a:off x="11247120" y="6492240"/>
-            <a:ext cx="457200" cy="274320"/>
-          </a:xfrm>
-          <a:prstGeom prst="rect">
-            <a:avLst/>
-          </a:prstGeom>
-          <a:noFill/>
-          <a:ln/>
-        </p:spPr>
-        <p:txBody>
-          <a:bodyPr wrap="square" lIns="0" tIns="0" rIns="0" bIns="0" rtlCol="0" anchor="ctr"/>
-          <a:lstStyle/>
-          <a:p>
-            <a:pPr marL="0" indent="0" algn="r">
-              <a:buNone/>
-            </a:pPr>
-            <a:r>
-              <a:rPr lang="pt-BR" sz="900" noProof="0" dirty="0">
-                <a:solidFill>
-                  <a:srgbClr val="8A8A8A"/>
-                </a:solidFill>
-              </a:rPr>
-              <a:t>8</a:t>
-            </a:r>
-            <a:endParaRPr lang="pt-BR" sz="900" noProof="0" dirty="0"/>
-          </a:p>
-        </p:txBody>
-      </p:sp>
-    </p:spTree>
-  </p:cSld>
-  <p:clrMapOvr>
-    <a:masterClrMapping/>
-  </p:clrMapOvr>
-</p:sld>
-</file>
-
-<file path=ppt/slides/slide9.xml><?xml version="1.0" encoding="utf-8"?>
-<p:sld xmlns:a="http://schemas.openxmlformats.org/drawingml/2006/main" xmlns:r="http://schemas.openxmlformats.org/officeDocument/2006/relationships" xmlns:p="http://schemas.openxmlformats.org/presentationml/2006/main">
-  <p:cSld name="Slide 9">
-    <p:bg>
-      <p:bgPr>
-        <a:solidFill>
-          <a:srgbClr val="FFFFFF"/>
-        </a:solidFill>
-        <a:effectLst/>
-      </p:bgPr>
-    </p:bg>
-    <p:spTree>
-      <p:nvGrpSpPr>
-        <p:cNvPr id="1" name=""/>
-        <p:cNvGrpSpPr/>
-        <p:nvPr/>
-      </p:nvGrpSpPr>
-      <p:grpSpPr>
-        <a:xfrm>
-          <a:off x="0" y="0"/>
-          <a:ext cx="0" cy="0"/>
-          <a:chOff x="0" y="0"/>
-          <a:chExt cx="0" cy="0"/>
-        </a:xfrm>
-      </p:grpSpPr>
-      <p:sp>
-        <p:nvSpPr>
-          <p:cNvPr id="2" name="Text 0"/>
-          <p:cNvSpPr/>
-          <p:nvPr/>
-        </p:nvSpPr>
-        <p:spPr>
-          <a:xfrm>
-            <a:off x="457200" y="384048"/>
-            <a:ext cx="8229600" cy="274320"/>
-          </a:xfrm>
-          <a:prstGeom prst="rect">
-            <a:avLst/>
-          </a:prstGeom>
-          <a:noFill/>
-          <a:ln/>
-        </p:spPr>
-        <p:txBody>
-          <a:bodyPr wrap="square" lIns="0" tIns="0" rIns="0" bIns="0" rtlCol="0" anchor="ctr"/>
-          <a:lstStyle/>
-          <a:p>
-            <a:pPr marL="0" indent="0">
-              <a:buNone/>
-            </a:pPr>
-            <a:r>
-              <a:rPr lang="pt-BR" sz="1100" b="1" kern="0" spc="300" noProof="0" dirty="0">
-                <a:solidFill>
-                  <a:srgbClr val="EA1D2C"/>
-                </a:solidFill>
-              </a:rPr>
-              <a:t>ETAPA ANALYSIS - PERGUNTA 1</a:t>
-            </a:r>
-            <a:endParaRPr lang="pt-BR" sz="1100" noProof="0" dirty="0"/>
-          </a:p>
-        </p:txBody>
-      </p:sp>
-      <p:sp>
-        <p:nvSpPr>
-          <p:cNvPr id="3" name="Text 1"/>
-          <p:cNvSpPr/>
-          <p:nvPr/>
-        </p:nvSpPr>
-        <p:spPr>
-          <a:xfrm>
-            <a:off x="457200" y="713232"/>
-            <a:ext cx="11247120" cy="640080"/>
-          </a:xfrm>
-          <a:prstGeom prst="rect">
-            <a:avLst/>
-          </a:prstGeom>
-          <a:noFill/>
-          <a:ln/>
-        </p:spPr>
-        <p:txBody>
-          <a:bodyPr wrap="square" lIns="0" tIns="0" rIns="0" bIns="0" rtlCol="0" anchor="ctr"/>
-          <a:lstStyle/>
-          <a:p>
-            <a:pPr marL="0" indent="0">
-              <a:buNone/>
-            </a:pPr>
-            <a:r>
-              <a:rPr lang="pt-BR" sz="2500" b="1" noProof="0" dirty="0">
-                <a:solidFill>
-                  <a:srgbClr val="1A1A1A"/>
-                </a:solidFill>
-              </a:rPr>
-              <a:t>Faturamento por mês</a:t>
-            </a:r>
-            <a:endParaRPr lang="pt-BR" sz="2500" noProof="0" dirty="0"/>
-          </a:p>
-        </p:txBody>
-      </p:sp>
-      <p:sp>
-        <p:nvSpPr>
-          <p:cNvPr id="4" name="Shape 2"/>
-          <p:cNvSpPr/>
-          <p:nvPr/>
-        </p:nvSpPr>
-        <p:spPr>
-          <a:xfrm>
-            <a:off x="8869680" y="384048"/>
-            <a:ext cx="2834640" cy="457200"/>
-          </a:xfrm>
-          <a:prstGeom prst="roundRect">
-            <a:avLst>
-              <a:gd name="adj" fmla="val 10000"/>
-            </a:avLst>
-          </a:prstGeom>
-          <a:solidFill>
-            <a:srgbClr val="1A1A1A"/>
-          </a:solidFill>
-          <a:ln/>
-        </p:spPr>
-        <p:txBody>
-          <a:bodyPr/>
-          <a:lstStyle/>
-          <a:p>
-            <a:endParaRPr lang="pt-BR" noProof="0" dirty="0"/>
-          </a:p>
-        </p:txBody>
-      </p:sp>
-      <p:sp>
-        <p:nvSpPr>
-          <p:cNvPr id="5" name="Text 3"/>
-          <p:cNvSpPr/>
-          <p:nvPr/>
-        </p:nvSpPr>
-        <p:spPr>
-          <a:xfrm>
-            <a:off x="8915400" y="384048"/>
-            <a:ext cx="2743200" cy="457200"/>
-          </a:xfrm>
-          <a:prstGeom prst="rect">
-            <a:avLst/>
-          </a:prstGeom>
-          <a:noFill/>
-          <a:ln/>
-        </p:spPr>
-        <p:txBody>
-          <a:bodyPr wrap="square" lIns="0" tIns="0" rIns="0" bIns="0" rtlCol="0" anchor="ctr"/>
-          <a:lstStyle/>
-          <a:p>
-            <a:pPr marL="0" indent="0" algn="ctr">
-              <a:buNone/>
-            </a:pPr>
-            <a:r>
-              <a:rPr lang="pt-BR" sz="1000" b="1" noProof="0" dirty="0">
-                <a:solidFill>
-                  <a:srgbClr val="EA1D2C"/>
-                </a:solidFill>
-              </a:rPr>
-              <a:t>ARQUIVO analysis   </a:t>
-            </a:r>
-            <a:r>
-              <a:rPr lang="pt-BR" sz="1000" noProof="0" dirty="0">
-                <a:solidFill>
-                  <a:srgbClr val="FFFFFF"/>
-                </a:solidFill>
-              </a:rPr>
-              <a:t>analysis</a:t>
-            </a:r>
-            <a:endParaRPr lang="pt-BR" sz="1000" noProof="0" dirty="0"/>
-          </a:p>
-        </p:txBody>
-      </p:sp>
-      <p:sp>
-        <p:nvSpPr>
-          <p:cNvPr id="6" name="Text 4"/>
-          <p:cNvSpPr/>
-          <p:nvPr/>
-        </p:nvSpPr>
-        <p:spPr>
-          <a:xfrm>
-            <a:off x="457200" y="1463040"/>
-            <a:ext cx="10972800" cy="365760"/>
-          </a:xfrm>
-          <a:prstGeom prst="rect">
-            <a:avLst/>
-          </a:prstGeom>
-          <a:noFill/>
-          <a:ln/>
-        </p:spPr>
-        <p:txBody>
-          <a:bodyPr wrap="square" lIns="0" tIns="0" rIns="0" bIns="0" rtlCol="0" anchor="ctr"/>
-          <a:lstStyle/>
-          <a:p>
-            <a:pPr marL="0" indent="0">
-              <a:buNone/>
-            </a:pPr>
-            <a:r>
-              <a:rPr lang="pt-BR" sz="1200" noProof="0" dirty="0">
-                <a:solidFill>
-                  <a:srgbClr val="5A5A5A"/>
-                </a:solidFill>
-              </a:rPr>
-              <a:t>Media do valor por corrida (total_amount), por mês - todos os yellow taxis</a:t>
-            </a:r>
-            <a:endParaRPr lang="pt-BR" sz="1200" noProof="0" dirty="0"/>
-          </a:p>
-        </p:txBody>
-      </p:sp>
-      <p:graphicFrame>
-        <p:nvGraphicFramePr>
-          <p:cNvPr id="7" name="Chart 0"/>
-          <p:cNvGraphicFramePr/>
-          <p:nvPr/>
-        </p:nvGraphicFramePr>
-        <p:xfrm>
-          <a:off x="548640" y="1965960"/>
-          <a:ext cx="6858000" cy="3566160"/>
-        </p:xfrm>
-        <a:graphic>
-          <a:graphicData uri="http://schemas.openxmlformats.org/drawingml/2006/chart">
-            <c:chart xmlns:c="http://schemas.openxmlformats.org/drawingml/2006/chart" xmlns:r="http://schemas.openxmlformats.org/officeDocument/2006/relationships" r:id="rId3"/>
-          </a:graphicData>
-        </a:graphic>
-      </p:graphicFrame>
-      <p:sp>
-        <p:nvSpPr>
-          <p:cNvPr id="8" name="Shape 5"/>
-          <p:cNvSpPr/>
-          <p:nvPr/>
-        </p:nvSpPr>
-        <p:spPr>
-          <a:xfrm>
-            <a:off x="7772400" y="1965960"/>
-            <a:ext cx="3840480" cy="1691640"/>
-          </a:xfrm>
-          <a:prstGeom prst="roundRect">
-            <a:avLst>
-              <a:gd name="adj" fmla="val 4324"/>
-            </a:avLst>
-          </a:prstGeom>
-          <a:solidFill>
-            <a:srgbClr val="FDECEA"/>
-          </a:solidFill>
-          <a:ln/>
-        </p:spPr>
-        <p:txBody>
-          <a:bodyPr/>
-          <a:lstStyle/>
-          <a:p>
-            <a:endParaRPr lang="pt-BR" noProof="0" dirty="0"/>
-          </a:p>
-        </p:txBody>
-      </p:sp>
-      <p:sp>
-        <p:nvSpPr>
-          <p:cNvPr id="9" name="Text 6"/>
-          <p:cNvSpPr/>
-          <p:nvPr/>
-        </p:nvSpPr>
-        <p:spPr>
-          <a:xfrm>
-            <a:off x="7772400" y="2148840"/>
-            <a:ext cx="3840480" cy="731520"/>
-          </a:xfrm>
-          <a:prstGeom prst="rect">
-            <a:avLst/>
-          </a:prstGeom>
-          <a:noFill/>
-          <a:ln/>
-        </p:spPr>
-        <p:txBody>
-          <a:bodyPr wrap="square" lIns="0" tIns="0" rIns="0" bIns="0" rtlCol="0" anchor="ctr"/>
-          <a:lstStyle/>
-          <a:p>
-            <a:pPr marL="0" indent="0" algn="ctr">
-              <a:buNone/>
-            </a:pPr>
-            <a:r>
-              <a:rPr lang="pt-BR" sz="4000" b="1" noProof="0" dirty="0">
-                <a:solidFill>
-                  <a:srgbClr val="EA1D2C"/>
-                </a:solidFill>
-              </a:rPr>
-              <a:t>+7,2%</a:t>
-            </a:r>
-            <a:endParaRPr lang="pt-BR" sz="4000" noProof="0" dirty="0"/>
-          </a:p>
-        </p:txBody>
-      </p:sp>
-      <p:sp>
-        <p:nvSpPr>
-          <p:cNvPr id="10" name="Text 7"/>
-          <p:cNvSpPr/>
-          <p:nvPr/>
-        </p:nvSpPr>
-        <p:spPr>
-          <a:xfrm>
-            <a:off x="7772400" y="2926080"/>
-            <a:ext cx="3840480" cy="548640"/>
-          </a:xfrm>
-          <a:prstGeom prst="rect">
-            <a:avLst/>
-          </a:prstGeom>
-          <a:noFill/>
-          <a:ln/>
-        </p:spPr>
-        <p:txBody>
-          <a:bodyPr wrap="square" lIns="0" tIns="0" rIns="0" bIns="0" rtlCol="0" anchor="ctr"/>
-          <a:lstStyle/>
-          <a:p>
-            <a:pPr marL="0" indent="0" algn="ctr">
-              <a:buNone/>
-            </a:pPr>
-            <a:r>
-              <a:rPr lang="pt-BR" sz="1200" noProof="0" dirty="0">
-                <a:solidFill>
-                  <a:srgbClr val="1A1A1A"/>
-                </a:solidFill>
-              </a:rPr>
-              <a:t>alta do ticket médio de jan a mai</a:t>
-            </a:r>
-            <a:endParaRPr lang="pt-BR" sz="1200" noProof="0" dirty="0"/>
-          </a:p>
-        </p:txBody>
-      </p:sp>
-      <p:sp>
-        <p:nvSpPr>
-          <p:cNvPr id="11" name="Shape 8"/>
-          <p:cNvSpPr/>
-          <p:nvPr/>
-        </p:nvSpPr>
-        <p:spPr>
-          <a:xfrm>
-            <a:off x="7772400" y="3840480"/>
-            <a:ext cx="3840480" cy="1691640"/>
-          </a:xfrm>
-          <a:prstGeom prst="roundRect">
-            <a:avLst>
-              <a:gd name="adj" fmla="val 4324"/>
-            </a:avLst>
-          </a:prstGeom>
-          <a:solidFill>
-            <a:srgbClr val="1A1A1A"/>
-          </a:solidFill>
-          <a:ln/>
-        </p:spPr>
-        <p:txBody>
-          <a:bodyPr/>
-          <a:lstStyle/>
-          <a:p>
-            <a:endParaRPr lang="pt-BR" noProof="0" dirty="0"/>
-          </a:p>
-        </p:txBody>
-      </p:sp>
-      <p:sp>
-        <p:nvSpPr>
-          <p:cNvPr id="12" name="Text 9"/>
-          <p:cNvSpPr/>
-          <p:nvPr/>
-        </p:nvSpPr>
-        <p:spPr>
-          <a:xfrm>
-            <a:off x="7772400" y="4069080"/>
-            <a:ext cx="3840480" cy="640080"/>
-          </a:xfrm>
-          <a:prstGeom prst="rect">
-            <a:avLst/>
-          </a:prstGeom>
-          <a:noFill/>
-          <a:ln/>
-        </p:spPr>
-        <p:txBody>
-          <a:bodyPr wrap="square" lIns="0" tIns="0" rIns="0" bIns="0" rtlCol="0" anchor="ctr"/>
-          <a:lstStyle/>
-          <a:p>
-            <a:pPr marL="0" indent="0" algn="ctr">
-              <a:buNone/>
-            </a:pPr>
-            <a:r>
-              <a:rPr lang="pt-BR" sz="3000" b="1" noProof="0" dirty="0">
-                <a:solidFill>
-                  <a:srgbClr val="FFFFFF"/>
-                </a:solidFill>
-              </a:rPr>
-              <a:t>US$ 86,8 mi</a:t>
-            </a:r>
-            <a:endParaRPr lang="pt-BR" sz="3000" noProof="0" dirty="0"/>
-          </a:p>
-        </p:txBody>
-      </p:sp>
-      <p:sp>
-        <p:nvSpPr>
-          <p:cNvPr id="13" name="Text 10"/>
-          <p:cNvSpPr/>
-          <p:nvPr/>
-        </p:nvSpPr>
-        <p:spPr>
-          <a:xfrm>
-            <a:off x="7772400" y="4709160"/>
-            <a:ext cx="3840480" cy="640080"/>
-          </a:xfrm>
-          <a:prstGeom prst="rect">
-            <a:avLst/>
-          </a:prstGeom>
-          <a:noFill/>
-          <a:ln/>
-        </p:spPr>
-        <p:txBody>
-          <a:bodyPr wrap="square" lIns="0" tIns="0" rIns="0" bIns="0" rtlCol="0" anchor="ctr"/>
-          <a:lstStyle/>
-          <a:p>
-            <a:pPr marL="0" indent="0" algn="ctr">
-              <a:lnSpc>
-                <a:spcPct val="110000"/>
-              </a:lnSpc>
-              <a:buNone/>
-            </a:pPr>
-            <a:r>
-              <a:rPr lang="pt-BR" sz="1200" noProof="0" dirty="0">
-                <a:solidFill>
-                  <a:srgbClr val="CFCFCF"/>
-                </a:solidFill>
-              </a:rPr>
-              <a:t>receita media mensal da frota</a:t>
-            </a:r>
-            <a:endParaRPr lang="pt-BR" sz="1200" noProof="0" dirty="0"/>
-          </a:p>
-          <a:p>
-            <a:pPr marL="0" indent="0" algn="ctr">
-              <a:lnSpc>
-                <a:spcPct val="110000"/>
-              </a:lnSpc>
-              <a:buNone/>
-            </a:pPr>
-            <a:r>
-              <a:rPr lang="pt-BR" sz="1200" noProof="0" dirty="0">
-                <a:solidFill>
-                  <a:srgbClr val="CFCFCF"/>
-                </a:solidFill>
-              </a:rPr>
-              <a:t>(interpretação alternativa)</a:t>
-            </a:r>
-            <a:endParaRPr lang="pt-BR" sz="1200" noProof="0" dirty="0"/>
-          </a:p>
-        </p:txBody>
-      </p:sp>
-      <p:sp>
-        <p:nvSpPr>
-          <p:cNvPr id="14" name="Text 11"/>
-          <p:cNvSpPr/>
-          <p:nvPr/>
-        </p:nvSpPr>
-        <p:spPr>
-          <a:xfrm>
-            <a:off x="457200" y="6492240"/>
-            <a:ext cx="5486400" cy="274320"/>
-          </a:xfrm>
-          <a:prstGeom prst="rect">
-            <a:avLst/>
-          </a:prstGeom>
-          <a:noFill/>
-          <a:ln/>
-        </p:spPr>
-        <p:txBody>
-          <a:bodyPr wrap="square" lIns="0" tIns="0" rIns="0" bIns="0" rtlCol="0" anchor="ctr"/>
-          <a:lstStyle/>
-          <a:p>
-            <a:pPr marL="0" indent="0" algn="l">
-              <a:buNone/>
-            </a:pPr>
-            <a:r>
-              <a:rPr lang="pt-BR" sz="900" noProof="0" dirty="0">
-                <a:solidFill>
-                  <a:srgbClr val="8A8A8A"/>
-                </a:solidFill>
-              </a:rPr>
-              <a:t>Case Data Architect  |  iFood</a:t>
-            </a:r>
-            <a:endParaRPr lang="pt-BR" sz="900" noProof="0" dirty="0"/>
-          </a:p>
-        </p:txBody>
-      </p:sp>
-      <p:sp>
-        <p:nvSpPr>
-          <p:cNvPr id="15" name="Text 12"/>
           <p:cNvSpPr/>
           <p:nvPr/>
         </p:nvSpPr>
@@ -15941,6 +17855,6 @@
 
 <file path=docMetadata/LabelInfo.xml><?xml version="1.0" encoding="utf-8"?>
 <clbl:labelList xmlns:clbl="http://schemas.microsoft.com/office/2020/mipLabelMetadata">
-  <clbl:label id="{4cde0bb8-21e0-4ae3-9906-7ac25165b779}" enabled="1" method="Privileged" siteId="{d852d5cd-724c-4128-8812-ffa5db3f8507}" contentBits="0" removed="0"/>
+  <clbl:label id="{725ca717-11da-4935-b601-f527b9741f2e}" enabled="1" method="Privileged" siteId="{d852d5cd-724c-4128-8812-ffa5db3f8507}" contentBits="0" removed="0"/>
 </clbl:labelList>
 </file>